--- a/docs/content/correlation_linear_models/correlation_linear_models_lecture.pptx
+++ b/docs/content/correlation_linear_models/correlation_linear_models_lecture.pptx
@@ -39,6 +39,12 @@
     <p:sldId id="287" r:id="rId33"/>
     <p:sldId id="288" r:id="rId34"/>
     <p:sldId id="289" r:id="rId35"/>
+    <p:sldId id="290" r:id="rId36"/>
+    <p:sldId id="291" r:id="rId37"/>
+    <p:sldId id="292" r:id="rId38"/>
+    <p:sldId id="293" r:id="rId39"/>
+    <p:sldId id="294" r:id="rId40"/>
+    <p:sldId id="295" r:id="rId41"/>
   </p:sldIdLst>
   <p:sldSz cx="9144000" cy="5143500" type="screen16x9"/>
   <p:notesSz cx="6858000" cy="9144000"/>
@@ -3326,7 +3332,7 @@
             </a:pPr>
             <a:r>
               <a:rPr/>
-              <a:t>Correlation vs Linear Models</a:t>
+              <a:t>Lecture: Correlation vs Linear Models</a:t>
             </a:r>
           </a:p>
         </p:txBody>
@@ -3416,104 +3422,161 @@
               <a:buNone/>
             </a:pPr>
             <a:r>
-              <a:rPr b="1"/>
-              <a:t>Lecture 9:</a:t>
-            </a:r>
-            <a:r>
-              <a:rPr/>
-              <a:t> Correlation Analysis</a:t>
-            </a:r>
-          </a:p>
-        </p:txBody>
-      </p:sp>
-      <p:sp>
-        <p:nvSpPr>
-          <p:cNvPr id="3" name="Content Placeholder 2"/>
-          <p:cNvSpPr>
-            <a:spLocks noGrp="1"/>
-          </p:cNvSpPr>
-          <p:nvPr>
-            <p:ph idx="1" sz="half"/>
-          </p:nvPr>
-        </p:nvSpPr>
-        <p:spPr/>
-        <p:txBody>
-          <a:bodyPr/>
-          <a:lstStyle/>
-          <a:p>
-            <a:pPr lvl="0" indent="0" marL="0">
-              <a:spcBef>
-                <a:spcPts val="3000"/>
-              </a:spcBef>
-              <a:buNone/>
-            </a:pPr>
-            <a:r>
-              <a:rPr b="1"/>
-              <a:t>Testing Assumptions for Correlation</a:t>
-            </a:r>
-          </a:p>
-          <a:p>
-            <a:pPr lvl="0" indent="0" marL="0">
-              <a:buNone/>
-            </a:pPr>
-            <a:r>
-              <a:rPr/>
-              <a:t>As described in Section 16.3, correlation analysis has key assumptions:</a:t>
-            </a:r>
-          </a:p>
-          <a:p>
-            <a:pPr lvl="0" indent="-342900" marL="342900">
-              <a:buAutoNum type="arabicPeriod"/>
-            </a:pPr>
-            <a:r>
-              <a:rPr b="1"/>
-              <a:t>Random sampling</a:t>
-            </a:r>
-            <a:r>
-              <a:rPr/>
-              <a:t>: Observations should be a random sample from the population</a:t>
-            </a:r>
-          </a:p>
-          <a:p>
-            <a:pPr lvl="0" indent="-342900" marL="342900">
-              <a:buAutoNum type="arabicPeriod"/>
-            </a:pPr>
-            <a:r>
-              <a:rPr b="1"/>
-              <a:t>Bivariate normality</a:t>
-            </a:r>
-            <a:r>
-              <a:rPr/>
-              <a:t>: Both variables follow a normal distribution, and their joint distribution is bivariate normal</a:t>
-            </a:r>
-          </a:p>
-          <a:p>
-            <a:pPr lvl="0" indent="-342900" marL="342900">
-              <a:buAutoNum type="arabicPeriod"/>
-            </a:pPr>
-            <a:r>
-              <a:rPr b="1"/>
-              <a:t>Linear relationship</a:t>
-            </a:r>
-            <a:r>
-              <a:rPr/>
-              <a:t>: The relationship between variables is linear, not curved</a:t>
-            </a:r>
-          </a:p>
-          <a:p>
-            <a:pPr lvl="0" indent="0" marL="0">
-              <a:buNone/>
-            </a:pPr>
-            <a:r>
-              <a:rPr/>
-              <a:t>Let’s check these assumptions using the booby data</a:t>
-            </a:r>
-          </a:p>
-        </p:txBody>
-      </p:sp>
+              <a:rPr/>
+              <a:t>Example 16.1: Interpretation</a:t>
+            </a:r>
+          </a:p>
+        </p:txBody>
+      </p:sp>
+      <mc:AlternateContent xmlns:mc="http://schemas.openxmlformats.org/markup-compatibility/2006">
+        <mc:Choice xmlns:a14="http://schemas.microsoft.com/office/drawing/2010/main" Requires="a14">
+          <p:sp>
+            <p:nvSpPr>
+              <p:cNvPr id="3" name="Content Placeholder 2"/>
+              <p:cNvSpPr>
+                <a:spLocks noGrp="1"/>
+              </p:cNvSpPr>
+              <p:nvPr>
+                <p:ph idx="1" sz="half"/>
+              </p:nvPr>
+            </p:nvSpPr>
+            <p:spPr/>
+            <p:txBody>
+              <a:bodyPr/>
+              <a:lstStyle/>
+              <a:p>
+                <a:pPr lvl="0" indent="0" marL="0">
+                  <a:buNone/>
+                </a:pPr>
+                <a:r>
+                  <a:rPr b="1"/>
+                  <a:t>Interpretation:</a:t>
+                </a:r>
+                <a:r>
+                  <a:rPr/>
+                  <a:t> the correlation coefficient of r = 0.534 suggests that Nazca boobies who experienced more visits from non-parent adults as nestlings tend to display more aggressive behavior as adults. This supports the hypothesis that early experiences influence adult behavior patterns in this species.</a:t>
+                </a:r>
+              </a:p>
+              <a:p>
+                <a:pPr lvl="0" indent="0" marL="0">
+                  <a:buNone/>
+                </a:pPr>
+                <a:r>
+                  <a:rPr b="1"/>
+                  <a:t>Standard error:</a:t>
+                </a:r>
+              </a:p>
+              <a:p>
+                <a:pPr lvl="0" indent="0" marL="0">
+                  <a:buNone/>
+                </a:pPr>
+                <a14:m>
+                  <m:oMathPara xmlns:m="http://schemas.openxmlformats.org/officeDocument/2006/math">
+                    <m:oMathParaPr>
+                      <m:jc m:val="center"/>
+                    </m:oMathParaPr>
+                    <m:oMath>
+                      <m:sSub>
+                        <m:e>
+                          <m:r>
+                            <m:rPr>
+                              <m:nor/>
+                              <m:sty m:val="p"/>
+                            </m:rPr>
+                            <m:t>SE</m:t>
+                          </m:r>
+                        </m:e>
+                        <m:sub>
+                          <m:r>
+                            <m:t>r</m:t>
+                          </m:r>
+                        </m:sub>
+                      </m:sSub>
+                      <m:r>
+                        <m:rPr>
+                          <m:sty m:val="p"/>
+                        </m:rPr>
+                        <m:t>=</m:t>
+                      </m:r>
+                      <m:rad>
+                        <m:radPr>
+                          <m:degHide m:val="on"/>
+                        </m:radPr>
+                        <m:deg/>
+                        <m:e>
+                          <m:f>
+                            <m:fPr>
+                              <m:type m:val="bar"/>
+                            </m:fPr>
+                            <m:num>
+                              <m:r>
+                                <m:t>1</m:t>
+                              </m:r>
+                              <m:r>
+                                <m:rPr>
+                                  <m:sty m:val="p"/>
+                                </m:rPr>
+                                <m:t>−</m:t>
+                              </m:r>
+                              <m:sSup>
+                                <m:e>
+                                  <m:r>
+                                    <m:t>r</m:t>
+                                  </m:r>
+                                </m:e>
+                                <m:sup>
+                                  <m:r>
+                                    <m:t>2</m:t>
+                                  </m:r>
+                                </m:sup>
+                              </m:sSup>
+                            </m:num>
+                            <m:den>
+                              <m:r>
+                                <m:t>n</m:t>
+                              </m:r>
+                              <m:r>
+                                <m:rPr>
+                                  <m:sty m:val="p"/>
+                                </m:rPr>
+                                <m:t>−</m:t>
+                              </m:r>
+                              <m:r>
+                                <m:t>2</m:t>
+                              </m:r>
+                            </m:den>
+                          </m:f>
+                        </m:e>
+                      </m:rad>
+                    </m:oMath>
+                  </m:oMathPara>
+                </a14:m>
+              </a:p>
+              <a:p>
+                <a:pPr lvl="0" indent="0" marL="0">
+                  <a:buNone/>
+                </a:pPr>
+                <a:r>
+                  <a:rPr/>
+                  <a:t>SE = 0.180</a:t>
+                </a:r>
+              </a:p>
+              <a:p>
+                <a:pPr lvl="0" indent="0" marL="0">
+                  <a:buNone/>
+                </a:pPr>
+                <a:r>
+                  <a:rPr/>
+                  <a:t>Need to be sure the relationship is not curved — see below.</a:t>
+                </a:r>
+              </a:p>
+            </p:txBody>
+          </p:sp>
+        </mc:Choice>
+      </mc:AlternateContent>
       <p:pic>
         <p:nvPicPr>
-          <p:cNvPr descr="correlation_linear_models_lecture_files/figure-pptx/overview-plot-1m-1.png" id="0" name="Picture 1"/>
+          <p:cNvPr descr="correlation_linear_models_lecture_files/figure-pptx/unnamed-chunk-6-1.png" id="0" name="Picture 1"/>
           <p:cNvPicPr>
             <a:picLocks noGrp="1" noChangeAspect="1"/>
           </p:cNvPicPr>
@@ -3576,7 +3639,7 @@
         <p:spPr>
           <a:xfrm>
             <a:off x="0" y="0"/>
-            <a:ext cx="9144000" cy="871538"/>
+            <a:ext cx="9144000" cy="582780"/>
           </a:xfrm>
         </p:spPr>
         <p:txBody>
@@ -3587,24 +3650,20 @@
               <a:buNone/>
             </a:pPr>
             <a:r>
-              <a:rPr b="1"/>
-              <a:t>Lecture 9:</a:t>
-            </a:r>
-            <a:r>
-              <a:rPr/>
-              <a:t> Correlation Analysis</a:t>
-            </a:r>
-          </a:p>
-        </p:txBody>
-      </p:sp>
-      <p:sp>
-        <p:nvSpPr>
-          <p:cNvPr id="4" name="Text Placeholder 3"/>
-          <p:cNvSpPr>
-            <a:spLocks noGrp="1"/>
-          </p:cNvSpPr>
-          <p:nvPr>
-            <p:ph idx="2" sz="half" type="body"/>
+              <a:rPr/>
+              <a:t>Testing Assumptions for Correlation</a:t>
+            </a:r>
+          </a:p>
+        </p:txBody>
+      </p:sp>
+      <p:sp>
+        <p:nvSpPr>
+          <p:cNvPr id="3" name="Content Placeholder 2"/>
+          <p:cNvSpPr>
+            <a:spLocks noGrp="1"/>
+          </p:cNvSpPr>
+          <p:nvPr>
+            <p:ph idx="1"/>
           </p:nvPr>
         </p:nvSpPr>
         <p:spPr/>
@@ -3612,84 +3671,29 @@
           <a:bodyPr/>
           <a:lstStyle/>
           <a:p>
-            <a:pPr lvl="0" indent="0" marL="0">
-              <a:spcBef>
-                <a:spcPts val="3000"/>
-              </a:spcBef>
+            <a:pPr lvl="0" indent="0" marL="1270000">
               <a:buNone/>
             </a:pPr>
             <a:r>
-              <a:rPr b="1"/>
-              <a:t>What to do if assumptions are violated:</a:t>
-            </a:r>
-          </a:p>
-          <a:p>
-            <a:pPr lvl="0" indent="0" marL="0">
+              <a:rPr sz="2000" b="1"/>
+              <a:t>Note</a:t>
+            </a:r>
+          </a:p>
+          <a:p>
+            <a:pPr lvl="0" indent="0" marL="1270000">
               <a:buNone/>
             </a:pPr>
             <a:r>
-              <a:rPr/>
-              <a:t>Transform one or both variables (log, square root, etc.)</a:t>
-            </a:r>
-          </a:p>
-          <a:p>
-            <a:pPr lvl="0" indent="0" marL="0">
-              <a:buNone/>
-            </a:pPr>
-            <a:r>
-              <a:rPr/>
-              <a:t>Use non-parametric correlation (</a:t>
-            </a:r>
-            <a:r>
-              <a:rPr b="1"/>
-              <a:t>Spearman’s rank correlation</a:t>
-            </a:r>
-            <a:r>
-              <a:rPr/>
-              <a:t>) or Kendall’s tau 𝛕</a:t>
-            </a:r>
-          </a:p>
-          <a:p>
-            <a:pPr lvl="0" indent="0" marL="0">
-              <a:buNone/>
-            </a:pPr>
-            <a:r>
-              <a:rPr/>
-              <a:t>Examine the data for outliers or influential points</a:t>
-            </a:r>
-          </a:p>
-        </p:txBody>
-      </p:sp>
-      <p:pic>
-        <p:nvPicPr>
-          <p:cNvPr descr="correlation_linear_models_lecture_files/figure-pptx/overview-plot-2m-1.png" id="0" name="Picture 1"/>
-          <p:cNvPicPr>
-            <a:picLocks noGrp="1" noChangeAspect="1"/>
-          </p:cNvPicPr>
-          <p:nvPr/>
-        </p:nvPicPr>
-        <p:blipFill>
-          <a:blip r:embed="rId2"/>
-          <a:stretch>
-            <a:fillRect/>
-          </a:stretch>
-        </p:blipFill>
-        <p:spPr bwMode="auto">
-          <a:xfrm>
-            <a:off x="3657600" y="1244600"/>
-            <a:ext cx="5232400" cy="3225800"/>
-          </a:xfrm>
-          <a:prstGeom prst="rect">
-            <a:avLst/>
-          </a:prstGeom>
-          <a:noFill/>
-          <a:ln w="9525">
-            <a:noFill/>
-            <a:headEnd/>
-            <a:tailEnd/>
-          </a:ln>
-        </p:spPr>
-      </p:pic>
+              <a:rPr sz="2000" b="1"/>
+              <a:t>🔮 Predict first:</a:t>
+            </a:r>
+            <a:r>
+              <a:rPr sz="2000"/>
+              <a:t> We’re about to run Shapiro-Wilk on both booby variables, then look at their histograms and QQ plots. If the formal test and the visual check disagree, which would you trust more for n = 24?</a:t>
+            </a:r>
+          </a:p>
+        </p:txBody>
+      </p:sp>
     </p:spTree>
   </p:cSld>
 </p:sld>
@@ -3714,20 +3718,15 @@
       </p:grpSpPr>
       <p:sp>
         <p:nvSpPr>
-          <p:cNvPr id="2" name="Title 1"/>
-          <p:cNvSpPr>
-            <a:spLocks noGrp="1"/>
-          </p:cNvSpPr>
-          <p:nvPr>
-            <p:ph type="title"/>
-          </p:nvPr>
-        </p:nvSpPr>
-        <p:spPr>
-          <a:xfrm>
-            <a:off x="0" y="0"/>
-            <a:ext cx="9144000" cy="582780"/>
-          </a:xfrm>
-        </p:spPr>
+          <p:cNvPr id="3" name="Content Placeholder 2"/>
+          <p:cNvSpPr>
+            <a:spLocks noGrp="1"/>
+          </p:cNvSpPr>
+          <p:nvPr>
+            <p:ph idx="1" sz="half"/>
+          </p:nvPr>
+        </p:nvSpPr>
+        <p:spPr/>
         <p:txBody>
           <a:bodyPr/>
           <a:lstStyle/>
@@ -3736,66 +3735,74 @@
               <a:buNone/>
             </a:pPr>
             <a:r>
+              <a:rPr/>
+              <a:t>As described in Section 16.3, correlation analysis has key assumptions:</a:t>
+            </a:r>
+          </a:p>
+          <a:p>
+            <a:pPr lvl="0" indent="-342900" marL="342900">
+              <a:buAutoNum type="arabicPeriod"/>
+            </a:pPr>
+            <a:r>
               <a:rPr b="1"/>
-              <a:t>Lecture 9:</a:t>
-            </a:r>
-            <a:r>
-              <a:rPr/>
-              <a:t> Correlation Analysis</a:t>
-            </a:r>
-          </a:p>
-        </p:txBody>
-      </p:sp>
-      <p:sp>
-        <p:nvSpPr>
-          <p:cNvPr id="3" name="Content Placeholder 2"/>
-          <p:cNvSpPr>
-            <a:spLocks noGrp="1"/>
-          </p:cNvSpPr>
-          <p:nvPr>
-            <p:ph idx="1"/>
+              <a:t>Random sampling</a:t>
+            </a:r>
+            <a:r>
+              <a:rPr/>
+              <a:t> — observations should be a random sample from the population</a:t>
+            </a:r>
+          </a:p>
+          <a:p>
+            <a:pPr lvl="0" indent="-342900" marL="342900">
+              <a:buAutoNum type="arabicPeriod"/>
+            </a:pPr>
+            <a:r>
+              <a:rPr b="1"/>
+              <a:t>Bivariate normality</a:t>
+            </a:r>
+            <a:r>
+              <a:rPr/>
+              <a:t> — both variables follow a normal distribution, and their joint distribution is bivariate normal</a:t>
+            </a:r>
+          </a:p>
+          <a:p>
+            <a:pPr lvl="0" indent="-342900" marL="342900">
+              <a:buAutoNum type="arabicPeriod"/>
+            </a:pPr>
+            <a:r>
+              <a:rPr b="1"/>
+              <a:t>Linear relationship</a:t>
+            </a:r>
+            <a:r>
+              <a:rPr/>
+              <a:t> — the relationship between variables is linear, not curved</a:t>
+            </a:r>
+          </a:p>
+          <a:p>
+            <a:pPr lvl="0" indent="0" marL="0">
+              <a:buNone/>
+            </a:pPr>
+            <a:r>
+              <a:rPr/>
+              <a:t>Let’s check these assumptions with the booby data.</a:t>
+            </a:r>
+          </a:p>
+        </p:txBody>
+      </p:sp>
+      <p:sp>
+        <p:nvSpPr>
+          <p:cNvPr id="4" name="Content Placeholder 3"/>
+          <p:cNvSpPr>
+            <a:spLocks noGrp="1"/>
+          </p:cNvSpPr>
+          <p:nvPr>
+            <p:ph idx="2" sz="half"/>
           </p:nvPr>
         </p:nvSpPr>
         <p:spPr/>
         <p:txBody>
           <a:bodyPr/>
           <a:lstStyle/>
-          <a:p>
-            <a:pPr lvl="0" indent="0" marL="0">
-              <a:buNone/>
-            </a:pPr>
-            <a:r>
-              <a:rPr/>
-              <a:t>To understand the amount of variation explained, you can square the non parametric Spearman’s rho value.</a:t>
-            </a:r>
-          </a:p>
-          <a:p>
-            <a:pPr lvl="0" indent="0" marL="0">
-              <a:buNone/>
-            </a:pPr>
-            <a:r>
-              <a:rPr/>
-              <a:t>For your value of 0.74485:</a:t>
-            </a:r>
-          </a:p>
-          <a:p>
-            <a:pPr lvl="0" indent="0" marL="0">
-              <a:buNone/>
-            </a:pPr>
-            <a:r>
-              <a:rPr/>
-              <a:t>ρ² = 0.74485² = 0.5548</a:t>
-            </a:r>
-          </a:p>
-          <a:p>
-            <a:pPr lvl="0" indent="0" marL="0">
-              <a:buNone/>
-            </a:pPr>
-            <a:r>
-              <a:rPr/>
-              <a:t>This means approximately 55.48% of the variance in ranks of one variable can be explained by the ranks of the other variable. This is similar to how R² works in linear regression, but specifically for ranked data.</a:t>
-            </a:r>
-          </a:p>
           <a:p>
             <a:pPr lvl="0" indent="0">
               <a:buNone/>
@@ -3805,13 +3812,23 @@
                 <a:latin typeface="Courier"/>
               </a:rPr>
               <a:t>
-    Spearman's rank correlation rho
-data:  lion_data$proportion_black and lion_data$age_years
-S = 1392.1, p-value = 1.013e-06
-alternative hypothesis: true rho is not equal to 0
-sample estimates:
-      rho 
-0.7448561 </a:t>
+    Shapiro-Wilk normality test
+data:  booby_data$visits_as_nestling
+W = 0.95783, p-value = 0.3965</a:t>
+            </a:r>
+          </a:p>
+          <a:p>
+            <a:pPr lvl="0" indent="0">
+              <a:buNone/>
+            </a:pPr>
+            <a:r>
+              <a:rPr>
+                <a:latin typeface="Courier"/>
+              </a:rPr>
+              <a:t>
+    Shapiro-Wilk normality test
+data:  booby_data$future_aggression
+W = 0.91575, p-value = 0.04709</a:t>
             </a:r>
           </a:p>
         </p:txBody>
@@ -3865,12 +3882,8 @@
               <a:buNone/>
             </a:pPr>
             <a:r>
-              <a:rPr b="1"/>
-              <a:t>Lecture 9:</a:t>
-            </a:r>
-            <a:r>
-              <a:rPr/>
-              <a:t> Correlation Analysis</a:t>
+              <a:rPr/>
+              <a:t>Testing Assumptions for Correlation — Visually</a:t>
             </a:r>
           </a:p>
         </p:txBody>
@@ -3891,150 +3904,66 @@
           <a:lstStyle/>
           <a:p>
             <a:pPr lvl="0" indent="0" marL="0">
-              <a:spcBef>
-                <a:spcPts val="3000"/>
-              </a:spcBef>
               <a:buNone/>
             </a:pPr>
             <a:r>
-              <a:rPr b="1"/>
-              <a:t>Correlation: Important Considerations</a:t>
-            </a:r>
-          </a:p>
-          <a:p>
-            <a:pPr lvl="0"/>
-            <a:r>
-              <a:rPr b="1"/>
-              <a:t>The correlation coefficient depends on the range</a:t>
-            </a:r>
-          </a:p>
-          <a:p>
-            <a:pPr lvl="1"/>
-            <a:r>
-              <a:rPr/>
-              <a:t>Restricting range of values can reduce the correlation coefficient</a:t>
-            </a:r>
-          </a:p>
-          <a:p>
-            <a:pPr lvl="1"/>
-            <a:r>
-              <a:rPr/>
-              <a:t>Comparing correlations between studies requires similar ranges of values</a:t>
-            </a:r>
-          </a:p>
-          <a:p>
-            <a:pPr lvl="0"/>
-            <a:r>
-              <a:rPr b="1"/>
-              <a:t>Measurement error affects correlation</a:t>
-            </a:r>
-          </a:p>
-          <a:p>
-            <a:pPr lvl="1"/>
-            <a:r>
-              <a:rPr/>
-              <a:t>Measurement error in X or Y tends to weaken observed correlation</a:t>
-            </a:r>
-          </a:p>
-          <a:p>
-            <a:pPr lvl="1"/>
-            <a:r>
-              <a:rPr/>
-              <a:t>This bias is called </a:t>
-            </a:r>
-            <a:r>
-              <a:rPr b="1"/>
-              <a:t>attenuation</a:t>
-            </a:r>
-          </a:p>
-          <a:p>
-            <a:pPr lvl="1"/>
-            <a:r>
-              <a:rPr/>
-              <a:t>True correlation typically stronger than observed correlation</a:t>
-            </a:r>
-          </a:p>
-          <a:p>
-            <a:pPr lvl="0"/>
-            <a:r>
-              <a:rPr b="1"/>
-              <a:t>Correlation vs. Causation</a:t>
-            </a:r>
-          </a:p>
-          <a:p>
-            <a:pPr lvl="1"/>
-            <a:r>
-              <a:rPr/>
-              <a:t>Correlation does not imply causation</a:t>
-            </a:r>
-          </a:p>
-          <a:p>
-            <a:pPr lvl="1"/>
-            <a:r>
-              <a:rPr/>
-              <a:t>Three possible explanations for correlation:</a:t>
-            </a:r>
-          </a:p>
-          <a:p>
-            <a:pPr lvl="2" indent="-342900" marL="1028700">
+              <a:rPr/>
+              <a:t>As described in Section 16.3, correlation analysis has key assumptions:</a:t>
+            </a:r>
+          </a:p>
+          <a:p>
+            <a:pPr lvl="0" indent="-342900" marL="342900">
               <a:buAutoNum type="arabicPeriod"/>
             </a:pPr>
             <a:r>
-              <a:rPr/>
-              <a:t>X causes Y</a:t>
-            </a:r>
-          </a:p>
-          <a:p>
-            <a:pPr lvl="2" indent="-342900" marL="1028700">
+              <a:rPr b="1"/>
+              <a:t>Random sampling</a:t>
+            </a:r>
+            <a:r>
+              <a:rPr/>
+              <a:t> — observations should be a random sample from the population</a:t>
+            </a:r>
+          </a:p>
+          <a:p>
+            <a:pPr lvl="0" indent="-342900" marL="342900">
               <a:buAutoNum type="arabicPeriod"/>
             </a:pPr>
             <a:r>
-              <a:rPr/>
-              <a:t>Y causes X</a:t>
-            </a:r>
-          </a:p>
-          <a:p>
-            <a:pPr lvl="2" indent="-342900" marL="1028700">
+              <a:rPr b="1"/>
+              <a:t>Bivariate normality</a:t>
+            </a:r>
+            <a:r>
+              <a:rPr/>
+              <a:t> — both variables follow a normal distribution, and their joint distribution is bivariate normal</a:t>
+            </a:r>
+          </a:p>
+          <a:p>
+            <a:pPr lvl="0" indent="-342900" marL="342900">
               <a:buAutoNum type="arabicPeriod"/>
             </a:pPr>
             <a:r>
-              <a:rPr/>
-              <a:t>Z (a third variable) causes both X and Y</a:t>
-            </a:r>
-          </a:p>
-          <a:p>
-            <a:pPr lvl="0"/>
-            <a:r>
               <a:rPr b="1"/>
-              <a:t>Correlation significance test</a:t>
-            </a:r>
-          </a:p>
-          <a:p>
-            <a:pPr lvl="1"/>
-            <a:r>
-              <a:rPr/>
-              <a:t>H₀: ρ = 0 (no correlation in population)</a:t>
-            </a:r>
-          </a:p>
-          <a:p>
-            <a:pPr lvl="1"/>
-            <a:r>
-              <a:rPr/>
-              <a:t>H₁: ρ ≠ 0 (correlation exists in population)</a:t>
-            </a:r>
-          </a:p>
-          <a:p>
-            <a:pPr lvl="1"/>
-            <a:r>
-              <a:rPr b="1"/>
-              <a:t>Test statistic: t = r / SE(r) with df = n-2</a:t>
+              <a:t>Linear relationship</a:t>
+            </a:r>
+            <a:r>
+              <a:rPr/>
+              <a:t> — the relationship between variables is linear, not curved</a:t>
+            </a:r>
+          </a:p>
+          <a:p>
+            <a:pPr lvl="0" indent="0" marL="0">
+              <a:buNone/>
+            </a:pPr>
+            <a:r>
+              <a:rPr/>
+              <a:t>Let’s check these assumptions using the booby data.</a:t>
             </a:r>
           </a:p>
         </p:txBody>
       </p:sp>
       <p:pic>
         <p:nvPicPr>
-          <p:cNvPr descr="correlation_linear_models_lecture_files/figure-pptx/overview-plot-1o-1.png" id="0" name="Picture 1"/>
+          <p:cNvPr descr="correlation_linear_models_lecture_files/figure-pptx/unnamed-chunk-8-1.png" id="0" name="Picture 1"/>
           <p:cNvPicPr>
             <a:picLocks noGrp="1" noChangeAspect="1"/>
           </p:cNvPicPr>
@@ -4048,8 +3977,8 @@
         </p:blipFill>
         <p:spPr bwMode="auto">
           <a:xfrm>
-            <a:off x="6121400" y="1155700"/>
-            <a:ext cx="2781300" cy="3479800"/>
+            <a:off x="6121400" y="1498600"/>
+            <a:ext cx="2781300" cy="2781300"/>
           </a:xfrm>
           <a:prstGeom prst="rect">
             <a:avLst/>
@@ -4111,12 +4040,175 @@
               <a:buNone/>
             </a:pPr>
             <a:r>
+              <a:rPr/>
+              <a:t>What to Do If Assumptions Are Violated</a:t>
+            </a:r>
+          </a:p>
+        </p:txBody>
+      </p:sp>
+      <p:sp>
+        <p:nvSpPr>
+          <p:cNvPr id="3" name="Content Placeholder 2"/>
+          <p:cNvSpPr>
+            <a:spLocks noGrp="1"/>
+          </p:cNvSpPr>
+          <p:nvPr>
+            <p:ph idx="1" sz="half"/>
+          </p:nvPr>
+        </p:nvSpPr>
+        <p:spPr/>
+        <p:txBody>
+          <a:bodyPr/>
+          <a:lstStyle/>
+          <a:p>
+            <a:pPr lvl="0"/>
+            <a:r>
+              <a:rPr/>
+              <a:t>Transform one or both variables (log, square root, etc.)</a:t>
+            </a:r>
+          </a:p>
+          <a:p>
+            <a:pPr lvl="0"/>
+            <a:r>
+              <a:rPr/>
+              <a:t>Use a non-parametric correlation (</a:t>
+            </a:r>
+            <a:r>
               <a:rPr b="1"/>
-              <a:t>Lecture 9:</a:t>
-            </a:r>
-            <a:r>
-              <a:rPr/>
-              <a:t> Linear Regression</a:t>
+              <a:t>Spearman’s rank correlation</a:t>
+            </a:r>
+            <a:r>
+              <a:rPr/>
+              <a:t>) or Kendall’s tau (τ)</a:t>
+            </a:r>
+          </a:p>
+          <a:p>
+            <a:pPr lvl="0"/>
+            <a:r>
+              <a:rPr/>
+              <a:t>Examine the data for outliers or influential points</a:t>
+            </a:r>
+          </a:p>
+          <a:p>
+            <a:pPr lvl="0" indent="0" marL="1270000">
+              <a:buNone/>
+            </a:pPr>
+            <a:r>
+              <a:rPr sz="2000" b="1"/>
+              <a:t>Tip</a:t>
+            </a:r>
+          </a:p>
+          <a:p>
+            <a:pPr lvl="0" indent="0" marL="1270000">
+              <a:buNone/>
+            </a:pPr>
+            <a:r>
+              <a:rPr sz="2000" b="1"/>
+              <a:t>🖐 Notice</a:t>
+            </a:r>
+          </a:p>
+          <a:p>
+            <a:pPr lvl="0" indent="0" marL="1270000">
+              <a:buNone/>
+            </a:pPr>
+            <a:r>
+              <a:rPr sz="2000"/>
+              <a:t>The lion nose-pigmentation data (used here just as an example of non-normal data) shows a right-skewed </a:t>
+            </a:r>
+            <a:r>
+              <a:rPr sz="2000">
+                <a:latin typeface="Courier"/>
+              </a:rPr>
+              <a:t>proportion_black</a:t>
+            </a:r>
+            <a:r>
+              <a:rPr sz="2000"/>
+              <a:t> and clearly non-normal QQ plots — this is exactly when Spearman’s is the better tool.</a:t>
+            </a:r>
+          </a:p>
+        </p:txBody>
+      </p:sp>
+      <p:pic>
+        <p:nvPicPr>
+          <p:cNvPr descr="correlation_linear_models_lecture_files/figure-pptx/unnamed-chunk-9-1.png" id="0" name="Picture 1"/>
+          <p:cNvPicPr>
+            <a:picLocks noGrp="1" noChangeAspect="1"/>
+          </p:cNvPicPr>
+          <p:nvPr/>
+        </p:nvPicPr>
+        <p:blipFill>
+          <a:blip r:embed="rId2"/>
+          <a:stretch>
+            <a:fillRect/>
+          </a:stretch>
+        </p:blipFill>
+        <p:spPr bwMode="auto">
+          <a:xfrm>
+            <a:off x="6121400" y="1498600"/>
+            <a:ext cx="2781300" cy="2781300"/>
+          </a:xfrm>
+          <a:prstGeom prst="rect">
+            <a:avLst/>
+          </a:prstGeom>
+          <a:noFill/>
+          <a:ln w="9525">
+            <a:noFill/>
+            <a:headEnd/>
+            <a:tailEnd/>
+          </a:ln>
+        </p:spPr>
+      </p:pic>
+    </p:spTree>
+  </p:cSld>
+</p:sld>
+</file>
+
+<file path=ppt/slides/slide15.xml><?xml version="1.0" encoding="utf-8"?>
+<p:sld xmlns:a="http://schemas.openxmlformats.org/drawingml/2006/main" xmlns:r="http://schemas.openxmlformats.org/officeDocument/2006/relationships" xmlns:p="http://schemas.openxmlformats.org/presentationml/2006/main">
+  <p:cSld>
+    <p:spTree>
+      <p:nvGrpSpPr>
+        <p:cNvPr id="1" name=""/>
+        <p:cNvGrpSpPr/>
+        <p:nvPr/>
+      </p:nvGrpSpPr>
+      <p:grpSpPr>
+        <a:xfrm>
+          <a:off x="0" y="0"/>
+          <a:ext cx="0" cy="0"/>
+          <a:chOff x="0" y="0"/>
+          <a:chExt cx="0" cy="0"/>
+        </a:xfrm>
+      </p:grpSpPr>
+      <p:sp>
+        <p:nvSpPr>
+          <p:cNvPr id="2" name="Title 1"/>
+          <p:cNvSpPr>
+            <a:spLocks noGrp="1"/>
+          </p:cNvSpPr>
+          <p:nvPr>
+            <p:ph type="title"/>
+          </p:nvPr>
+        </p:nvSpPr>
+        <p:spPr>
+          <a:xfrm>
+            <a:off x="0" y="0"/>
+            <a:ext cx="9144000" cy="602780"/>
+          </a:xfrm>
+          <a:solidFill>
+            <a:srgbClr val="70121D"/>
+          </a:solidFill>
+        </p:spPr>
+        <p:txBody>
+          <a:bodyPr/>
+          <a:lstStyle/>
+          <a:p>
+            <a:pPr lvl="0" indent="0" marL="0">
+              <a:buNone/>
+            </a:pPr>
+            <a:r>
+              <a:rPr/>
+              <a:t>Spearman’s Rho — Interpretation</a:t>
             </a:r>
           </a:p>
         </p:txBody>
@@ -4139,14 +4231,11 @@
               <a:lstStyle/>
               <a:p>
                 <a:pPr lvl="0" indent="0" marL="0">
-                  <a:spcBef>
-                    <a:spcPts val="3000"/>
-                  </a:spcBef>
                   <a:buNone/>
                 </a:pPr>
                 <a:r>
-                  <a:rPr b="1"/>
-                  <a:t>Simple Linear Regression Model</a:t>
+                  <a:rPr/>
+                  <a:t>To understand the amount of variation explained, you can square the non-parametric Spearman’s rho value.</a:t>
                 </a:r>
               </a:p>
               <a:p>
@@ -4154,18 +4243,454 @@
                   <a:buNone/>
                 </a:pPr>
                 <a:r>
-                  <a:rPr b="1"/>
-                  <a:t>Simple linear regression</a:t>
-                </a:r>
-                <a:r>
                   <a:rPr/>
-                  <a:t> models the relationship between a response variable (Y) and a predictor variable (X).</a:t>
+                  <a:t>For your value of 0.74485:</a:t>
                 </a:r>
               </a:p>
               <a:p>
                 <a:pPr lvl="0" indent="0" marL="0">
                   <a:buNone/>
                 </a:pPr>
+                <a14:m>
+                  <m:oMathPara xmlns:m="http://schemas.openxmlformats.org/officeDocument/2006/math">
+                    <m:oMathParaPr>
+                      <m:jc m:val="center"/>
+                    </m:oMathParaPr>
+                    <m:oMath>
+                      <m:sSup>
+                        <m:e>
+                          <m:r>
+                            <m:t>ρ</m:t>
+                          </m:r>
+                        </m:e>
+                        <m:sup>
+                          <m:r>
+                            <m:t>2</m:t>
+                          </m:r>
+                        </m:sup>
+                      </m:sSup>
+                      <m:r>
+                        <m:rPr>
+                          <m:sty m:val="p"/>
+                        </m:rPr>
+                        <m:t>=</m:t>
+                      </m:r>
+                      <m:sSup>
+                        <m:e>
+                          <m:r>
+                            <m:t>0.74485</m:t>
+                          </m:r>
+                        </m:e>
+                        <m:sup>
+                          <m:r>
+                            <m:t>2</m:t>
+                          </m:r>
+                        </m:sup>
+                      </m:sSup>
+                      <m:r>
+                        <m:rPr>
+                          <m:sty m:val="p"/>
+                        </m:rPr>
+                        <m:t>=</m:t>
+                      </m:r>
+                      <m:r>
+                        <m:t>0.5548</m:t>
+                      </m:r>
+                    </m:oMath>
+                  </m:oMathPara>
+                </a14:m>
+              </a:p>
+              <a:p>
+                <a:pPr lvl="0" indent="0" marL="0">
+                  <a:buNone/>
+                </a:pPr>
+                <a:r>
+                  <a:rPr/>
+                  <a:t>This means approximately 55.48% of the variance in the </a:t>
+                </a:r>
+                <a:r>
+                  <a:rPr i="1"/>
+                  <a:t>ranks</a:t>
+                </a:r>
+                <a:r>
+                  <a:rPr/>
+                  <a:t> of one variable can be explained by the ranks of the other. This is similar to how R² works in linear regression, but specifically for ranked data.</a:t>
+                </a:r>
+              </a:p>
+            </p:txBody>
+          </p:sp>
+        </mc:Choice>
+      </mc:AlternateContent>
+      <p:sp>
+        <p:nvSpPr>
+          <p:cNvPr id="4" name="Content Placeholder 3"/>
+          <p:cNvSpPr>
+            <a:spLocks noGrp="1"/>
+          </p:cNvSpPr>
+          <p:nvPr>
+            <p:ph idx="2" sz="half"/>
+          </p:nvPr>
+        </p:nvSpPr>
+        <p:spPr/>
+        <p:txBody>
+          <a:bodyPr/>
+          <a:lstStyle/>
+          <a:p>
+            <a:pPr lvl="0" indent="0">
+              <a:buNone/>
+            </a:pPr>
+            <a:r>
+              <a:rPr>
+                <a:latin typeface="Courier"/>
+              </a:rPr>
+              <a:t>
+    Spearman's rank correlation rho
+data:  lion_data$proportion_black and lion_data$age_years
+S = 1392.1, p-value = 1.013e-06
+alternative hypothesis: true rho is not equal to 0
+sample estimates:
+      rho 
+0.7448561 </a:t>
+            </a:r>
+          </a:p>
+        </p:txBody>
+      </p:sp>
+    </p:spTree>
+  </p:cSld>
+</p:sld>
+</file>
+
+<file path=ppt/slides/slide16.xml><?xml version="1.0" encoding="utf-8"?>
+<p:sld xmlns:a="http://schemas.openxmlformats.org/drawingml/2006/main" xmlns:r="http://schemas.openxmlformats.org/officeDocument/2006/relationships" xmlns:p="http://schemas.openxmlformats.org/presentationml/2006/main">
+  <p:cSld>
+    <p:spTree>
+      <p:nvGrpSpPr>
+        <p:cNvPr id="1" name=""/>
+        <p:cNvGrpSpPr/>
+        <p:nvPr/>
+      </p:nvGrpSpPr>
+      <p:grpSpPr>
+        <a:xfrm>
+          <a:off x="0" y="0"/>
+          <a:ext cx="0" cy="0"/>
+          <a:chOff x="0" y="0"/>
+          <a:chExt cx="0" cy="0"/>
+        </a:xfrm>
+      </p:grpSpPr>
+      <p:sp>
+        <p:nvSpPr>
+          <p:cNvPr id="2" name="Title 1"/>
+          <p:cNvSpPr>
+            <a:spLocks noGrp="1"/>
+          </p:cNvSpPr>
+          <p:nvPr>
+            <p:ph type="title"/>
+          </p:nvPr>
+        </p:nvSpPr>
+        <p:spPr>
+          <a:xfrm>
+            <a:off x="0" y="0"/>
+            <a:ext cx="9144000" cy="602780"/>
+          </a:xfrm>
+          <a:solidFill>
+            <a:srgbClr val="70121D"/>
+          </a:solidFill>
+        </p:spPr>
+        <p:txBody>
+          <a:bodyPr/>
+          <a:lstStyle/>
+          <a:p>
+            <a:pPr lvl="0" indent="0" marL="0">
+              <a:buNone/>
+            </a:pPr>
+            <a:r>
+              <a:rPr/>
+              <a:t>Correlation — Important Considerations</a:t>
+            </a:r>
+          </a:p>
+        </p:txBody>
+      </p:sp>
+      <p:sp>
+        <p:nvSpPr>
+          <p:cNvPr id="3" name="Content Placeholder 2"/>
+          <p:cNvSpPr>
+            <a:spLocks noGrp="1"/>
+          </p:cNvSpPr>
+          <p:nvPr>
+            <p:ph idx="1" sz="half"/>
+          </p:nvPr>
+        </p:nvSpPr>
+        <p:spPr/>
+        <p:txBody>
+          <a:bodyPr/>
+          <a:lstStyle/>
+          <a:p>
+            <a:pPr lvl="0"/>
+            <a:r>
+              <a:rPr b="1"/>
+              <a:t>The correlation coefficient depends on the range</a:t>
+            </a:r>
+          </a:p>
+          <a:p>
+            <a:pPr lvl="1"/>
+            <a:r>
+              <a:rPr/>
+              <a:t>Restricting the range of values can reduce the correlation coefficient</a:t>
+            </a:r>
+          </a:p>
+          <a:p>
+            <a:pPr lvl="1"/>
+            <a:r>
+              <a:rPr/>
+              <a:t>Comparing correlations between studies requires similar ranges of values</a:t>
+            </a:r>
+          </a:p>
+          <a:p>
+            <a:pPr lvl="0"/>
+            <a:r>
+              <a:rPr b="1"/>
+              <a:t>Measurement error affects correlation</a:t>
+            </a:r>
+          </a:p>
+          <a:p>
+            <a:pPr lvl="1"/>
+            <a:r>
+              <a:rPr/>
+              <a:t>Measurement error in X or Y tends to weaken observed correlation</a:t>
+            </a:r>
+          </a:p>
+          <a:p>
+            <a:pPr lvl="1"/>
+            <a:r>
+              <a:rPr/>
+              <a:t>This bias is called </a:t>
+            </a:r>
+            <a:r>
+              <a:rPr b="1"/>
+              <a:t>attenuation</a:t>
+            </a:r>
+          </a:p>
+          <a:p>
+            <a:pPr lvl="1"/>
+            <a:r>
+              <a:rPr/>
+              <a:t>True correlation is typically stronger than the observed correlation</a:t>
+            </a:r>
+          </a:p>
+          <a:p>
+            <a:pPr lvl="0"/>
+            <a:r>
+              <a:rPr b="1"/>
+              <a:t>Correlation vs. Causation</a:t>
+            </a:r>
+          </a:p>
+          <a:p>
+            <a:pPr lvl="1"/>
+            <a:r>
+              <a:rPr/>
+              <a:t>Correlation does not imply causation</a:t>
+            </a:r>
+          </a:p>
+          <a:p>
+            <a:pPr lvl="1"/>
+            <a:r>
+              <a:rPr/>
+              <a:t>Three possible explanations: (1) X causes Y, (2) Y causes X, (3) Z (a third variable) causes both X and Y</a:t>
+            </a:r>
+          </a:p>
+          <a:p>
+            <a:pPr lvl="0"/>
+            <a:r>
+              <a:rPr b="1"/>
+              <a:t>Correlation significance test</a:t>
+            </a:r>
+          </a:p>
+          <a:p>
+            <a:pPr lvl="1"/>
+            <a:r>
+              <a:rPr/>
+              <a:t>H₀: ρ = 0 (no correlation in population); H₁: ρ ≠ 0</a:t>
+            </a:r>
+          </a:p>
+          <a:p>
+            <a:pPr lvl="1"/>
+            <a:r>
+              <a:rPr/>
+              <a:t>Test statistic: t = r / SE(r), with df = n − 2</a:t>
+            </a:r>
+          </a:p>
+        </p:txBody>
+      </p:sp>
+      <p:pic>
+        <p:nvPicPr>
+          <p:cNvPr descr="correlation_linear_models_lecture_files/figure-pptx/unnamed-chunk-11-1.png" id="0" name="Picture 1"/>
+          <p:cNvPicPr>
+            <a:picLocks noGrp="1" noChangeAspect="1"/>
+          </p:cNvPicPr>
+          <p:nvPr/>
+        </p:nvPicPr>
+        <p:blipFill>
+          <a:blip r:embed="rId2"/>
+          <a:stretch>
+            <a:fillRect/>
+          </a:stretch>
+        </p:blipFill>
+        <p:spPr bwMode="auto">
+          <a:xfrm>
+            <a:off x="6121400" y="1041400"/>
+            <a:ext cx="2781300" cy="3708400"/>
+          </a:xfrm>
+          <a:prstGeom prst="rect">
+            <a:avLst/>
+          </a:prstGeom>
+          <a:noFill/>
+          <a:ln w="9525">
+            <a:noFill/>
+            <a:headEnd/>
+            <a:tailEnd/>
+          </a:ln>
+        </p:spPr>
+      </p:pic>
+    </p:spTree>
+  </p:cSld>
+</p:sld>
+</file>
+
+<file path=ppt/slides/slide17.xml><?xml version="1.0" encoding="utf-8"?>
+<p:sld xmlns:a="http://schemas.openxmlformats.org/drawingml/2006/main" xmlns:r="http://schemas.openxmlformats.org/officeDocument/2006/relationships" xmlns:p="http://schemas.openxmlformats.org/presentationml/2006/main">
+  <p:cSld>
+    <p:spTree>
+      <p:nvGrpSpPr>
+        <p:cNvPr id="1" name=""/>
+        <p:cNvGrpSpPr/>
+        <p:nvPr/>
+      </p:nvGrpSpPr>
+      <p:grpSpPr>
+        <a:xfrm>
+          <a:off x="0" y="0"/>
+          <a:ext cx="0" cy="0"/>
+          <a:chOff x="0" y="0"/>
+          <a:chExt cx="0" cy="0"/>
+        </a:xfrm>
+      </p:grpSpPr>
+      <p:sp>
+        <p:nvSpPr>
+          <p:cNvPr id="2" name="Title 1"/>
+          <p:cNvSpPr>
+            <a:spLocks noGrp="1"/>
+          </p:cNvSpPr>
+          <p:nvPr>
+            <p:ph type="title"/>
+          </p:nvPr>
+        </p:nvSpPr>
+        <p:spPr>
+          <a:xfrm>
+            <a:off x="0" y="0"/>
+            <a:ext cx="9144000" cy="582780"/>
+          </a:xfrm>
+        </p:spPr>
+        <p:txBody>
+          <a:bodyPr/>
+          <a:lstStyle/>
+          <a:p>
+            <a:pPr lvl="0" indent="0" marL="0">
+              <a:buNone/>
+            </a:pPr>
+            <a:r>
+              <a:rPr/>
+              <a:t>Part 4 · Linear Regression — the Model</a:t>
+            </a:r>
+          </a:p>
+        </p:txBody>
+      </p:sp>
+    </p:spTree>
+  </p:cSld>
+</p:sld>
+</file>
+
+<file path=ppt/slides/slide18.xml><?xml version="1.0" encoding="utf-8"?>
+<p:sld xmlns:a="http://schemas.openxmlformats.org/drawingml/2006/main" xmlns:r="http://schemas.openxmlformats.org/officeDocument/2006/relationships" xmlns:p="http://schemas.openxmlformats.org/presentationml/2006/main">
+  <p:cSld>
+    <p:spTree>
+      <p:nvGrpSpPr>
+        <p:cNvPr id="1" name=""/>
+        <p:cNvGrpSpPr/>
+        <p:nvPr/>
+      </p:nvGrpSpPr>
+      <p:grpSpPr>
+        <a:xfrm>
+          <a:off x="0" y="0"/>
+          <a:ext cx="0" cy="0"/>
+          <a:chOff x="0" y="0"/>
+          <a:chExt cx="0" cy="0"/>
+        </a:xfrm>
+      </p:grpSpPr>
+      <p:sp>
+        <p:nvSpPr>
+          <p:cNvPr id="2" name="Title 1"/>
+          <p:cNvSpPr>
+            <a:spLocks noGrp="1"/>
+          </p:cNvSpPr>
+          <p:nvPr>
+            <p:ph type="title"/>
+          </p:nvPr>
+        </p:nvSpPr>
+        <p:spPr>
+          <a:xfrm>
+            <a:off x="0" y="0"/>
+            <a:ext cx="9144000" cy="602780"/>
+          </a:xfrm>
+          <a:solidFill>
+            <a:srgbClr val="70121D"/>
+          </a:solidFill>
+        </p:spPr>
+        <p:txBody>
+          <a:bodyPr/>
+          <a:lstStyle/>
+          <a:p>
+            <a:pPr lvl="0" indent="0" marL="0">
+              <a:buNone/>
+            </a:pPr>
+            <a:r>
+              <a:rPr/>
+              <a:t>The Simple Linear Regression Model</a:t>
+            </a:r>
+          </a:p>
+        </p:txBody>
+      </p:sp>
+      <mc:AlternateContent xmlns:mc="http://schemas.openxmlformats.org/markup-compatibility/2006">
+        <mc:Choice xmlns:a14="http://schemas.microsoft.com/office/drawing/2010/main" Requires="a14">
+          <p:sp>
+            <p:nvSpPr>
+              <p:cNvPr id="3" name="Content Placeholder 2"/>
+              <p:cNvSpPr>
+                <a:spLocks noGrp="1"/>
+              </p:cNvSpPr>
+              <p:nvPr>
+                <p:ph idx="1" sz="half"/>
+              </p:nvPr>
+            </p:nvSpPr>
+            <p:spPr/>
+            <p:txBody>
+              <a:bodyPr/>
+              <a:lstStyle/>
+              <a:p>
+                <a:pPr lvl="0" indent="0" marL="0">
+                  <a:buNone/>
+                </a:pPr>
+                <a:r>
+                  <a:rPr b="1"/>
+                  <a:t>Simple linear regression</a:t>
+                </a:r>
+                <a:r>
+                  <a:rPr/>
+                  <a:t> models the relationship between a response variable (Y) and a predictor variable (X).</a:t>
+                </a:r>
+              </a:p>
+              <a:p>
+                <a:pPr lvl="0" indent="0" marL="0">
+                  <a:buNone/>
+                </a:pPr>
                 <a:r>
                   <a:rPr/>
                   <a:t>The </a:t>
@@ -4176,7 +4701,7 @@
                 </a:r>
                 <a:r>
                   <a:rPr/>
-                  <a:t> regression model </a:t>
+                  <a:t> regression model: </a:t>
                 </a:r>
                 <a14:m>
                   <m:oMath xmlns:m="http://schemas.openxmlformats.org/officeDocument/2006/math">
@@ -4220,39 +4745,32 @@
                 <a:pPr lvl="0"/>
                 <a:r>
                   <a:rPr/>
-                  <a:t>Where:</a:t>
+                  <a:t>Y is the response variable</a:t>
                 </a:r>
               </a:p>
               <a:p>
-                <a:pPr lvl="1"/>
+                <a:pPr lvl="0"/>
                 <a:r>
                   <a:rPr/>
-                  <a:t>Y is the response variable</a:t>
+                  <a:t>X is the predictor variable</a:t>
                 </a:r>
               </a:p>
               <a:p>
-                <a:pPr lvl="1"/>
+                <a:pPr lvl="0"/>
                 <a:r>
                   <a:rPr/>
-                  <a:t>X is the predictor variable</a:t>
+                  <a:t>α (alpha) is the intercept (value of Y when X = 0)</a:t>
                 </a:r>
               </a:p>
               <a:p>
-                <a:pPr lvl="1"/>
+                <a:pPr lvl="0"/>
                 <a:r>
                   <a:rPr/>
-                  <a:t>α (alpha) is the intercept (value of Y when X=0)</a:t>
+                  <a:t>β (beta) is the slope (change in Y per unit change in X)</a:t>
                 </a:r>
               </a:p>
               <a:p>
-                <a:pPr lvl="1"/>
-                <a:r>
-                  <a:rPr/>
-                  <a:t>β (beta) is the slope (change in Y per unit change in X)</a:t>
-                </a:r>
-              </a:p>
-              <a:p>
-                <a:pPr lvl="1"/>
+                <a:pPr lvl="0"/>
                 <a:r>
                   <a:rPr/>
                   <a:t>ε (epsilon) is the error term (random deviation from the line)</a:t>
@@ -4272,7 +4790,7 @@
                 </a:r>
                 <a:r>
                   <a:rPr/>
-                  <a:t> regression equation is: </a:t>
+                  <a:t> regression equation: </a:t>
                 </a:r>
                 <a14:m>
                   <m:oMath xmlns:m="http://schemas.openxmlformats.org/officeDocument/2006/math">
@@ -4312,13 +4830,6 @@
               </a:p>
               <a:p>
                 <a:pPr lvl="0"/>
-                <a:r>
-                  <a:rPr/>
-                  <a:t>Where:</a:t>
-                </a:r>
-              </a:p>
-              <a:p>
-                <a:pPr lvl="1"/>
                 <a14:m>
                   <m:oMath xmlns:m="http://schemas.openxmlformats.org/officeDocument/2006/math">
                     <m:acc>
@@ -4335,21 +4846,7 @@
                 </a14:m>
                 <a:r>
                   <a:rPr/>
-                  <a:t> is the predicted value of Y</a:t>
-                </a:r>
-              </a:p>
-              <a:p>
-                <a:pPr lvl="1"/>
-                <a:r>
-                  <a:rPr/>
-                  <a:t>a is the estimate of α (intercept)</a:t>
-                </a:r>
-              </a:p>
-              <a:p>
-                <a:pPr lvl="1"/>
-                <a:r>
-                  <a:rPr/>
-                  <a:t>b is the estimate of β (slope)</a:t>
+                  <a:t> is the predicted value of Y; a estimates α; b estimates β</a:t>
                 </a:r>
               </a:p>
               <a:p>
@@ -4358,11 +4855,38 @@
                 </a:pPr>
                 <a:r>
                   <a:rPr b="1"/>
-                  <a:t>Method of Least Squares</a:t>
+                  <a:t>Method of least squares:</a:t>
                 </a:r>
                 <a:r>
                   <a:rPr/>
-                  <a:t>: The line is chosen to minimize the sum of squared vertical distances (residuals) between observed and predicted Y values.</a:t>
+                  <a:t> the line is chosen to minimize the sum of squared vertical distances (residuals) between observed and predicted Y values.</a:t>
+                </a:r>
+              </a:p>
+              <a:p>
+                <a:pPr lvl="0" indent="0" marL="1270000">
+                  <a:buNone/>
+                </a:pPr>
+                <a:r>
+                  <a:rPr sz="2000" b="1"/>
+                  <a:t>Note</a:t>
+                </a:r>
+              </a:p>
+              <a:p>
+                <a:pPr lvl="0" indent="0" marL="1270000">
+                  <a:buNone/>
+                </a:pPr>
+                <a:r>
+                  <a:rPr sz="2000" b="1"/>
+                  <a:t>📖 Reference</a:t>
+                </a:r>
+              </a:p>
+              <a:p>
+                <a:pPr lvl="0" indent="0" marL="1270000">
+                  <a:buNone/>
+                </a:pPr>
+                <a:r>
+                  <a:rPr sz="2000"/>
+                  <a:t>Whitlock &amp; Schluter, Ch. 17 — Regression, is the primary reference for the rest of this lecture.</a:t>
                 </a:r>
               </a:p>
             </p:txBody>
@@ -4404,7 +4928,7 @@
 </p:sld>
 </file>
 
-<file path=ppt/slides/slide15.xml><?xml version="1.0" encoding="utf-8"?>
+<file path=ppt/slides/slide19.xml><?xml version="1.0" encoding="utf-8"?>
 <p:sld xmlns:a="http://schemas.openxmlformats.org/drawingml/2006/main" xmlns:r="http://schemas.openxmlformats.org/officeDocument/2006/relationships" xmlns:p="http://schemas.openxmlformats.org/presentationml/2006/main">
   <p:cSld>
     <p:spTree>
@@ -4448,12 +4972,8 @@
               <a:buNone/>
             </a:pPr>
             <a:r>
-              <a:rPr b="1"/>
-              <a:t>Lecture 9:</a:t>
-            </a:r>
-            <a:r>
-              <a:rPr/>
-              <a:t> Linear Regression</a:t>
+              <a:rPr/>
+              <a:t>The Simple Linear Regression Model — the Lion Data</a:t>
             </a:r>
           </a:p>
         </p:txBody>
@@ -4476,14 +4996,15 @@
               <a:lstStyle/>
               <a:p>
                 <a:pPr lvl="0" indent="0" marL="0">
-                  <a:spcBef>
-                    <a:spcPts val="3000"/>
-                  </a:spcBef>
                   <a:buNone/>
                 </a:pPr>
                 <a:r>
                   <a:rPr b="1"/>
-                  <a:t>Simple Linear Regression Model</a:t>
+                  <a:t>Simple linear regression</a:t>
+                </a:r>
+                <a:r>
+                  <a:rPr/>
+                  <a:t> models the relationship between a response variable (Y) and a predictor variable (X).</a:t>
                 </a:r>
               </a:p>
               <a:p>
@@ -4491,19 +5012,6 @@
                   <a:buNone/>
                 </a:pPr>
                 <a:r>
-                  <a:rPr b="1"/>
-                  <a:t>Simple linear regression</a:t>
-                </a:r>
-                <a:r>
-                  <a:rPr/>
-                  <a:t> models the relationship between a response variable (Y) and a predictor variable (X).</a:t>
-                </a:r>
-              </a:p>
-              <a:p>
-                <a:pPr lvl="0" indent="0" marL="0">
-                  <a:buNone/>
-                </a:pPr>
-                <a:r>
                   <a:rPr/>
                   <a:t>The </a:t>
                 </a:r>
@@ -4513,7 +5021,7 @@
                 </a:r>
                 <a:r>
                   <a:rPr/>
-                  <a:t> regression model is: </a:t>
+                  <a:t> regression model: </a:t>
                 </a:r>
                 <a14:m>
                   <m:oMath xmlns:m="http://schemas.openxmlformats.org/officeDocument/2006/math">
@@ -4554,48 +5062,6 @@
                 </a14:m>
               </a:p>
               <a:p>
-                <a:pPr lvl="0"/>
-                <a:r>
-                  <a:rPr/>
-                  <a:t>Where:</a:t>
-                </a:r>
-              </a:p>
-              <a:p>
-                <a:pPr lvl="1"/>
-                <a:r>
-                  <a:rPr/>
-                  <a:t>Y is the response variable</a:t>
-                </a:r>
-              </a:p>
-              <a:p>
-                <a:pPr lvl="1"/>
-                <a:r>
-                  <a:rPr/>
-                  <a:t>X is the predictor variable</a:t>
-                </a:r>
-              </a:p>
-              <a:p>
-                <a:pPr lvl="1"/>
-                <a:r>
-                  <a:rPr/>
-                  <a:t>α (alpha) is the intercept (value of Y when X=0)</a:t>
-                </a:r>
-              </a:p>
-              <a:p>
-                <a:pPr lvl="1"/>
-                <a:r>
-                  <a:rPr/>
-                  <a:t>β (beta) is the slope (change in Y per unit change in X)</a:t>
-                </a:r>
-              </a:p>
-              <a:p>
-                <a:pPr lvl="1"/>
-                <a:r>
-                  <a:rPr/>
-                  <a:t>ε (epsilon) is the error term (random deviation from the line)</a:t>
-                </a:r>
-              </a:p>
-              <a:p>
                 <a:pPr lvl="0" indent="0" marL="0">
                   <a:buNone/>
                 </a:pPr>
@@ -4609,7 +5075,7 @@
                 </a:r>
                 <a:r>
                   <a:rPr/>
-                  <a:t> regression equation is: </a:t>
+                  <a:t> regression equation: </a:t>
                 </a:r>
                 <a14:m>
                   <m:oMath xmlns:m="http://schemas.openxmlformats.org/officeDocument/2006/math">
@@ -4648,58 +5114,16 @@
                 </a14:m>
               </a:p>
               <a:p>
-                <a:pPr lvl="0"/>
-                <a:r>
-                  <a:rPr/>
-                  <a:t>Where:</a:t>
-                </a:r>
-              </a:p>
-              <a:p>
-                <a:pPr lvl="1"/>
-                <a14:m>
-                  <m:oMath xmlns:m="http://schemas.openxmlformats.org/officeDocument/2006/math">
-                    <m:acc>
-                      <m:accPr>
-                        <m:chr m:val="̂"/>
-                      </m:accPr>
-                      <m:e>
-                        <m:r>
-                          <m:t>Y</m:t>
-                        </m:r>
-                      </m:e>
-                    </m:acc>
-                  </m:oMath>
-                </a14:m>
-                <a:r>
-                  <a:rPr/>
-                  <a:t> is the predicted value of Y</a:t>
-                </a:r>
-              </a:p>
-              <a:p>
-                <a:pPr lvl="1"/>
-                <a:r>
-                  <a:rPr/>
-                  <a:t>a is the estimate of α (intercept)</a:t>
-                </a:r>
-              </a:p>
-              <a:p>
-                <a:pPr lvl="1"/>
-                <a:r>
-                  <a:rPr/>
-                  <a:t>b is the estimate of β (slope)</a:t>
-                </a:r>
-              </a:p>
-              <a:p>
                 <a:pPr lvl="0" indent="0" marL="0">
                   <a:buNone/>
                 </a:pPr>
                 <a:r>
                   <a:rPr b="1"/>
-                  <a:t>Method of Least Squares</a:t>
+                  <a:t>Method of least squares:</a:t>
                 </a:r>
                 <a:r>
                   <a:rPr/>
-                  <a:t>: The line is chosen to minimize the sum of squared vertical distances (residuals) between observed and predicted Y values.</a:t>
+                  <a:t> the line is chosen to minimize the sum of squared vertical distances (residuals) between observed and predicted Y values.</a:t>
                 </a:r>
               </a:p>
             </p:txBody>
@@ -4708,7 +5132,7 @@
       </mc:AlternateContent>
       <p:pic>
         <p:nvPicPr>
-          <p:cNvPr descr="correlation_linear_models_lecture_files/figure-pptx/overview-plot-1p-1.png" id="0" name="Picture 1"/>
+          <p:cNvPr descr="correlation_linear_models_lecture_files/figure-pptx/unnamed-chunk-12-1.png" id="0" name="Picture 1"/>
           <p:cNvPicPr>
             <a:picLocks noGrp="1" noChangeAspect="1"/>
           </p:cNvPicPr>
@@ -4722,8 +5146,8 @@
         </p:blipFill>
         <p:spPr bwMode="auto">
           <a:xfrm>
-            <a:off x="6121400" y="2044700"/>
-            <a:ext cx="2781300" cy="1714500"/>
+            <a:off x="6121400" y="1498600"/>
+            <a:ext cx="2781300" cy="2781300"/>
           </a:xfrm>
           <a:prstGeom prst="rect">
             <a:avLst/>
@@ -4741,7 +5165,7 @@
 </p:sld>
 </file>
 
-<file path=ppt/slides/slide16.xml><?xml version="1.0" encoding="utf-8"?>
+<file path=ppt/slides/slide2.xml><?xml version="1.0" encoding="utf-8"?>
 <p:sld xmlns:a="http://schemas.openxmlformats.org/drawingml/2006/main" xmlns:r="http://schemas.openxmlformats.org/officeDocument/2006/relationships" xmlns:p="http://schemas.openxmlformats.org/presentationml/2006/main">
   <p:cSld>
     <p:spTree>
@@ -4785,12 +5209,172 @@
               <a:buNone/>
             </a:pPr>
             <a:r>
-              <a:rPr b="1"/>
-              <a:t>Lecture 9:</a:t>
-            </a:r>
-            <a:r>
-              <a:rPr/>
-              <a:t> Linear Regression</a:t>
+              <a:rPr/>
+              <a:t>Where We Left Off</a:t>
+            </a:r>
+          </a:p>
+        </p:txBody>
+      </p:sp>
+      <p:sp>
+        <p:nvSpPr>
+          <p:cNvPr id="3" name="Content Placeholder 2"/>
+          <p:cNvSpPr>
+            <a:spLocks noGrp="1"/>
+          </p:cNvSpPr>
+          <p:nvPr>
+            <p:ph idx="1" sz="half"/>
+          </p:nvPr>
+        </p:nvSpPr>
+        <p:spPr/>
+        <p:txBody>
+          <a:bodyPr/>
+          <a:lstStyle/>
+          <a:p>
+            <a:pPr lvl="0" indent="0" marL="0">
+              <a:buNone/>
+            </a:pPr>
+            <a:r>
+              <a:rPr/>
+              <a:t>Covered last time:</a:t>
+            </a:r>
+          </a:p>
+          <a:p>
+            <a:pPr lvl="0"/>
+            <a:r>
+              <a:rPr/>
+              <a:t>Study design</a:t>
+            </a:r>
+          </a:p>
+          <a:p>
+            <a:pPr lvl="0"/>
+            <a:r>
+              <a:rPr/>
+              <a:t>Causality in ecology</a:t>
+            </a:r>
+          </a:p>
+          <a:p>
+            <a:pPr lvl="0"/>
+            <a:r>
+              <a:rPr/>
+              <a:t>Experimental design: replication, controls, randomization, independence</a:t>
+            </a:r>
+          </a:p>
+          <a:p>
+            <a:pPr lvl="0"/>
+            <a:r>
+              <a:rPr/>
+              <a:t>Sampling in field studies</a:t>
+            </a:r>
+          </a:p>
+          <a:p>
+            <a:pPr lvl="0"/>
+            <a:r>
+              <a:rPr/>
+              <a:t>Power analysis: </a:t>
+            </a:r>
+            <a:r>
+              <a:rPr i="1"/>
+              <a:t>a priori</a:t>
+            </a:r>
+            <a:r>
+              <a:rPr/>
+              <a:t> and </a:t>
+            </a:r>
+            <a:r>
+              <a:rPr i="1"/>
+              <a:t>post hoc</a:t>
+            </a:r>
+          </a:p>
+          <a:p>
+            <a:pPr lvl="0"/>
+            <a:r>
+              <a:rPr/>
+              <a:t>Study design and analysis</a:t>
+            </a:r>
+          </a:p>
+        </p:txBody>
+      </p:sp>
+      <p:pic>
+        <p:nvPicPr>
+          <p:cNvPr descr="correlation_linear_models_lecture_files/figure-pptx/unnamed-chunk-2-1.png" id="0" name="Picture 1"/>
+          <p:cNvPicPr>
+            <a:picLocks noGrp="1" noChangeAspect="1"/>
+          </p:cNvPicPr>
+          <p:nvPr/>
+        </p:nvPicPr>
+        <p:blipFill>
+          <a:blip r:embed="rId2"/>
+          <a:stretch>
+            <a:fillRect/>
+          </a:stretch>
+        </p:blipFill>
+        <p:spPr bwMode="auto">
+          <a:xfrm>
+            <a:off x="6121400" y="1676400"/>
+            <a:ext cx="2781300" cy="2438400"/>
+          </a:xfrm>
+          <a:prstGeom prst="rect">
+            <a:avLst/>
+          </a:prstGeom>
+          <a:noFill/>
+          <a:ln w="9525">
+            <a:noFill/>
+            <a:headEnd/>
+            <a:tailEnd/>
+          </a:ln>
+        </p:spPr>
+      </p:pic>
+    </p:spTree>
+  </p:cSld>
+</p:sld>
+</file>
+
+<file path=ppt/slides/slide20.xml><?xml version="1.0" encoding="utf-8"?>
+<p:sld xmlns:a="http://schemas.openxmlformats.org/drawingml/2006/main" xmlns:r="http://schemas.openxmlformats.org/officeDocument/2006/relationships" xmlns:p="http://schemas.openxmlformats.org/presentationml/2006/main">
+  <p:cSld>
+    <p:spTree>
+      <p:nvGrpSpPr>
+        <p:cNvPr id="1" name=""/>
+        <p:cNvGrpSpPr/>
+        <p:nvPr/>
+      </p:nvGrpSpPr>
+      <p:grpSpPr>
+        <a:xfrm>
+          <a:off x="0" y="0"/>
+          <a:ext cx="0" cy="0"/>
+          <a:chOff x="0" y="0"/>
+          <a:chExt cx="0" cy="0"/>
+        </a:xfrm>
+      </p:grpSpPr>
+      <p:sp>
+        <p:nvSpPr>
+          <p:cNvPr id="2" name="Title 1"/>
+          <p:cNvSpPr>
+            <a:spLocks noGrp="1"/>
+          </p:cNvSpPr>
+          <p:nvPr>
+            <p:ph type="title"/>
+          </p:nvPr>
+        </p:nvSpPr>
+        <p:spPr>
+          <a:xfrm>
+            <a:off x="0" y="0"/>
+            <a:ext cx="9144000" cy="602780"/>
+          </a:xfrm>
+          <a:solidFill>
+            <a:srgbClr val="70121D"/>
+          </a:solidFill>
+        </p:spPr>
+        <p:txBody>
+          <a:bodyPr/>
+          <a:lstStyle/>
+          <a:p>
+            <a:pPr lvl="0" indent="0" marL="0">
+              <a:buNone/>
+            </a:pPr>
+            <a:r>
+              <a:rPr/>
+              <a:t>Example 17.1 — the Lion Regression Equation</a:t>
             </a:r>
           </a:p>
         </p:txBody>
@@ -4817,78 +5401,80 @@
                 </a:pPr>
                 <a:r>
                   <a:rPr/>
-                  <a:t>From Example 17.1 in the textbook the regression line for the lion data is:</a:t>
+                  <a:t>From Example 17.1 in the textbook, the regression line for the lion data is:</a:t>
                 </a:r>
               </a:p>
               <a:p>
                 <a:pPr lvl="0" indent="0" marL="0">
-                  <a:spcBef>
-                    <a:spcPts val="3000"/>
-                  </a:spcBef>
                   <a:buNone/>
                 </a:pPr>
                 <a14:m>
-                  <m:oMath xmlns:m="http://schemas.openxmlformats.org/officeDocument/2006/math">
-                    <m:r>
-                      <m:rPr>
-                        <m:nor/>
-                        <m:sty m:val="p"/>
-                      </m:rPr>
-                      <m:t>age</m:t>
-                    </m:r>
-                    <m:r>
-                      <m:rPr>
-                        <m:sty m:val="p"/>
-                      </m:rPr>
-                      <m:t>=</m:t>
-                    </m:r>
-                    <m:r>
-                      <m:t>0.88</m:t>
-                    </m:r>
-                    <m:r>
-                      <m:rPr>
-                        <m:sty m:val="p"/>
-                      </m:rPr>
-                      <m:t>+</m:t>
-                    </m:r>
-                    <m:r>
-                      <m:t>10.65</m:t>
-                    </m:r>
-                    <m:r>
-                      <m:rPr>
-                        <m:sty m:val="p"/>
-                      </m:rPr>
-                      <m:t>×</m:t>
-                    </m:r>
-                    <m:sSub>
-                      <m:e>
-                        <m:r>
-                          <m:rPr>
-                            <m:nor/>
-                            <m:sty m:val="p"/>
-                          </m:rPr>
-                          <m:t>proportion</m:t>
-                        </m:r>
-                      </m:e>
-                      <m:sub>
-                        <m:r>
-                          <m:t>b</m:t>
-                        </m:r>
-                        <m:r>
-                          <m:t>l</m:t>
-                        </m:r>
-                        <m:r>
-                          <m:t>a</m:t>
-                        </m:r>
-                        <m:r>
-                          <m:t>c</m:t>
-                        </m:r>
-                        <m:r>
-                          <m:t>k</m:t>
-                        </m:r>
-                      </m:sub>
-                    </m:sSub>
-                  </m:oMath>
+                  <m:oMathPara xmlns:m="http://schemas.openxmlformats.org/officeDocument/2006/math">
+                    <m:oMathParaPr>
+                      <m:jc m:val="center"/>
+                    </m:oMathParaPr>
+                    <m:oMath>
+                      <m:r>
+                        <m:rPr>
+                          <m:nor/>
+                          <m:sty m:val="p"/>
+                        </m:rPr>
+                        <m:t>age</m:t>
+                      </m:r>
+                      <m:r>
+                        <m:rPr>
+                          <m:sty m:val="p"/>
+                        </m:rPr>
+                        <m:t>=</m:t>
+                      </m:r>
+                      <m:r>
+                        <m:t>0.88</m:t>
+                      </m:r>
+                      <m:r>
+                        <m:rPr>
+                          <m:sty m:val="p"/>
+                        </m:rPr>
+                        <m:t>+</m:t>
+                      </m:r>
+                      <m:r>
+                        <m:t>10.65</m:t>
+                      </m:r>
+                      <m:r>
+                        <m:rPr>
+                          <m:sty m:val="p"/>
+                        </m:rPr>
+                        <m:t>×</m:t>
+                      </m:r>
+                      <m:sSub>
+                        <m:e>
+                          <m:r>
+                            <m:rPr>
+                              <m:nor/>
+                              <m:sty m:val="p"/>
+                            </m:rPr>
+                            <m:t>proportion</m:t>
+                          </m:r>
+                        </m:e>
+                        <m:sub>
+                          <m:r>
+                            <m:t>b</m:t>
+                          </m:r>
+                          <m:r>
+                            <m:t>l</m:t>
+                          </m:r>
+                          <m:r>
+                            <m:t>a</m:t>
+                          </m:r>
+                          <m:r>
+                            <m:t>c</m:t>
+                          </m:r>
+                          <m:r>
+                            <m:t>k</m:t>
+                          </m:r>
+                        </m:sub>
+                      </m:sSub>
+                    </m:oMath>
+                  </m:oMathPara>
                 </a14:m>
               </a:p>
               <a:p>
@@ -4927,7 +5513,7 @@
       </mc:AlternateContent>
       <p:pic>
         <p:nvPicPr>
-          <p:cNvPr descr="correlation_linear_models_lecture_files/figure-pptx/overview-plot-1q-1.png" id="0" name="Picture 1"/>
+          <p:cNvPr descr="correlation_linear_models_lecture_files/figure-pptx/unnamed-chunk-13-1.png" id="0" name="Picture 1"/>
           <p:cNvPicPr>
             <a:picLocks noGrp="1" noChangeAspect="1"/>
           </p:cNvPicPr>
@@ -4941,8 +5527,8 @@
         </p:blipFill>
         <p:spPr bwMode="auto">
           <a:xfrm>
-            <a:off x="6121400" y="2044700"/>
-            <a:ext cx="2781300" cy="1714500"/>
+            <a:off x="6121400" y="1638300"/>
+            <a:ext cx="2781300" cy="2501900"/>
           </a:xfrm>
           <a:prstGeom prst="rect">
             <a:avLst/>
@@ -4960,7 +5546,7 @@
 </p:sld>
 </file>
 
-<file path=ppt/slides/slide17.xml><?xml version="1.0" encoding="utf-8"?>
+<file path=ppt/slides/slide21.xml><?xml version="1.0" encoding="utf-8"?>
 <p:sld xmlns:a="http://schemas.openxmlformats.org/drawingml/2006/main" xmlns:r="http://schemas.openxmlformats.org/officeDocument/2006/relationships" xmlns:p="http://schemas.openxmlformats.org/presentationml/2006/main">
   <p:cSld>
     <p:spTree>
@@ -4990,8 +5576,11 @@
         <p:spPr>
           <a:xfrm>
             <a:off x="0" y="0"/>
-            <a:ext cx="9144000" cy="582780"/>
+            <a:ext cx="9144000" cy="602780"/>
           </a:xfrm>
+          <a:solidFill>
+            <a:srgbClr val="70121D"/>
+          </a:solidFill>
         </p:spPr>
         <p:txBody>
           <a:bodyPr/>
@@ -5001,12 +5590,8 @@
               <a:buNone/>
             </a:pPr>
             <a:r>
-              <a:rPr b="1"/>
-              <a:t>Lecture 9:</a:t>
-            </a:r>
-            <a:r>
-              <a:rPr/>
-              <a:t> Linear Regression</a:t>
+              <a:rPr/>
+              <a:t>Male Lions and Nose Pigmentation</a:t>
             </a:r>
           </a:p>
         </p:txBody>
@@ -5018,7 +5603,7 @@
             <a:spLocks noGrp="1"/>
           </p:cNvSpPr>
           <p:nvPr>
-            <p:ph idx="1"/>
+            <p:ph idx="1" sz="half"/>
           </p:nvPr>
         </p:nvSpPr>
         <p:spPr/>
@@ -5026,31 +5611,35 @@
           <a:bodyPr/>
           <a:lstStyle/>
           <a:p>
-            <a:pPr lvl="0" indent="0" marL="0">
-              <a:spcBef>
-                <a:spcPts val="3000"/>
-              </a:spcBef>
-              <a:buNone/>
-            </a:pPr>
-            <a:r>
-              <a:rPr b="1"/>
-              <a:t>Simple Linear Regression Model</a:t>
-            </a:r>
-          </a:p>
-          <a:p>
             <a:pPr lvl="0"/>
             <a:r>
               <a:rPr/>
-              <a:t>male lions develop more black pigmentation on their noses as they age.</a:t>
+              <a:t>Male lions develop more black pigmentation on their noses as they age</a:t>
             </a:r>
           </a:p>
           <a:p>
             <a:pPr lvl="0"/>
             <a:r>
               <a:rPr/>
-              <a:t>can be used to estimate the age of lions in the field.</a:t>
-            </a:r>
-          </a:p>
+              <a:t>This relationship can be used to estimate the age of lions in the field</a:t>
+            </a:r>
+          </a:p>
+        </p:txBody>
+      </p:sp>
+      <p:sp>
+        <p:nvSpPr>
+          <p:cNvPr id="4" name="Content Placeholder 3"/>
+          <p:cNvSpPr>
+            <a:spLocks noGrp="1"/>
+          </p:cNvSpPr>
+          <p:nvPr>
+            <p:ph idx="2" sz="half"/>
+          </p:nvPr>
+        </p:nvSpPr>
+        <p:spPr/>
+        <p:txBody>
+          <a:bodyPr/>
+          <a:lstStyle/>
           <a:p>
             <a:pPr lvl="0" indent="0">
               <a:buNone/>
@@ -5083,7 +5672,7 @@
 </p:sld>
 </file>
 
-<file path=ppt/slides/slide18.xml><?xml version="1.0" encoding="utf-8"?>
+<file path=ppt/slides/slide22.xml><?xml version="1.0" encoding="utf-8"?>
 <p:sld xmlns:a="http://schemas.openxmlformats.org/drawingml/2006/main" xmlns:r="http://schemas.openxmlformats.org/officeDocument/2006/relationships" xmlns:p="http://schemas.openxmlformats.org/presentationml/2006/main">
   <p:cSld>
     <p:spTree>
@@ -5127,12 +5716,8 @@
               <a:buNone/>
             </a:pPr>
             <a:r>
-              <a:rPr b="1"/>
-              <a:t>Lecture 9:</a:t>
-            </a:r>
-            <a:r>
-              <a:rPr/>
-              <a:t> Linear Regression</a:t>
+              <a:rPr/>
+              <a:t>Calculating the Slope and Intercept by Hand</a:t>
             </a:r>
           </a:p>
         </p:txBody>
@@ -5155,25 +5740,12 @@
               <a:lstStyle/>
               <a:p>
                 <a:pPr lvl="0" indent="0" marL="0">
-                  <a:spcBef>
-                    <a:spcPts val="3000"/>
-                  </a:spcBef>
                   <a:buNone/>
                 </a:pPr>
                 <a:r>
-                  <a:rPr b="1"/>
-                  <a:t>Simple Linear Regression Model</a:t>
-                </a:r>
-              </a:p>
-              <a:p>
-                <a:pPr lvl="0" indent="0" marL="0">
-                  <a:buNone/>
-                </a:pPr>
-                <a:r>
                   <a:rPr/>
                   <a:t>The calculation for slope (m) is:</a:t>
                 </a:r>
-                <a:br/>
               </a:p>
               <a:p>
                 <a:pPr lvl="0" indent="0" marL="0">
@@ -5377,18 +5949,16 @@
                 </a14:m>
               </a:p>
               <a:p>
-                <a:pPr lvl="0"/>
+                <a:pPr lvl="0" indent="0" marL="0">
+                  <a:buNone/>
+                </a:pPr>
                 <a:r>
                   <a:rPr/>
                   <a:t>Given:</a:t>
                 </a:r>
               </a:p>
               <a:p>
-                <a:pPr lvl="1"/>
-                <a:r>
-                  <a:rPr/>
-                  <a:t>- </a:t>
-                </a:r>
+                <a:pPr lvl="0"/>
                 <a14:m>
                   <m:oMath xmlns:m="http://schemas.openxmlformats.org/officeDocument/2006/math">
                     <m:acc>
@@ -5414,11 +5984,7 @@
                 </a14:m>
               </a:p>
               <a:p>
-                <a:pPr lvl="1"/>
-                <a:r>
-                  <a:rPr/>
-                  <a:t>- </a:t>
-                </a:r>
+                <a:pPr lvl="0"/>
                 <a14:m>
                   <m:oMath xmlns:m="http://schemas.openxmlformats.org/officeDocument/2006/math">
                     <m:acc>
@@ -5444,11 +6010,7 @@
                 </a14:m>
               </a:p>
               <a:p>
-                <a:pPr lvl="1"/>
-                <a:r>
-                  <a:rPr/>
-                  <a:t>- </a:t>
-                </a:r>
+                <a:pPr lvl="0"/>
                 <a14:m>
                   <m:oMath xmlns:m="http://schemas.openxmlformats.org/officeDocument/2006/math">
                     <m:nary>
@@ -5533,11 +6095,7 @@
                 </a14:m>
               </a:p>
               <a:p>
-                <a:pPr lvl="1"/>
-                <a:r>
-                  <a:rPr/>
-                  <a:t>- </a:t>
-                </a:r>
+                <a:pPr lvl="0"/>
                 <a14:m>
                   <m:oMath xmlns:m="http://schemas.openxmlformats.org/officeDocument/2006/math">
                     <m:nary>
@@ -5667,7 +6225,7 @@
                 </a:pPr>
                 <a:r>
                   <a:rPr/>
-                  <a:t>Intercept (b): </a:t>
+                  <a:t>Intercept: </a:t>
                 </a:r>
                 <a14:m>
                   <m:oMath xmlns:m="http://schemas.openxmlformats.org/officeDocument/2006/math">
@@ -5760,7 +6318,7 @@
       </mc:AlternateContent>
       <p:pic>
         <p:nvPicPr>
-          <p:cNvPr descr="correlation_linear_models_lecture_files/figure-pptx/overview-plot-1b-1.png" id="0" name="Picture 1"/>
+          <p:cNvPr descr="correlation_linear_models_lecture_files/figure-pptx/unnamed-chunk-15-1.png" id="0" name="Picture 1"/>
           <p:cNvPicPr>
             <a:picLocks noGrp="1" noChangeAspect="1"/>
           </p:cNvPicPr>
@@ -5774,8 +6332,8 @@
         </p:blipFill>
         <p:spPr bwMode="auto">
           <a:xfrm>
-            <a:off x="6121400" y="1778000"/>
-            <a:ext cx="2781300" cy="2222500"/>
+            <a:off x="6121400" y="1587500"/>
+            <a:ext cx="2781300" cy="2628900"/>
           </a:xfrm>
           <a:prstGeom prst="rect">
             <a:avLst/>
@@ -5793,7 +6351,7 @@
 </p:sld>
 </file>
 
-<file path=ppt/slides/slide19.xml><?xml version="1.0" encoding="utf-8"?>
+<file path=ppt/slides/slide23.xml><?xml version="1.0" encoding="utf-8"?>
 <p:sld xmlns:a="http://schemas.openxmlformats.org/drawingml/2006/main" xmlns:r="http://schemas.openxmlformats.org/officeDocument/2006/relationships" xmlns:p="http://schemas.openxmlformats.org/presentationml/2006/main">
   <p:cSld>
     <p:spTree>
@@ -5837,12 +6395,8 @@
               <a:buNone/>
             </a:pPr>
             <a:r>
-              <a:rPr b="1"/>
-              <a:t>Lecture 9:</a:t>
-            </a:r>
-            <a:r>
-              <a:rPr/>
-              <a:t> Linear Regression</a:t>
+              <a:rPr/>
+              <a:t>Making Predictions</a:t>
             </a:r>
           </a:p>
         </p:txBody>
@@ -5863,27 +6417,6 @@
             <p:txBody>
               <a:bodyPr/>
               <a:lstStyle/>
-              <a:p>
-                <a:pPr lvl="0" indent="0" marL="0">
-                  <a:spcBef>
-                    <a:spcPts val="3000"/>
-                  </a:spcBef>
-                  <a:buNone/>
-                </a:pPr>
-                <a:r>
-                  <a:rPr b="1"/>
-                  <a:t>Simple Linear Regression Model</a:t>
-                </a:r>
-              </a:p>
-              <a:p>
-                <a:pPr lvl="0" indent="0" marL="0">
-                  <a:buNone/>
-                </a:pPr>
-                <a:r>
-                  <a:rPr b="1"/>
-                  <a:t>Making predictions:</a:t>
-                </a:r>
-              </a:p>
               <a:p>
                 <a:pPr lvl="0" indent="0" marL="0">
                   <a:buNone/>
@@ -5972,7 +6505,7 @@
                 </a:pPr>
                 <a:r>
                   <a:rPr b="1"/>
-                  <a:t>Confidence intervals vs. Prediction intervals:</a:t>
+                  <a:t>Confidence intervals vs. prediction intervals:</a:t>
                 </a:r>
               </a:p>
               <a:p>
@@ -5983,7 +6516,15 @@
                 </a:r>
                 <a:r>
                   <a:rPr/>
-                  <a:t>: Range for the mean age of all lions with 0.50 black</a:t>
+                  <a:t> — range for the mean age of </a:t>
+                </a:r>
+                <a:r>
+                  <a:rPr i="1"/>
+                  <a:t>all</a:t>
+                </a:r>
+                <a:r>
+                  <a:rPr/>
+                  <a:t> lions with 0.50 black</a:t>
                 </a:r>
               </a:p>
               <a:p>
@@ -5994,7 +6535,15 @@
                 </a:r>
                 <a:r>
                   <a:rPr/>
-                  <a:t>: Range for an individual lion with 0.50 black</a:t>
+                  <a:t> — range for an </a:t>
+                </a:r>
+                <a:r>
+                  <a:rPr i="1"/>
+                  <a:t>individual</a:t>
+                </a:r>
+                <a:r>
+                  <a:rPr/>
+                  <a:t> lion with 0.50 black</a:t>
                 </a:r>
               </a:p>
               <a:p>
@@ -6030,7 +6579,7 @@
       </mc:AlternateContent>
       <p:pic>
         <p:nvPicPr>
-          <p:cNvPr descr="correlation_linear_models_lecture_files/figure-pptx/overview-plot-1bb-1.png" id="0" name="Picture 1"/>
+          <p:cNvPr descr="correlation_linear_models_lecture_files/figure-pptx/unnamed-chunk-16-1.png" id="0" name="Picture 1"/>
           <p:cNvPicPr>
             <a:picLocks noGrp="1" noChangeAspect="1"/>
           </p:cNvPicPr>
@@ -6044,8 +6593,8 @@
         </p:blipFill>
         <p:spPr bwMode="auto">
           <a:xfrm>
-            <a:off x="6121400" y="1778000"/>
-            <a:ext cx="2781300" cy="2222500"/>
+            <a:off x="6121400" y="1587500"/>
+            <a:ext cx="2781300" cy="2628900"/>
           </a:xfrm>
           <a:prstGeom prst="rect">
             <a:avLst/>
@@ -6063,7 +6612,7 @@
 </p:sld>
 </file>
 
-<file path=ppt/slides/slide2.xml><?xml version="1.0" encoding="utf-8"?>
+<file path=ppt/slides/slide24.xml><?xml version="1.0" encoding="utf-8"?>
 <p:sld xmlns:a="http://schemas.openxmlformats.org/drawingml/2006/main" xmlns:r="http://schemas.openxmlformats.org/officeDocument/2006/relationships" xmlns:p="http://schemas.openxmlformats.org/presentationml/2006/main">
   <p:cSld>
     <p:spTree>
@@ -6108,7 +6657,7 @@
             </a:pPr>
             <a:r>
               <a:rPr/>
-              <a:t>Lecture 8: Review</a:t>
+              <a:t>Example: the Prairie Home Companion</a:t>
             </a:r>
           </a:p>
         </p:txBody>
@@ -6128,203 +6677,35 @@
           <a:bodyPr/>
           <a:lstStyle/>
           <a:p>
-            <a:pPr lvl="0" indent="0" marL="0">
-              <a:buNone/>
-            </a:pPr>
-            <a:r>
-              <a:rPr/>
-              <a:t>Covered</a:t>
-            </a:r>
-          </a:p>
-          <a:p>
             <a:pPr lvl="0"/>
             <a:r>
               <a:rPr/>
-              <a:t>Study design</a:t>
+              <a:t>Does biodiversity affect ecosystem stability?</a:t>
             </a:r>
           </a:p>
           <a:p>
             <a:pPr lvl="0"/>
             <a:r>
               <a:rPr/>
-              <a:t>Causality in ecology</a:t>
-            </a:r>
-          </a:p>
-          <a:p>
-            <a:pPr lvl="0"/>
-            <a:r>
-              <a:rPr/>
-              <a:t>Experimental design:</a:t>
-            </a:r>
-          </a:p>
-          <a:p>
-            <a:pPr lvl="1"/>
-            <a:r>
-              <a:rPr/>
-              <a:t>Replication, controls, randomization, independence</a:t>
-            </a:r>
-          </a:p>
-          <a:p>
-            <a:pPr lvl="0"/>
-            <a:r>
-              <a:rPr/>
-              <a:t>Sampling in field studies</a:t>
-            </a:r>
-          </a:p>
-          <a:p>
-            <a:pPr lvl="0"/>
-            <a:r>
-              <a:rPr/>
-              <a:t>Power analysis: </a:t>
-            </a:r>
-            <a:r>
-              <a:rPr i="1"/>
-              <a:t>a priori</a:t>
-            </a:r>
-            <a:r>
-              <a:rPr/>
-              <a:t> and </a:t>
-            </a:r>
-            <a:r>
-              <a:rPr i="1"/>
-              <a:t>post hoc</a:t>
-            </a:r>
-          </a:p>
-          <a:p>
-            <a:pPr lvl="0"/>
-            <a:r>
-              <a:rPr/>
-              <a:t>Study design and analysis</a:t>
-            </a:r>
-          </a:p>
-        </p:txBody>
-      </p:sp>
-      <p:pic>
-        <p:nvPicPr>
-          <p:cNvPr descr="correlation_linear_models_lecture_files/figure-pptx/review-plot-1.png" id="0" name="Picture 1"/>
-          <p:cNvPicPr>
-            <a:picLocks noGrp="1" noChangeAspect="1"/>
-          </p:cNvPicPr>
-          <p:nvPr/>
-        </p:nvPicPr>
-        <p:blipFill>
-          <a:blip r:embed="rId2"/>
-          <a:stretch>
-            <a:fillRect/>
-          </a:stretch>
-        </p:blipFill>
-        <p:spPr bwMode="auto">
-          <a:xfrm>
-            <a:off x="6121400" y="2044700"/>
-            <a:ext cx="2781300" cy="1714500"/>
-          </a:xfrm>
-          <a:prstGeom prst="rect">
-            <a:avLst/>
-          </a:prstGeom>
-          <a:noFill/>
-          <a:ln w="9525">
-            <a:noFill/>
-            <a:headEnd/>
-            <a:tailEnd/>
-          </a:ln>
-        </p:spPr>
-      </p:pic>
-    </p:spTree>
-  </p:cSld>
-</p:sld>
-</file>
-
-<file path=ppt/slides/slide20.xml><?xml version="1.0" encoding="utf-8"?>
-<p:sld xmlns:a="http://schemas.openxmlformats.org/drawingml/2006/main" xmlns:r="http://schemas.openxmlformats.org/officeDocument/2006/relationships" xmlns:p="http://schemas.openxmlformats.org/presentationml/2006/main">
-  <p:cSld>
-    <p:spTree>
-      <p:nvGrpSpPr>
-        <p:cNvPr id="1" name=""/>
-        <p:cNvGrpSpPr/>
-        <p:nvPr/>
-      </p:nvGrpSpPr>
-      <p:grpSpPr>
-        <a:xfrm>
-          <a:off x="0" y="0"/>
-          <a:ext cx="0" cy="0"/>
-          <a:chOff x="0" y="0"/>
-          <a:chExt cx="0" cy="0"/>
-        </a:xfrm>
-      </p:grpSpPr>
-      <p:sp>
-        <p:nvSpPr>
-          <p:cNvPr id="2" name="Title 1"/>
-          <p:cNvSpPr>
-            <a:spLocks noGrp="1"/>
-          </p:cNvSpPr>
-          <p:nvPr>
-            <p:ph type="title"/>
-          </p:nvPr>
-        </p:nvSpPr>
-        <p:spPr>
-          <a:xfrm>
-            <a:off x="0" y="0"/>
-            <a:ext cx="9144000" cy="582780"/>
-          </a:xfrm>
-        </p:spPr>
+              <a:t>Tilman et al. (2006) investigated this using experimental plots varying in plant species number</a:t>
+            </a:r>
+          </a:p>
+        </p:txBody>
+      </p:sp>
+      <p:sp>
+        <p:nvSpPr>
+          <p:cNvPr id="4" name="Content Placeholder 3"/>
+          <p:cNvSpPr>
+            <a:spLocks noGrp="1"/>
+          </p:cNvSpPr>
+          <p:nvPr>
+            <p:ph idx="2" sz="half"/>
+          </p:nvPr>
+        </p:nvSpPr>
+        <p:spPr/>
         <p:txBody>
           <a:bodyPr/>
           <a:lstStyle/>
-          <a:p>
-            <a:pPr lvl="0" indent="0" marL="0">
-              <a:buNone/>
-            </a:pPr>
-            <a:r>
-              <a:rPr b="1"/>
-              <a:t>Lecture 9:</a:t>
-            </a:r>
-            <a:r>
-              <a:rPr/>
-              <a:t> Linear Regression</a:t>
-            </a:r>
-          </a:p>
-        </p:txBody>
-      </p:sp>
-      <p:sp>
-        <p:nvSpPr>
-          <p:cNvPr id="3" name="Content Placeholder 2"/>
-          <p:cNvSpPr>
-            <a:spLocks noGrp="1"/>
-          </p:cNvSpPr>
-          <p:nvPr>
-            <p:ph idx="1"/>
-          </p:nvPr>
-        </p:nvSpPr>
-        <p:spPr/>
-        <p:txBody>
-          <a:bodyPr/>
-          <a:lstStyle/>
-          <a:p>
-            <a:pPr lvl="0" indent="0" marL="0">
-              <a:spcBef>
-                <a:spcPts val="3000"/>
-              </a:spcBef>
-              <a:buNone/>
-            </a:pPr>
-            <a:r>
-              <a:rPr b="1"/>
-              <a:t>Example Prairie Home Companion</a:t>
-            </a:r>
-          </a:p>
-          <a:p>
-            <a:pPr lvl="0"/>
-            <a:r>
-              <a:rPr/>
-              <a:t>Does biodiversity affect ecosystem stability?</a:t>
-            </a:r>
-          </a:p>
-          <a:p>
-            <a:pPr lvl="0"/>
-            <a:r>
-              <a:rPr/>
-              <a:t>Tilman et al. (2006) investigated using experimental plots varying plant species</a:t>
-            </a:r>
-          </a:p>
           <a:p>
             <a:pPr lvl="0" indent="0">
               <a:buNone/>
@@ -6374,7 +6755,7 @@
 </p:sld>
 </file>
 
-<file path=ppt/slides/slide21.xml><?xml version="1.0" encoding="utf-8"?>
+<file path=ppt/slides/slide25.xml><?xml version="1.0" encoding="utf-8"?>
 <p:sld xmlns:a="http://schemas.openxmlformats.org/drawingml/2006/main" xmlns:r="http://schemas.openxmlformats.org/officeDocument/2006/relationships" xmlns:p="http://schemas.openxmlformats.org/presentationml/2006/main">
   <p:cSld>
     <p:spTree>
@@ -6418,12 +6799,8 @@
               <a:buNone/>
             </a:pPr>
             <a:r>
-              <a:rPr b="1"/>
-              <a:t>Lecture 9:</a:t>
-            </a:r>
-            <a:r>
-              <a:rPr/>
-              <a:t> Linear Regression</a:t>
+              <a:rPr/>
+              <a:t>The Prairie Model — Interpretation</a:t>
             </a:r>
           </a:p>
         </p:txBody>
@@ -6471,7 +6848,7 @@
             </a:pPr>
             <a:r>
               <a:rPr/>
-              <a:t>t = estimate/SE</a:t>
+              <a:t>t = estimate / SE</a:t>
             </a:r>
           </a:p>
           <a:p>
@@ -6507,7 +6884,7 @@
             </a:pPr>
             <a:r>
               <a:rPr/>
-              <a:t>R² = 0.222, meaning that approximately 22.2% of the variation in log stability is explained by the number of plant species.</a:t>
+              <a:t>R² = 0.222, meaning approximately 22.2% of the variation in log stability is explained by the number of plant species.</a:t>
             </a:r>
           </a:p>
           <a:p>
@@ -6523,7 +6900,7 @@
       </p:sp>
       <p:pic>
         <p:nvPicPr>
-          <p:cNvPr descr="correlation_linear_models_lecture_files/figure-pptx/overview-plot-1d-1.png" id="0" name="Picture 1"/>
+          <p:cNvPr descr="correlation_linear_models_lecture_files/figure-pptx/unnamed-chunk-18-1.png" id="0" name="Picture 1"/>
           <p:cNvPicPr>
             <a:picLocks noGrp="1" noChangeAspect="1"/>
           </p:cNvPicPr>
@@ -6537,8 +6914,8 @@
         </p:blipFill>
         <p:spPr bwMode="auto">
           <a:xfrm>
-            <a:off x="6121400" y="2044700"/>
-            <a:ext cx="2781300" cy="1714500"/>
+            <a:off x="6121400" y="1587500"/>
+            <a:ext cx="2781300" cy="2628900"/>
           </a:xfrm>
           <a:prstGeom prst="rect">
             <a:avLst/>
@@ -6556,7 +6933,7 @@
 </p:sld>
 </file>
 
-<file path=ppt/slides/slide22.xml><?xml version="1.0" encoding="utf-8"?>
+<file path=ppt/slides/slide26.xml><?xml version="1.0" encoding="utf-8"?>
 <p:sld xmlns:a="http://schemas.openxmlformats.org/drawingml/2006/main" xmlns:r="http://schemas.openxmlformats.org/officeDocument/2006/relationships" xmlns:p="http://schemas.openxmlformats.org/presentationml/2006/main">
   <p:cSld>
     <p:spTree>
@@ -6586,6 +6963,58 @@
         <p:spPr>
           <a:xfrm>
             <a:off x="0" y="0"/>
+            <a:ext cx="9144000" cy="582780"/>
+          </a:xfrm>
+        </p:spPr>
+        <p:txBody>
+          <a:bodyPr/>
+          <a:lstStyle/>
+          <a:p>
+            <a:pPr lvl="0" indent="0" marL="0">
+              <a:buNone/>
+            </a:pPr>
+            <a:r>
+              <a:rPr/>
+              <a:t>Part 5 · Testing Regression Assumptions</a:t>
+            </a:r>
+          </a:p>
+        </p:txBody>
+      </p:sp>
+    </p:spTree>
+  </p:cSld>
+</p:sld>
+</file>
+
+<file path=ppt/slides/slide27.xml><?xml version="1.0" encoding="utf-8"?>
+<p:sld xmlns:a="http://schemas.openxmlformats.org/drawingml/2006/main" xmlns:r="http://schemas.openxmlformats.org/officeDocument/2006/relationships" xmlns:p="http://schemas.openxmlformats.org/presentationml/2006/main">
+  <p:cSld>
+    <p:spTree>
+      <p:nvGrpSpPr>
+        <p:cNvPr id="1" name=""/>
+        <p:cNvGrpSpPr/>
+        <p:nvPr/>
+      </p:nvGrpSpPr>
+      <p:grpSpPr>
+        <a:xfrm>
+          <a:off x="0" y="0"/>
+          <a:ext cx="0" cy="0"/>
+          <a:chOff x="0" y="0"/>
+          <a:chExt cx="0" cy="0"/>
+        </a:xfrm>
+      </p:grpSpPr>
+      <p:sp>
+        <p:nvSpPr>
+          <p:cNvPr id="2" name="Title 1"/>
+          <p:cNvSpPr>
+            <a:spLocks noGrp="1"/>
+          </p:cNvSpPr>
+          <p:nvPr>
+            <p:ph type="title"/>
+          </p:nvPr>
+        </p:nvSpPr>
+        <p:spPr>
+          <a:xfrm>
+            <a:off x="0" y="0"/>
             <a:ext cx="9144000" cy="602780"/>
           </a:xfrm>
           <a:solidFill>
@@ -6600,12 +7029,8 @@
               <a:buNone/>
             </a:pPr>
             <a:r>
-              <a:rPr b="1"/>
-              <a:t>Lecture 9:</a:t>
-            </a:r>
-            <a:r>
-              <a:rPr/>
-              <a:t> Linear Regression</a:t>
+              <a:rPr/>
+              <a:t>Testing Regression Assumptions — Overview</a:t>
             </a:r>
           </a:p>
         </p:txBody>
@@ -6628,14 +7053,63 @@
               <a:lstStyle/>
               <a:p>
                 <a:pPr lvl="0" indent="0" marL="0">
-                  <a:spcBef>
-                    <a:spcPts val="3000"/>
-                  </a:spcBef>
                   <a:buNone/>
                 </a:pPr>
                 <a:r>
+                  <a:rPr/>
+                  <a:t>Linear regression has four key assumptions:</a:t>
+                </a:r>
+              </a:p>
+              <a:p>
+                <a:pPr lvl="0" indent="-342900" marL="342900">
+                  <a:buAutoNum type="arabicPeriod"/>
+                </a:pPr>
+                <a:r>
                   <a:rPr b="1"/>
-                  <a:t>Testing Regression Assumptions</a:t>
+                  <a:t>Linearity</a:t>
+                </a:r>
+                <a:r>
+                  <a:rPr/>
+                  <a:t> — the relationship between X and Y is linear</a:t>
+                </a:r>
+              </a:p>
+              <a:p>
+                <a:pPr lvl="0" indent="-342900" marL="342900">
+                  <a:buAutoNum type="arabicPeriod"/>
+                </a:pPr>
+                <a:r>
+                  <a:rPr b="1"/>
+                  <a:t>Independence</a:t>
+                </a:r>
+                <a:r>
+                  <a:rPr/>
+                  <a:t> — observations are independent</a:t>
+                </a:r>
+              </a:p>
+              <a:p>
+                <a:pPr lvl="0" indent="-342900" marL="342900">
+                  <a:buAutoNum type="arabicPeriod"/>
+                </a:pPr>
+                <a:r>
+                  <a:rPr b="1"/>
+                  <a:t>Homoscedasticity</a:t>
+                </a:r>
+                <a:r>
+                  <a:rPr/>
+                  <a:t> — equal variance across all values of X</a:t>
+                </a:r>
+              </a:p>
+              <a:p>
+                <a:pPr lvl="0" indent="-342900" marL="342900">
+                  <a:buAutoNum type="arabicPeriod"/>
+                </a:pPr>
+                <a:r>
+                  <a:rPr b="1"/>
+                  <a:t>Normality</a:t>
+                </a:r>
+                <a:r>
+                  <a:rPr/>
+                  <a:t> — residuals are normally distributed</a:t>
                 </a:r>
               </a:p>
               <a:p>
@@ -6644,59 +7118,7 @@
                 </a:pPr>
                 <a:r>
                   <a:rPr/>
-                  <a:t>linear regression has four key assumptions:</a:t>
-                </a:r>
-              </a:p>
-              <a:p>
-                <a:pPr lvl="0" indent="-342900" marL="342900">
-                  <a:buAutoNum type="arabicPeriod"/>
-                </a:pPr>
-                <a:r>
-                  <a:rPr b="1"/>
-                  <a:t>Linearity</a:t>
-                </a:r>
-                <a:r>
-                  <a:rPr/>
-                  <a:t>: The relationship between X and Y is linear</a:t>
-                </a:r>
-              </a:p>
-              <a:p>
-                <a:pPr lvl="0" indent="-342900" marL="342900">
-                  <a:buAutoNum type="arabicPeriod"/>
-                </a:pPr>
-                <a:r>
-                  <a:rPr b="1"/>
-                  <a:t>Independence</a:t>
-                </a:r>
-                <a:r>
-                  <a:rPr/>
-                  <a:t>: Observations are independent</a:t>
-                </a:r>
-              </a:p>
-              <a:p>
-                <a:pPr lvl="0" indent="-342900" marL="342900">
-                  <a:buAutoNum type="arabicPeriod"/>
-                </a:pPr>
-                <a:r>
-                  <a:rPr b="1"/>
-                  <a:t>Homoscedasticity</a:t>
-                </a:r>
-                <a:r>
-                  <a:rPr/>
-                  <a:t>: Equal variance across all values of X</a:t>
-                </a:r>
-              </a:p>
-              <a:p>
-                <a:pPr lvl="0" indent="-342900" marL="342900">
-                  <a:buAutoNum type="arabicPeriod"/>
-                </a:pPr>
-                <a:r>
-                  <a:rPr b="1"/>
-                  <a:t>Normality</a:t>
-                </a:r>
-                <a:r>
-                  <a:rPr/>
-                  <a:t>: Residuals are normally distributed</a:t>
+                  <a:t>Let’s check these assumptions for the lion regression model.</a:t>
                 </a:r>
               </a:p>
               <a:p>
@@ -6705,72 +7127,15 @@
                 </a:pPr>
                 <a:r>
                   <a:rPr/>
-                  <a:t>Let’s check these assumptions for the lion regression model:</a:t>
-                </a:r>
-                <a:br/>
-                <a:br/>
-                <a:r>
-                  <a:rPr/>
-                  <a:t>Assume that </a:t>
-                </a:r>
-                <a:r>
-                  <a:rPr b="1"/>
-                  <a:t>error 𝞮 i</a:t>
-                </a:r>
-                <a:r>
-                  <a:rPr/>
-                  <a:t>s </a:t>
+                  <a:t>Assume that error </a:t>
                 </a:r>
                 <a14:m>
                   <m:oMath xmlns:m="http://schemas.openxmlformats.org/officeDocument/2006/math">
                     <m:sSub>
                       <m:e>
                         <m:r>
-                          <m:t>e</m:t>
-                        </m:r>
-                      </m:e>
-                      <m:sub>
-                        <m:r>
-                          <m:t>i</m:t>
-                        </m:r>
-                      </m:sub>
-                    </m:sSub>
-                    <m:r>
-                      <m:rPr>
-                        <m:sty m:val="p"/>
-                      </m:rPr>
-                      <m:t>=</m:t>
-                    </m:r>
-                    <m:sSub>
-                      <m:e>
-                        <m:r>
-                          <m:t>y</m:t>
-                        </m:r>
-                      </m:e>
-                      <m:sub>
-                        <m:r>
-                          <m:t>i</m:t>
-                        </m:r>
-                      </m:sub>
-                    </m:sSub>
-                    <m:r>
-                      <m:rPr>
-                        <m:sty m:val="p"/>
-                      </m:rPr>
-                      <m:t>−</m:t>
-                    </m:r>
-                    <m:sSub>
-                      <m:e>
-                        <m:acc>
-                          <m:accPr>
-                            <m:chr m:val="̂"/>
-                          </m:accPr>
-                          <m:e>
-                            <m:r>
-                              <m:t>y</m:t>
-                            </m:r>
-                          </m:e>
-                        </m:acc>
+                          <m:t>ε</m:t>
+                        </m:r>
                       </m:e>
                       <m:sub>
                         <m:r>
@@ -6780,30 +7145,9 @@
                     </m:sSub>
                   </m:oMath>
                 </a14:m>
-              </a:p>
-              <a:p>
-                <a:pPr lvl="0"/>
                 <a:r>
                   <a:rPr/>
-                  <a:t>normally distributed for each x</a:t>
-                </a:r>
-                <a:r>
-                  <a:rPr baseline="-25000"/>
-                  <a:t>i</a:t>
-                </a:r>
-              </a:p>
-              <a:p>
-                <a:pPr lvl="0"/>
-                <a:r>
-                  <a:rPr/>
-                  <a:t>has the same variance</a:t>
-                </a:r>
-              </a:p>
-              <a:p>
-                <a:pPr lvl="0"/>
-                <a:r>
-                  <a:rPr/>
-                  <a:t>has a mean of 0 at each xi</a:t>
+                  <a:t> is normally distributed for each x_i, has the same variance, and has a mean of 0 at each x_i.</a:t>
                 </a:r>
               </a:p>
             </p:txBody>
@@ -6845,7 +7189,7 @@
 </p:sld>
 </file>
 
-<file path=ppt/slides/slide23.xml><?xml version="1.0" encoding="utf-8"?>
+<file path=ppt/slides/slide28.xml><?xml version="1.0" encoding="utf-8"?>
 <p:sld xmlns:a="http://schemas.openxmlformats.org/drawingml/2006/main" xmlns:r="http://schemas.openxmlformats.org/officeDocument/2006/relationships" xmlns:p="http://schemas.openxmlformats.org/presentationml/2006/main">
   <p:cSld>
     <p:spTree>
@@ -6889,12 +7233,8 @@
               <a:buNone/>
             </a:pPr>
             <a:r>
-              <a:rPr b="1"/>
-              <a:t>Lecture 9:</a:t>
-            </a:r>
-            <a:r>
-              <a:rPr/>
-              <a:t> Linear Regression</a:t>
+              <a:rPr/>
+              <a:t>Testing Regression Assumptions — Residuals</a:t>
             </a:r>
           </a:p>
         </p:txBody>
@@ -6917,14 +7257,11 @@
               <a:lstStyle/>
               <a:p>
                 <a:pPr lvl="0" indent="0" marL="0">
-                  <a:spcBef>
-                    <a:spcPts val="3000"/>
-                  </a:spcBef>
                   <a:buNone/>
                 </a:pPr>
                 <a:r>
-                  <a:rPr b="1"/>
-                  <a:t>Testing Regression Assumptions</a:t>
+                  <a:rPr/>
+                  <a:t>Linear regression has four key assumptions: linearity, independence, homoscedasticity, and normality.</a:t>
                 </a:r>
               </a:p>
               <a:p>
@@ -6933,59 +7270,7 @@
                 </a:pPr>
                 <a:r>
                   <a:rPr/>
-                  <a:t>linear regression has four key assumptions:</a:t>
-                </a:r>
-              </a:p>
-              <a:p>
-                <a:pPr lvl="0" indent="-342900" marL="342900">
-                  <a:buAutoNum type="arabicPeriod"/>
-                </a:pPr>
-                <a:r>
-                  <a:rPr b="1"/>
-                  <a:t>Linearity</a:t>
-                </a:r>
-                <a:r>
-                  <a:rPr/>
-                  <a:t>: The relationship between X and Y is linear</a:t>
-                </a:r>
-              </a:p>
-              <a:p>
-                <a:pPr lvl="0" indent="-342900" marL="342900">
-                  <a:buAutoNum type="arabicPeriod"/>
-                </a:pPr>
-                <a:r>
-                  <a:rPr b="1"/>
-                  <a:t>Independence</a:t>
-                </a:r>
-                <a:r>
-                  <a:rPr/>
-                  <a:t>: Observations are independent</a:t>
-                </a:r>
-              </a:p>
-              <a:p>
-                <a:pPr lvl="0" indent="-342900" marL="342900">
-                  <a:buAutoNum type="arabicPeriod"/>
-                </a:pPr>
-                <a:r>
-                  <a:rPr b="1"/>
-                  <a:t>Homoscedasticity</a:t>
-                </a:r>
-                <a:r>
-                  <a:rPr/>
-                  <a:t>: Equal variance across all values of X</a:t>
-                </a:r>
-              </a:p>
-              <a:p>
-                <a:pPr lvl="0" indent="-342900" marL="342900">
-                  <a:buAutoNum type="arabicPeriod"/>
-                </a:pPr>
-                <a:r>
-                  <a:rPr b="1"/>
-                  <a:t>Normality</a:t>
-                </a:r>
-                <a:r>
-                  <a:rPr/>
-                  <a:t>: Residuals are normally distributed</a:t>
+                  <a:t>Let’s check these assumptions for the lion regression model.</a:t>
                 </a:r>
               </a:p>
               <a:p>
@@ -6994,21 +7279,27 @@
                 </a:pPr>
                 <a:r>
                   <a:rPr/>
-                  <a:t>Let’s check these assumptions for the lion regression model:</a:t>
-                </a:r>
-                <a:br/>
-                <a:br/>
+                  <a:t>The error </a:t>
+                </a:r>
+                <a14:m>
+                  <m:oMath xmlns:m="http://schemas.openxmlformats.org/officeDocument/2006/math">
+                    <m:sSub>
+                      <m:e>
+                        <m:r>
+                          <m:t>ε</m:t>
+                        </m:r>
+                      </m:e>
+                      <m:sub>
+                        <m:r>
+                          <m:t>i</m:t>
+                        </m:r>
+                      </m:sub>
+                    </m:sSub>
+                  </m:oMath>
+                </a14:m>
                 <a:r>
                   <a:rPr/>
-                  <a:t>Assume that </a:t>
-                </a:r>
-                <a:r>
-                  <a:rPr b="1"/>
-                  <a:t>error 𝞮 i</a:t>
-                </a:r>
-                <a:r>
-                  <a:rPr/>
-                  <a:t>s - estimated as the residuals: </a:t>
+                  <a:t> is estimated as the residual: </a:t>
                 </a:r>
                 <a14:m>
                   <m:oMath xmlns:m="http://schemas.openxmlformats.org/officeDocument/2006/math">
@@ -7071,115 +7362,113 @@
                 </a14:m>
               </a:p>
               <a:p>
-                <a:pPr lvl="0"/>
+                <a:pPr lvl="0" indent="0" marL="0">
+                  <a:buNone/>
+                </a:pPr>
                 <a:r>
                   <a:rPr/>
-                  <a:t>ordinary lease square estimates a and b or slope and intercept to minimize the sum of the residuals squared as</a:t>
+                  <a:t>Ordinary least squares estimates a and b (intercept and slope) to minimize the sum of the residuals squared:</a:t>
                 </a:r>
               </a:p>
               <a:p>
                 <a:pPr lvl="0" indent="0" marL="0">
-                  <a:spcBef>
-                    <a:spcPts val="3000"/>
-                  </a:spcBef>
                   <a:buNone/>
                 </a:pPr>
                 <a14:m>
-                  <m:oMath xmlns:m="http://schemas.openxmlformats.org/officeDocument/2006/math">
-                    <m:nary>
-                      <m:naryPr>
-                        <m:chr m:val="∑"/>
-                        <m:limLoc m:val="undOvr"/>
-                        <m:subHide m:val="off"/>
-                        <m:supHide m:val="off"/>
-                      </m:naryPr>
-                      <m:sub>
-                        <m:r>
-                          <m:t>i</m:t>
-                        </m:r>
-                        <m:r>
-                          <m:rPr>
-                            <m:sty m:val="p"/>
-                          </m:rPr>
-                          <m:t>=</m:t>
-                        </m:r>
-                        <m:r>
-                          <m:t>1</m:t>
-                        </m:r>
-                      </m:sub>
-                      <m:sup>
-                        <m:r>
-                          <m:t>n</m:t>
-                        </m:r>
-                      </m:sup>
-                      <m:e>
-                        <m:r>
-                          <m:rPr>
-                            <m:sty m:val="p"/>
-                          </m:rPr>
-                          <m:t>=</m:t>
-                        </m:r>
-                      </m:e>
-                    </m:nary>
-                    <m:r>
-                      <m:rPr>
-                        <m:sty m:val="p"/>
-                      </m:rPr>
-                      <m:t>(</m:t>
-                    </m:r>
-                    <m:sSub>
-                      <m:e>
-                        <m:r>
-                          <m:t>y</m:t>
-                        </m:r>
-                      </m:e>
-                      <m:sub>
-                        <m:r>
-                          <m:t>i</m:t>
-                        </m:r>
-                      </m:sub>
-                    </m:sSub>
-                    <m:r>
-                      <m:rPr>
-                        <m:sty m:val="p"/>
-                      </m:rPr>
-                      <m:t>−</m:t>
-                    </m:r>
-                    <m:sSub>
-                      <m:e>
-                        <m:acc>
-                          <m:accPr>
-                            <m:chr m:val="̂"/>
-                          </m:accPr>
-                          <m:e>
-                            <m:r>
-                              <m:t>y</m:t>
-                            </m:r>
-                          </m:e>
-                        </m:acc>
-                      </m:e>
-                      <m:sub>
-                        <m:r>
-                          <m:t>i</m:t>
-                        </m:r>
-                      </m:sub>
-                    </m:sSub>
-                    <m:sSup>
-                      <m:e>
-                        <m:r>
-                          <m:rPr>
-                            <m:sty m:val="p"/>
-                          </m:rPr>
-                          <m:t>)</m:t>
-                        </m:r>
-                      </m:e>
-                      <m:sup>
-                        <m:r>
-                          <m:t>2</m:t>
-                        </m:r>
-                      </m:sup>
-                    </m:sSup>
-                  </m:oMath>
+                  <m:oMathPara xmlns:m="http://schemas.openxmlformats.org/officeDocument/2006/math">
+                    <m:oMathParaPr>
+                      <m:jc m:val="center"/>
+                    </m:oMathParaPr>
+                    <m:oMath>
+                      <m:nary>
+                        <m:naryPr>
+                          <m:chr m:val="∑"/>
+                          <m:limLoc m:val="undOvr"/>
+                          <m:subHide m:val="off"/>
+                          <m:supHide m:val="off"/>
+                        </m:naryPr>
+                        <m:sub>
+                          <m:r>
+                            <m:t>i</m:t>
+                          </m:r>
+                          <m:r>
+                            <m:rPr>
+                              <m:sty m:val="p"/>
+                            </m:rPr>
+                            <m:t>=</m:t>
+                          </m:r>
+                          <m:r>
+                            <m:t>1</m:t>
+                          </m:r>
+                        </m:sub>
+                        <m:sup>
+                          <m:r>
+                            <m:t>n</m:t>
+                          </m:r>
+                        </m:sup>
+                        <m:e>
+                          <m:r>
+                            <m:rPr>
+                              <m:sty m:val="p"/>
+                            </m:rPr>
+                            <m:t>(</m:t>
+                          </m:r>
+                        </m:e>
+                      </m:nary>
+                      <m:sSub>
+                        <m:e>
+                          <m:r>
+                            <m:t>y</m:t>
+                          </m:r>
+                        </m:e>
+                        <m:sub>
+                          <m:r>
+                            <m:t>i</m:t>
+                          </m:r>
+                        </m:sub>
+                      </m:sSub>
+                      <m:r>
+                        <m:rPr>
+                          <m:sty m:val="p"/>
+                        </m:rPr>
+                        <m:t>−</m:t>
+                      </m:r>
+                      <m:sSub>
+                        <m:e>
+                          <m:acc>
+                            <m:accPr>
+                              <m:chr m:val="̂"/>
+                            </m:accPr>
+                            <m:e>
+                              <m:r>
+                                <m:t>y</m:t>
+                              </m:r>
+                            </m:e>
+                          </m:acc>
+                        </m:e>
+                        <m:sub>
+                          <m:r>
+                            <m:t>i</m:t>
+                          </m:r>
+                        </m:sub>
+                      </m:sSub>
+                      <m:sSup>
+                        <m:e>
+                          <m:r>
+                            <m:rPr>
+                              <m:sty m:val="p"/>
+                            </m:rPr>
+                            <m:t>)</m:t>
+                          </m:r>
+                        </m:e>
+                        <m:sup>
+                          <m:r>
+                            <m:t>2</m:t>
+                          </m:r>
+                        </m:sup>
+                      </m:sSup>
+                    </m:oMath>
+                  </m:oMathPara>
                 </a14:m>
               </a:p>
             </p:txBody>
@@ -7221,7 +7510,7 @@
 </p:sld>
 </file>
 
-<file path=ppt/slides/slide24.xml><?xml version="1.0" encoding="utf-8"?>
+<file path=ppt/slides/slide29.xml><?xml version="1.0" encoding="utf-8"?>
 <p:sld xmlns:a="http://schemas.openxmlformats.org/drawingml/2006/main" xmlns:r="http://schemas.openxmlformats.org/officeDocument/2006/relationships" xmlns:p="http://schemas.openxmlformats.org/presentationml/2006/main">
   <p:cSld>
     <p:spTree>
@@ -7265,12 +7554,8 @@
               <a:buNone/>
             </a:pPr>
             <a:r>
-              <a:rPr b="1"/>
-              <a:t>Lecture 9:</a:t>
-            </a:r>
-            <a:r>
-              <a:rPr/>
-              <a:t> Linear Regression</a:t>
+              <a:rPr/>
+              <a:t>Checking Linearity — Residuals vs. Fitted</a:t>
             </a:r>
           </a:p>
         </p:txBody>
@@ -7291,14 +7576,11 @@
           <a:lstStyle/>
           <a:p>
             <a:pPr lvl="0" indent="0" marL="0">
-              <a:spcBef>
-                <a:spcPts val="3000"/>
-              </a:spcBef>
               <a:buNone/>
             </a:pPr>
             <a:r>
-              <a:rPr b="1"/>
-              <a:t>Testing Regression Assumptions</a:t>
+              <a:rPr/>
+              <a:t>Linear regression has four key assumptions: linearity, independence, homoscedasticity, and normality.</a:t>
             </a:r>
           </a:p>
           <a:p>
@@ -7307,84 +7589,22 @@
             </a:pPr>
             <a:r>
               <a:rPr/>
-              <a:t>linear regression has four key assumptions:</a:t>
-            </a:r>
-          </a:p>
-          <a:p>
-            <a:pPr lvl="0" indent="-342900" marL="342900">
-              <a:buAutoNum type="arabicPeriod"/>
-            </a:pPr>
+              <a:t>Let’s check these assumptions for the lion regression model. </a:t>
+            </a:r>
             <a:r>
               <a:rPr b="1"/>
               <a:t>Linearity</a:t>
             </a:r>
             <a:r>
               <a:rPr/>
-              <a:t>: The relationship between X and Y is linear</a:t>
-            </a:r>
-          </a:p>
-          <a:p>
-            <a:pPr lvl="0" indent="-342900" marL="342900">
-              <a:buAutoNum type="arabicPeriod"/>
-            </a:pPr>
-            <a:r>
-              <a:rPr b="1"/>
-              <a:t>Independence</a:t>
-            </a:r>
-            <a:r>
-              <a:rPr/>
-              <a:t>: Observations are independent</a:t>
-            </a:r>
-          </a:p>
-          <a:p>
-            <a:pPr lvl="0" indent="-342900" marL="342900">
-              <a:buAutoNum type="arabicPeriod"/>
-            </a:pPr>
-            <a:r>
-              <a:rPr b="1"/>
-              <a:t>Homoscedasticity</a:t>
-            </a:r>
-            <a:r>
-              <a:rPr/>
-              <a:t>: Equal variance across all values of X</a:t>
-            </a:r>
-          </a:p>
-          <a:p>
-            <a:pPr lvl="0" indent="-342900" marL="342900">
-              <a:buAutoNum type="arabicPeriod"/>
-            </a:pPr>
-            <a:r>
-              <a:rPr b="1"/>
-              <a:t>Normality</a:t>
-            </a:r>
-            <a:r>
-              <a:rPr/>
-              <a:t>: Residuals are normally distributed</a:t>
-            </a:r>
-          </a:p>
-          <a:p>
-            <a:pPr lvl="0" indent="0" marL="0">
-              <a:buNone/>
-            </a:pPr>
-            <a:r>
-              <a:rPr/>
-              <a:t>Let’s check these assumptions for the lion regression model:</a:t>
-            </a:r>
-          </a:p>
-          <a:p>
-            <a:pPr lvl="0" indent="0" marL="0">
-              <a:buNone/>
-            </a:pPr>
-            <a:r>
-              <a:rPr/>
-              <a:t>Linearity - how does this plot work</a:t>
+              <a:t> — how does this plot work?</a:t>
             </a:r>
           </a:p>
         </p:txBody>
       </p:sp>
       <p:pic>
         <p:nvPicPr>
-          <p:cNvPr descr="correlation_linear_models_lecture_files/figure-pptx/overview-plot-1e-1.png" id="0" name="Picture 1"/>
+          <p:cNvPr descr="correlation_linear_models_lecture_files/figure-pptx/unnamed-chunk-19-1.png" id="0" name="Picture 1"/>
           <p:cNvPicPr>
             <a:picLocks noGrp="1" noChangeAspect="1"/>
           </p:cNvPicPr>
@@ -7398,8 +7618,8 @@
         </p:blipFill>
         <p:spPr bwMode="auto">
           <a:xfrm>
-            <a:off x="6121400" y="2044700"/>
-            <a:ext cx="2781300" cy="1714500"/>
+            <a:off x="6121400" y="1587500"/>
+            <a:ext cx="2781300" cy="2628900"/>
           </a:xfrm>
           <a:prstGeom prst="rect">
             <a:avLst/>
@@ -7417,7 +7637,7 @@
 </p:sld>
 </file>
 
-<file path=ppt/slides/slide25.xml><?xml version="1.0" encoding="utf-8"?>
+<file path=ppt/slides/slide3.xml><?xml version="1.0" encoding="utf-8"?>
 <p:sld xmlns:a="http://schemas.openxmlformats.org/drawingml/2006/main" xmlns:r="http://schemas.openxmlformats.org/officeDocument/2006/relationships" xmlns:p="http://schemas.openxmlformats.org/presentationml/2006/main">
   <p:cSld>
     <p:spTree>
@@ -7447,6 +7667,58 @@
         <p:spPr>
           <a:xfrm>
             <a:off x="0" y="0"/>
+            <a:ext cx="9144000" cy="582780"/>
+          </a:xfrm>
+        </p:spPr>
+        <p:txBody>
+          <a:bodyPr/>
+          <a:lstStyle/>
+          <a:p>
+            <a:pPr lvl="0" indent="0" marL="0">
+              <a:buNone/>
+            </a:pPr>
+            <a:r>
+              <a:rPr/>
+              <a:t>Part 1 · Overview</a:t>
+            </a:r>
+          </a:p>
+        </p:txBody>
+      </p:sp>
+    </p:spTree>
+  </p:cSld>
+</p:sld>
+</file>
+
+<file path=ppt/slides/slide30.xml><?xml version="1.0" encoding="utf-8"?>
+<p:sld xmlns:a="http://schemas.openxmlformats.org/drawingml/2006/main" xmlns:r="http://schemas.openxmlformats.org/officeDocument/2006/relationships" xmlns:p="http://schemas.openxmlformats.org/presentationml/2006/main">
+  <p:cSld>
+    <p:spTree>
+      <p:nvGrpSpPr>
+        <p:cNvPr id="1" name=""/>
+        <p:cNvGrpSpPr/>
+        <p:nvPr/>
+      </p:nvGrpSpPr>
+      <p:grpSpPr>
+        <a:xfrm>
+          <a:off x="0" y="0"/>
+          <a:ext cx="0" cy="0"/>
+          <a:chOff x="0" y="0"/>
+          <a:chExt cx="0" cy="0"/>
+        </a:xfrm>
+      </p:grpSpPr>
+      <p:sp>
+        <p:nvSpPr>
+          <p:cNvPr id="2" name="Title 1"/>
+          <p:cNvSpPr>
+            <a:spLocks noGrp="1"/>
+          </p:cNvSpPr>
+          <p:nvPr>
+            <p:ph type="title"/>
+          </p:nvPr>
+        </p:nvSpPr>
+        <p:spPr>
+          <a:xfrm>
+            <a:off x="0" y="0"/>
             <a:ext cx="9144000" cy="602780"/>
           </a:xfrm>
           <a:solidFill>
@@ -7461,12 +7733,8 @@
               <a:buNone/>
             </a:pPr>
             <a:r>
-              <a:rPr b="1"/>
-              <a:t>Lecture 9:</a:t>
-            </a:r>
-            <a:r>
-              <a:rPr/>
-              <a:t> Linear Regression</a:t>
+              <a:rPr/>
+              <a:t>Checking Normality — QQ Plot of Residuals</a:t>
             </a:r>
           </a:p>
         </p:txBody>
@@ -7487,14 +7755,11 @@
           <a:lstStyle/>
           <a:p>
             <a:pPr lvl="0" indent="0" marL="0">
-              <a:spcBef>
-                <a:spcPts val="3000"/>
-              </a:spcBef>
               <a:buNone/>
             </a:pPr>
             <a:r>
-              <a:rPr b="1"/>
-              <a:t>Testing Regression Assumptions</a:t>
+              <a:rPr/>
+              <a:t>Linear regression has four key assumptions: linearity, independence, homoscedasticity, and normality.</a:t>
             </a:r>
           </a:p>
           <a:p>
@@ -7503,75 +7768,14 @@
             </a:pPr>
             <a:r>
               <a:rPr/>
-              <a:t>linear regression has four key assumptions:</a:t>
-            </a:r>
-          </a:p>
-          <a:p>
-            <a:pPr lvl="0" indent="-342900" marL="342900">
-              <a:buAutoNum type="arabicPeriod"/>
-            </a:pPr>
-            <a:r>
-              <a:rPr b="1"/>
-              <a:t>Linearity</a:t>
-            </a:r>
-            <a:r>
-              <a:rPr/>
-              <a:t>: The relationship between X and Y is linear</a:t>
-            </a:r>
-          </a:p>
-          <a:p>
-            <a:pPr lvl="0" indent="-342900" marL="342900">
-              <a:buAutoNum type="arabicPeriod"/>
-            </a:pPr>
-            <a:r>
-              <a:rPr b="1"/>
-              <a:t>Independence</a:t>
-            </a:r>
-            <a:r>
-              <a:rPr/>
-              <a:t>: Observations are independent</a:t>
-            </a:r>
-          </a:p>
-          <a:p>
-            <a:pPr lvl="0" indent="-342900" marL="342900">
-              <a:buAutoNum type="arabicPeriod"/>
-            </a:pPr>
-            <a:r>
-              <a:rPr b="1"/>
-              <a:t>Homoscedasticity</a:t>
-            </a:r>
-            <a:r>
-              <a:rPr/>
-              <a:t>: Equal variance across all values of X</a:t>
-            </a:r>
-          </a:p>
-          <a:p>
-            <a:pPr lvl="0" indent="-342900" marL="342900">
-              <a:buAutoNum type="arabicPeriod"/>
-            </a:pPr>
-            <a:r>
-              <a:rPr b="1"/>
-              <a:t>Normality</a:t>
-            </a:r>
-            <a:r>
-              <a:rPr/>
-              <a:t>: Residuals are normally distributed</a:t>
-            </a:r>
-          </a:p>
-          <a:p>
-            <a:pPr lvl="0" indent="0" marL="0">
-              <a:buNone/>
-            </a:pPr>
-            <a:r>
-              <a:rPr/>
-              <a:t>Let’s check these assumptions for the lion regression model:</a:t>
+              <a:t>Let’s check these assumptions for the lion regression model.</a:t>
             </a:r>
           </a:p>
         </p:txBody>
       </p:sp>
       <p:pic>
         <p:nvPicPr>
-          <p:cNvPr descr="correlation_linear_models_lecture_files/figure-pptx/overview-plot-1f-1.png" id="0" name="Picture 1"/>
+          <p:cNvPr descr="correlation_linear_models_lecture_files/figure-pptx/unnamed-chunk-20-1.png" id="0" name="Picture 1"/>
           <p:cNvPicPr>
             <a:picLocks noGrp="1" noChangeAspect="1"/>
           </p:cNvPicPr>
@@ -7585,8 +7789,8 @@
         </p:blipFill>
         <p:spPr bwMode="auto">
           <a:xfrm>
-            <a:off x="6121400" y="2044700"/>
-            <a:ext cx="2781300" cy="1714500"/>
+            <a:off x="6121400" y="1587500"/>
+            <a:ext cx="2781300" cy="2628900"/>
           </a:xfrm>
           <a:prstGeom prst="rect">
             <a:avLst/>
@@ -7604,7 +7808,7 @@
 </p:sld>
 </file>
 
-<file path=ppt/slides/slide26.xml><?xml version="1.0" encoding="utf-8"?>
+<file path=ppt/slides/slide31.xml><?xml version="1.0" encoding="utf-8"?>
 <p:sld xmlns:a="http://schemas.openxmlformats.org/drawingml/2006/main" xmlns:r="http://schemas.openxmlformats.org/officeDocument/2006/relationships" xmlns:p="http://schemas.openxmlformats.org/presentationml/2006/main">
   <p:cSld>
     <p:spTree>
@@ -7648,12 +7852,8 @@
               <a:buNone/>
             </a:pPr>
             <a:r>
-              <a:rPr b="1"/>
-              <a:t>Lecture 9:</a:t>
-            </a:r>
-            <a:r>
-              <a:rPr/>
-              <a:t> Linear Regression</a:t>
+              <a:rPr/>
+              <a:t>Checking Normality — Shapiro-Wilk on Residuals</a:t>
             </a:r>
           </a:p>
         </p:txBody>
@@ -7674,14 +7874,11 @@
           <a:lstStyle/>
           <a:p>
             <a:pPr lvl="0" indent="0" marL="0">
-              <a:spcBef>
-                <a:spcPts val="3000"/>
-              </a:spcBef>
               <a:buNone/>
             </a:pPr>
             <a:r>
-              <a:rPr b="1"/>
-              <a:t>Testing Regression Assumptions</a:t>
+              <a:rPr/>
+              <a:t>Linear regression has four key assumptions: linearity, independence, homoscedasticity, and normality.</a:t>
             </a:r>
           </a:p>
           <a:p>
@@ -7690,68 +7887,7 @@
             </a:pPr>
             <a:r>
               <a:rPr/>
-              <a:t>linear regression has four key assumptions:</a:t>
-            </a:r>
-          </a:p>
-          <a:p>
-            <a:pPr lvl="0" indent="-342900" marL="342900">
-              <a:buAutoNum type="arabicPeriod"/>
-            </a:pPr>
-            <a:r>
-              <a:rPr b="1"/>
-              <a:t>Linearity</a:t>
-            </a:r>
-            <a:r>
-              <a:rPr/>
-              <a:t>: The relationship between X and Y is linear</a:t>
-            </a:r>
-          </a:p>
-          <a:p>
-            <a:pPr lvl="0" indent="-342900" marL="342900">
-              <a:buAutoNum type="arabicPeriod"/>
-            </a:pPr>
-            <a:r>
-              <a:rPr b="1"/>
-              <a:t>Independence</a:t>
-            </a:r>
-            <a:r>
-              <a:rPr/>
-              <a:t>: Observations are independent</a:t>
-            </a:r>
-          </a:p>
-          <a:p>
-            <a:pPr lvl="0" indent="-342900" marL="342900">
-              <a:buAutoNum type="arabicPeriod"/>
-            </a:pPr>
-            <a:r>
-              <a:rPr b="1"/>
-              <a:t>Homoscedasticity</a:t>
-            </a:r>
-            <a:r>
-              <a:rPr/>
-              <a:t>: Equal variance across all values of X</a:t>
-            </a:r>
-          </a:p>
-          <a:p>
-            <a:pPr lvl="0" indent="-342900" marL="342900">
-              <a:buAutoNum type="arabicPeriod"/>
-            </a:pPr>
-            <a:r>
-              <a:rPr b="1"/>
-              <a:t>Normality</a:t>
-            </a:r>
-            <a:r>
-              <a:rPr/>
-              <a:t>: Residuals are normally distributed</a:t>
-            </a:r>
-          </a:p>
-          <a:p>
-            <a:pPr lvl="0" indent="0" marL="0">
-              <a:buNone/>
-            </a:pPr>
-            <a:r>
-              <a:rPr/>
-              <a:t>Let’s check these assumptions for the lion regression model:</a:t>
+              <a:t>Let’s check these assumptions for the lion regression model.</a:t>
             </a:r>
           </a:p>
         </p:txBody>
@@ -7791,7 +7927,7 @@
 </p:sld>
 </file>
 
-<file path=ppt/slides/slide27.xml><?xml version="1.0" encoding="utf-8"?>
+<file path=ppt/slides/slide32.xml><?xml version="1.0" encoding="utf-8"?>
 <p:sld xmlns:a="http://schemas.openxmlformats.org/drawingml/2006/main" xmlns:r="http://schemas.openxmlformats.org/officeDocument/2006/relationships" xmlns:p="http://schemas.openxmlformats.org/presentationml/2006/main">
   <p:cSld>
     <p:spTree>
@@ -7835,12 +7971,8 @@
               <a:buNone/>
             </a:pPr>
             <a:r>
-              <a:rPr b="1"/>
-              <a:t>Lecture 9:</a:t>
-            </a:r>
-            <a:r>
-              <a:rPr/>
-              <a:t> Linear Regression</a:t>
+              <a:rPr/>
+              <a:t>When Assumptions Are Violated</a:t>
             </a:r>
           </a:p>
         </p:txBody>
@@ -7861,14 +7993,11 @@
           <a:lstStyle/>
           <a:p>
             <a:pPr lvl="0" indent="0" marL="0">
-              <a:spcBef>
-                <a:spcPts val="3000"/>
-              </a:spcBef>
               <a:buNone/>
             </a:pPr>
             <a:r>
-              <a:rPr b="1"/>
-              <a:t>Simple Linear Regression Model</a:t>
+              <a:rPr/>
+              <a:t>Linear regression has four key assumptions: linearity, independence, homoscedasticity, and normality.</a:t>
             </a:r>
           </a:p>
           <a:p>
@@ -7877,7 +8006,7 @@
             </a:pPr>
             <a:r>
               <a:rPr/>
-              <a:t>linear regression has four key assumptions:</a:t>
+              <a:t>If assumptions are violated:</a:t>
             </a:r>
           </a:p>
           <a:p>
@@ -7885,12 +8014,8 @@
               <a:buAutoNum type="arabicPeriod"/>
             </a:pPr>
             <a:r>
-              <a:rPr b="1"/>
-              <a:t>Linearity</a:t>
-            </a:r>
-            <a:r>
-              <a:rPr/>
-              <a:t>: The relationship between X and Y is linear</a:t>
+              <a:rPr/>
+              <a:t>Transform the data (Section 17.6)</a:t>
             </a:r>
           </a:p>
           <a:p>
@@ -7898,12 +8023,8 @@
               <a:buAutoNum type="arabicPeriod"/>
             </a:pPr>
             <a:r>
-              <a:rPr b="1"/>
-              <a:t>Independence</a:t>
-            </a:r>
-            <a:r>
-              <a:rPr/>
-              <a:t>: Observations are independent</a:t>
+              <a:rPr/>
+              <a:t>Use weighted least squares for heteroscedasticity</a:t>
             </a:r>
           </a:p>
           <a:p>
@@ -7911,41 +8032,15 @@
               <a:buAutoNum type="arabicPeriod"/>
             </a:pPr>
             <a:r>
-              <a:rPr b="1"/>
-              <a:t>Homoscedasticity</a:t>
-            </a:r>
-            <a:r>
-              <a:rPr/>
-              <a:t>: Equal variance across all values of X</a:t>
-            </a:r>
-          </a:p>
-          <a:p>
-            <a:pPr lvl="0" indent="-342900" marL="342900">
-              <a:buAutoNum type="arabicPeriod"/>
-            </a:pPr>
-            <a:r>
-              <a:rPr b="1"/>
-              <a:t>Normality</a:t>
-            </a:r>
-            <a:r>
-              <a:rPr/>
-              <a:t>: Residuals are normally distributed</a:t>
-            </a:r>
-          </a:p>
-          <a:p>
-            <a:pPr lvl="0" indent="0" marL="0">
-              <a:buNone/>
-            </a:pPr>
-            <a:r>
-              <a:rPr/>
-              <a:t>If assumptions are violated: 1. Transform the data (Section 17.6) 2. Use weighted least squares for heteroscedasticity 3. Consider non-linear models (Section 17.8)</a:t>
+              <a:rPr/>
+              <a:t>Consider non-linear models (Section 17.8)</a:t>
             </a:r>
           </a:p>
         </p:txBody>
       </p:sp>
       <p:pic>
         <p:nvPicPr>
-          <p:cNvPr descr="correlation_linear_models_lecture_files/figure-pptx/overview-plot-1h-1.png" id="0" name="Picture 1"/>
+          <p:cNvPr descr="correlation_linear_models_lecture_files/figure-pptx/unnamed-chunk-22-1.png" id="0" name="Picture 1"/>
           <p:cNvPicPr>
             <a:picLocks noGrp="1" noChangeAspect="1"/>
           </p:cNvPicPr>
@@ -7959,8 +8054,8 @@
         </p:blipFill>
         <p:spPr bwMode="auto">
           <a:xfrm>
-            <a:off x="6121400" y="1778000"/>
-            <a:ext cx="2781300" cy="2222500"/>
+            <a:off x="6121400" y="1498600"/>
+            <a:ext cx="2781300" cy="2781300"/>
           </a:xfrm>
           <a:prstGeom prst="rect">
             <a:avLst/>
@@ -7978,7 +8073,7 @@
 </p:sld>
 </file>
 
-<file path=ppt/slides/slide28.xml><?xml version="1.0" encoding="utf-8"?>
+<file path=ppt/slides/slide33.xml><?xml version="1.0" encoding="utf-8"?>
 <p:sld xmlns:a="http://schemas.openxmlformats.org/drawingml/2006/main" xmlns:r="http://schemas.openxmlformats.org/officeDocument/2006/relationships" xmlns:p="http://schemas.openxmlformats.org/presentationml/2006/main">
   <p:cSld>
     <p:spTree>
@@ -8008,6 +8103,58 @@
         <p:spPr>
           <a:xfrm>
             <a:off x="0" y="0"/>
+            <a:ext cx="9144000" cy="582780"/>
+          </a:xfrm>
+        </p:spPr>
+        <p:txBody>
+          <a:bodyPr/>
+          <a:lstStyle/>
+          <a:p>
+            <a:pPr lvl="0" indent="0" marL="0">
+              <a:buNone/>
+            </a:pPr>
+            <a:r>
+              <a:rPr/>
+              <a:t>Part 6 · Regression Inference &amp; ANOVA</a:t>
+            </a:r>
+          </a:p>
+        </p:txBody>
+      </p:sp>
+    </p:spTree>
+  </p:cSld>
+</p:sld>
+</file>
+
+<file path=ppt/slides/slide34.xml><?xml version="1.0" encoding="utf-8"?>
+<p:sld xmlns:a="http://schemas.openxmlformats.org/drawingml/2006/main" xmlns:r="http://schemas.openxmlformats.org/officeDocument/2006/relationships" xmlns:p="http://schemas.openxmlformats.org/presentationml/2006/main">
+  <p:cSld>
+    <p:spTree>
+      <p:nvGrpSpPr>
+        <p:cNvPr id="1" name=""/>
+        <p:cNvGrpSpPr/>
+        <p:nvPr/>
+      </p:nvGrpSpPr>
+      <p:grpSpPr>
+        <a:xfrm>
+          <a:off x="0" y="0"/>
+          <a:ext cx="0" cy="0"/>
+          <a:chOff x="0" y="0"/>
+          <a:chExt cx="0" cy="0"/>
+        </a:xfrm>
+      </p:grpSpPr>
+      <p:sp>
+        <p:nvSpPr>
+          <p:cNvPr id="2" name="Title 1"/>
+          <p:cNvSpPr>
+            <a:spLocks noGrp="1"/>
+          </p:cNvSpPr>
+          <p:nvPr>
+            <p:ph type="title"/>
+          </p:nvPr>
+        </p:nvSpPr>
+        <p:spPr>
+          <a:xfrm>
+            <a:off x="0" y="0"/>
             <a:ext cx="9144000" cy="602780"/>
           </a:xfrm>
           <a:solidFill>
@@ -8022,12 +8169,8 @@
               <a:buNone/>
             </a:pPr>
             <a:r>
-              <a:rPr b="1"/>
-              <a:t>Lecture 9:</a:t>
-            </a:r>
-            <a:r>
-              <a:rPr/>
-              <a:t> Linear Regression - estimates of error and significance</a:t>
+              <a:rPr/>
+              <a:t>Estimates of Error and Significance</a:t>
             </a:r>
           </a:p>
         </p:txBody>
@@ -8050,21 +8193,21 @@
             <a:pPr lvl="0"/>
             <a:r>
               <a:rPr/>
-              <a:t>Estimates of standard error and confidence intervals for slow and intercept to determine confidence bands</a:t>
+              <a:t>Estimates of standard error and confidence intervals for slope and intercept determine confidence bands</a:t>
             </a:r>
           </a:p>
           <a:p>
             <a:pPr lvl="0"/>
             <a:r>
               <a:rPr/>
-              <a:t>the 95% confidence band will contain the true population line 95/100 under repeated sampling</a:t>
+              <a:t>The 95% confidence band will contain the true population line 95/100 times under repeated sampling</a:t>
             </a:r>
           </a:p>
           <a:p>
             <a:pPr lvl="0"/>
             <a:r>
               <a:rPr/>
-              <a:t>this is usually done in R</a:t>
+              <a:t>This is usually done in R</a:t>
             </a:r>
           </a:p>
         </p:txBody>
@@ -8104,7 +8247,7 @@
 </p:sld>
 </file>
 
-<file path=ppt/slides/slide29.xml><?xml version="1.0" encoding="utf-8"?>
+<file path=ppt/slides/slide35.xml><?xml version="1.0" encoding="utf-8"?>
 <p:sld xmlns:a="http://schemas.openxmlformats.org/drawingml/2006/main" xmlns:r="http://schemas.openxmlformats.org/officeDocument/2006/relationships" xmlns:p="http://schemas.openxmlformats.org/presentationml/2006/main">
   <p:cSld>
     <p:spTree>
@@ -8148,12 +8291,8 @@
               <a:buNone/>
             </a:pPr>
             <a:r>
-              <a:rPr b="1"/>
-              <a:t>Lecture 9:</a:t>
-            </a:r>
-            <a:r>
-              <a:rPr/>
-              <a:t> Linear Regression - estimates of error and significance</a:t>
+              <a:rPr/>
+              <a:t>From Estimates to Hypothesis Tests</a:t>
             </a:r>
           </a:p>
         </p:txBody>
@@ -8178,7 +8317,7 @@
             </a:pPr>
             <a:r>
               <a:rPr/>
-              <a:t>In addition to getting estimates of population parameters (β0 , β1), want to test hypotheses about them</a:t>
+              <a:t>In addition to getting estimates of population parameters (β₀, β₁), we want to test hypotheses about them.</a:t>
             </a:r>
           </a:p>
           <a:p>
@@ -8192,7 +8331,42 @@
             <a:pPr lvl="0"/>
             <a:r>
               <a:rPr/>
-              <a:t>Partition variance in Y: due to variation in X, due to other things (error)</a:t>
+              <a:t>Partition variance in Y: due to variation in X, and due to other things (error)</a:t>
+            </a:r>
+          </a:p>
+          <a:p>
+            <a:pPr lvl="0" indent="0" marL="1270000">
+              <a:buNone/>
+            </a:pPr>
+            <a:r>
+              <a:rPr sz="2000" b="1"/>
+              <a:t>Note</a:t>
+            </a:r>
+          </a:p>
+          <a:p>
+            <a:pPr lvl="0" indent="0" marL="1270000">
+              <a:buNone/>
+            </a:pPr>
+            <a:r>
+              <a:rPr sz="2000" b="1"/>
+              <a:t>📖 Reference</a:t>
+            </a:r>
+          </a:p>
+          <a:p>
+            <a:pPr lvl="0" indent="0" marL="1270000">
+              <a:buNone/>
+            </a:pPr>
+            <a:r>
+              <a:rPr sz="2000"/>
+              <a:t>Gotelli &amp; Ellison, </a:t>
+            </a:r>
+            <a:r>
+              <a:rPr sz="2000" i="1"/>
+              <a:t>A Primer of Ecological Statistics</a:t>
+            </a:r>
+            <a:r>
+              <a:rPr sz="2000"/>
+              <a:t>, Ch. 9 — Regression, covers this variance-partitioning approach to testing a regression slope.</a:t>
             </a:r>
           </a:p>
         </p:txBody>
@@ -8232,7 +8406,7 @@
 </p:sld>
 </file>
 
-<file path=ppt/slides/slide3.xml><?xml version="1.0" encoding="utf-8"?>
+<file path=ppt/slides/slide36.xml><?xml version="1.0" encoding="utf-8"?>
 <p:sld xmlns:a="http://schemas.openxmlformats.org/drawingml/2006/main" xmlns:r="http://schemas.openxmlformats.org/officeDocument/2006/relationships" xmlns:p="http://schemas.openxmlformats.org/presentationml/2006/main">
   <p:cSld>
     <p:spTree>
@@ -8262,156 +8436,6 @@
         <p:spPr>
           <a:xfrm>
             <a:off x="0" y="0"/>
-            <a:ext cx="9144000" cy="582780"/>
-          </a:xfrm>
-        </p:spPr>
-        <p:txBody>
-          <a:bodyPr/>
-          <a:lstStyle/>
-          <a:p>
-            <a:pPr lvl="0" indent="0" marL="0">
-              <a:buNone/>
-            </a:pPr>
-            <a:r>
-              <a:rPr b="1"/>
-              <a:t>Lecture 9:</a:t>
-            </a:r>
-            <a:r>
-              <a:rPr/>
-              <a:t> Overview</a:t>
-            </a:r>
-          </a:p>
-        </p:txBody>
-      </p:sp>
-      <p:sp>
-        <p:nvSpPr>
-          <p:cNvPr id="3" name="Content Placeholder 2"/>
-          <p:cNvSpPr>
-            <a:spLocks noGrp="1"/>
-          </p:cNvSpPr>
-          <p:nvPr>
-            <p:ph idx="1"/>
-          </p:nvPr>
-        </p:nvSpPr>
-        <p:spPr/>
-        <p:txBody>
-          <a:bodyPr/>
-          <a:lstStyle/>
-          <a:p>
-            <a:pPr lvl="0" indent="0" marL="0">
-              <a:spcBef>
-                <a:spcPts val="3000"/>
-              </a:spcBef>
-              <a:buNone/>
-            </a:pPr>
-            <a:r>
-              <a:rPr b="1"/>
-              <a:t>The objectives:</a:t>
-            </a:r>
-          </a:p>
-          <a:p>
-            <a:pPr lvl="0" indent="0" marL="0">
-              <a:buNone/>
-            </a:pPr>
-            <a:r>
-              <a:rPr/>
-              <a:t>This lecture covers two fundamental statistical techniques in biology: correlation and regression analysis. Based on Chapters 16-17 from Whitlock &amp; Schluter’s </a:t>
-            </a:r>
-            <a:r>
-              <a:rPr i="1"/>
-              <a:t>The Analysis of Biological Data</a:t>
-            </a:r>
-            <a:r>
-              <a:rPr/>
-              <a:t> (3rd edition), we’ll explore:</a:t>
-            </a:r>
-          </a:p>
-          <a:p>
-            <a:pPr lvl="0"/>
-            <a:r>
-              <a:rPr/>
-              <a:t>Correlation analysis: measuring relationships between variables</a:t>
-            </a:r>
-          </a:p>
-          <a:p>
-            <a:pPr lvl="0"/>
-            <a:r>
-              <a:rPr/>
-              <a:t>The distinction between correlation and regression</a:t>
-            </a:r>
-          </a:p>
-          <a:p>
-            <a:pPr lvl="0"/>
-            <a:r>
-              <a:rPr/>
-              <a:t>Simple linear regression: predicting one variable from another</a:t>
-            </a:r>
-          </a:p>
-          <a:p>
-            <a:pPr lvl="0"/>
-            <a:r>
-              <a:rPr/>
-              <a:t>Estimating and interpreting regression parameters</a:t>
-            </a:r>
-          </a:p>
-          <a:p>
-            <a:pPr lvl="0"/>
-            <a:r>
-              <a:rPr/>
-              <a:t>Testing assumptions and handling violations</a:t>
-            </a:r>
-          </a:p>
-          <a:p>
-            <a:pPr lvl="0"/>
-            <a:r>
-              <a:rPr/>
-              <a:t>Analysis of variance in regression</a:t>
-            </a:r>
-          </a:p>
-          <a:p>
-            <a:pPr lvl="0"/>
-            <a:r>
-              <a:rPr/>
-              <a:t>Model selection and comparison</a:t>
-            </a:r>
-          </a:p>
-        </p:txBody>
-      </p:sp>
-    </p:spTree>
-  </p:cSld>
-</p:sld>
-</file>
-
-<file path=ppt/slides/slide30.xml><?xml version="1.0" encoding="utf-8"?>
-<p:sld xmlns:a="http://schemas.openxmlformats.org/drawingml/2006/main" xmlns:r="http://schemas.openxmlformats.org/officeDocument/2006/relationships" xmlns:p="http://schemas.openxmlformats.org/presentationml/2006/main">
-  <p:cSld>
-    <p:spTree>
-      <p:nvGrpSpPr>
-        <p:cNvPr id="1" name=""/>
-        <p:cNvGrpSpPr/>
-        <p:nvPr/>
-      </p:nvGrpSpPr>
-      <p:grpSpPr>
-        <a:xfrm>
-          <a:off x="0" y="0"/>
-          <a:ext cx="0" cy="0"/>
-          <a:chOff x="0" y="0"/>
-          <a:chExt cx="0" cy="0"/>
-        </a:xfrm>
-      </p:grpSpPr>
-      <p:sp>
-        <p:nvSpPr>
-          <p:cNvPr id="2" name="Title 1"/>
-          <p:cNvSpPr>
-            <a:spLocks noGrp="1"/>
-          </p:cNvSpPr>
-          <p:nvPr>
-            <p:ph type="title"/>
-          </p:nvPr>
-        </p:nvSpPr>
-        <p:spPr>
-          <a:xfrm>
-            <a:off x="0" y="0"/>
             <a:ext cx="9144000" cy="602780"/>
           </a:xfrm>
           <a:solidFill>
@@ -8426,12 +8450,8 @@
               <a:buNone/>
             </a:pPr>
             <a:r>
-              <a:rPr b="1"/>
-              <a:t>Lecture 9:</a:t>
-            </a:r>
-            <a:r>
-              <a:rPr/>
-              <a:t> Linear Regression - estimates of variance</a:t>
+              <a:rPr/>
+              <a:t>Partitioning the Variance</a:t>
             </a:r>
           </a:p>
         </p:txBody>
@@ -8511,95 +8531,7 @@
                 </a14:m>
                 <a:r>
                   <a:rPr/>
-                  <a:t>: variation explained by regression</a:t>
-                </a:r>
-              </a:p>
-              <a:p>
-                <a:pPr lvl="1"/>
-                <a:r>
-                  <a:rPr/>
-                  <a:t>difference between predicted values (ŷi ) and mean y (ȳ)</a:t>
-                </a:r>
-              </a:p>
-              <a:p>
-                <a:pPr lvl="1"/>
-                <a:r>
-                  <a:rPr/>
-                  <a:t>dfs= 1 for simple linear (parameters-1)</a:t>
-                </a:r>
-              </a:p>
-              <a:p>
-                <a:pPr lvl="0"/>
-                <a14:m>
-                  <m:oMath xmlns:m="http://schemas.openxmlformats.org/officeDocument/2006/math">
-                    <m:r>
-                      <m:t>S</m:t>
-                    </m:r>
-                    <m:sSub>
-                      <m:e>
-                        <m:r>
-                          <m:t>S</m:t>
-                        </m:r>
-                      </m:e>
-                      <m:sub>
-                        <m:r>
-                          <m:t>r</m:t>
-                        </m:r>
-                        <m:r>
-                          <m:t>e</m:t>
-                        </m:r>
-                        <m:r>
-                          <m:t>s</m:t>
-                        </m:r>
-                        <m:r>
-                          <m:t>i</m:t>
-                        </m:r>
-                        <m:r>
-                          <m:t>d</m:t>
-                        </m:r>
-                        <m:r>
-                          <m:t>u</m:t>
-                        </m:r>
-                        <m:r>
-                          <m:t>a</m:t>
-                        </m:r>
-                        <m:r>
-                          <m:t>l</m:t>
-                        </m:r>
-                      </m:sub>
-                    </m:sSub>
-                  </m:oMath>
-                </a14:m>
-                <a:r>
-                  <a:rPr/>
-                  <a:t>: variation not explained by regression</a:t>
-                </a:r>
-              </a:p>
-              <a:p>
-                <a:pPr lvl="1"/>
-                <a:r>
-                  <a:rPr/>
-                  <a:t>difference between observed (</a:t>
-                </a:r>
-                <a14:m>
-                  <m:oMath xmlns:m="http://schemas.openxmlformats.org/officeDocument/2006/math">
-                    <m:sSub>
-                      <m:e>
-                        <m:r>
-                          <m:t>y</m:t>
-                        </m:r>
-                      </m:e>
-                      <m:sub>
-                        <m:r>
-                          <m:t>i</m:t>
-                        </m:r>
-                      </m:sub>
-                    </m:sSub>
-                  </m:oMath>
-                </a14:m>
-                <a:r>
-                  <a:rPr/>
-                  <a:t>) and predicted (</a:t>
+                  <a:t>: variation explained by regression — difference between predicted values (</a:t>
                 </a:r>
                 <a14:m>
                   <m:oMath xmlns:m="http://schemas.openxmlformats.org/officeDocument/2006/math">
@@ -8626,14 +8558,25 @@
                 </a14:m>
                 <a:r>
                   <a:rPr/>
-                  <a:t>) values</a:t>
-                </a:r>
-              </a:p>
-              <a:p>
-                <a:pPr lvl="1"/>
+                  <a:t>) and mean y (</a:t>
+                </a:r>
+                <a14:m>
+                  <m:oMath xmlns:m="http://schemas.openxmlformats.org/officeDocument/2006/math">
+                    <m:acc>
+                      <m:accPr>
+                        <m:chr m:val="‾"/>
+                      </m:accPr>
+                      <m:e>
+                        <m:r>
+                          <m:t>y</m:t>
+                        </m:r>
+                      </m:e>
+                    </m:acc>
+                  </m:oMath>
+                </a14:m>
                 <a:r>
                   <a:rPr/>
-                  <a:t>dfs= n-2</a:t>
+                  <a:t>); df = 1 for simple linear (parameters − 1)</a:t>
                 </a:r>
               </a:p>
               <a:p>
@@ -8651,13 +8594,22 @@
                       </m:e>
                       <m:sub>
                         <m:r>
-                          <m:t>t</m:t>
-                        </m:r>
-                        <m:r>
-                          <m:t>o</m:t>
-                        </m:r>
-                        <m:r>
-                          <m:t>t</m:t>
+                          <m:t>r</m:t>
+                        </m:r>
+                        <m:r>
+                          <m:t>e</m:t>
+                        </m:r>
+                        <m:r>
+                          <m:t>s</m:t>
+                        </m:r>
+                        <m:r>
+                          <m:t>i</m:t>
+                        </m:r>
+                        <m:r>
+                          <m:t>d</m:t>
+                        </m:r>
+                        <m:r>
+                          <m:t>u</m:t>
                         </m:r>
                         <m:r>
                           <m:t>a</m:t>
@@ -8671,14 +8623,7 @@
                 </a14:m>
                 <a:r>
                   <a:rPr/>
-                  <a:t>: total variation</a:t>
-                </a:r>
-              </a:p>
-              <a:p>
-                <a:pPr lvl="1"/>
-                <a:r>
-                  <a:rPr/>
-                  <a:t>sum of squared deviations of each observation (</a:t>
+                  <a:t>: variation not explained by regression — difference between observed (</a:t>
                 </a:r>
                 <a14:m>
                   <m:oMath xmlns:m="http://schemas.openxmlformats.org/officeDocument/2006/math">
@@ -8698,7 +8643,92 @@
                 </a14:m>
                 <a:r>
                   <a:rPr/>
-                  <a:t>) from mean (</a:t>
+                  <a:t>) and predicted (</a:t>
+                </a:r>
+                <a14:m>
+                  <m:oMath xmlns:m="http://schemas.openxmlformats.org/officeDocument/2006/math">
+                    <m:sSub>
+                      <m:e>
+                        <m:acc>
+                          <m:accPr>
+                            <m:chr m:val="̂"/>
+                          </m:accPr>
+                          <m:e>
+                            <m:r>
+                              <m:t>y</m:t>
+                            </m:r>
+                          </m:e>
+                        </m:acc>
+                      </m:e>
+                      <m:sub>
+                        <m:r>
+                          <m:t>i</m:t>
+                        </m:r>
+                      </m:sub>
+                    </m:sSub>
+                  </m:oMath>
+                </a14:m>
+                <a:r>
+                  <a:rPr/>
+                  <a:t>) values; df = n − 2</a:t>
+                </a:r>
+              </a:p>
+              <a:p>
+                <a:pPr lvl="0"/>
+                <a14:m>
+                  <m:oMath xmlns:m="http://schemas.openxmlformats.org/officeDocument/2006/math">
+                    <m:r>
+                      <m:t>S</m:t>
+                    </m:r>
+                    <m:sSub>
+                      <m:e>
+                        <m:r>
+                          <m:t>S</m:t>
+                        </m:r>
+                      </m:e>
+                      <m:sub>
+                        <m:r>
+                          <m:t>t</m:t>
+                        </m:r>
+                        <m:r>
+                          <m:t>o</m:t>
+                        </m:r>
+                        <m:r>
+                          <m:t>t</m:t>
+                        </m:r>
+                        <m:r>
+                          <m:t>a</m:t>
+                        </m:r>
+                        <m:r>
+                          <m:t>l</m:t>
+                        </m:r>
+                      </m:sub>
+                    </m:sSub>
+                  </m:oMath>
+                </a14:m>
+                <a:r>
+                  <a:rPr/>
+                  <a:t>: total variation — sum of squared deviations of each observation (</a:t>
+                </a:r>
+                <a14:m>
+                  <m:oMath xmlns:m="http://schemas.openxmlformats.org/officeDocument/2006/math">
+                    <m:sSub>
+                      <m:e>
+                        <m:r>
+                          <m:t>y</m:t>
+                        </m:r>
+                      </m:e>
+                      <m:sub>
+                        <m:r>
+                          <m:t>i</m:t>
+                        </m:r>
+                      </m:sub>
+                    </m:sSub>
+                  </m:oMath>
+                </a14:m>
+                <a:r>
+                  <a:rPr/>
+                  <a:t>) from the mean (</a:t>
                 </a:r>
                 <a14:m>
                   <m:oMath xmlns:m="http://schemas.openxmlformats.org/officeDocument/2006/math">
@@ -8716,14 +8746,7 @@
                 </a14:m>
                 <a:r>
                   <a:rPr/>
-                  <a:t>)</a:t>
-                </a:r>
-              </a:p>
-              <a:p>
-                <a:pPr lvl="1"/>
-                <a:r>
-                  <a:rPr/>
-                  <a:t>dfs = n-1</a:t>
+                  <a:t>); df = n − 1</a:t>
                 </a:r>
               </a:p>
             </p:txBody>
@@ -8765,7 +8788,7 @@
 </p:sld>
 </file>
 
-<file path=ppt/slides/slide31.xml><?xml version="1.0" encoding="utf-8"?>
+<file path=ppt/slides/slide37.xml><?xml version="1.0" encoding="utf-8"?>
 <p:sld xmlns:a="http://schemas.openxmlformats.org/drawingml/2006/main" xmlns:r="http://schemas.openxmlformats.org/officeDocument/2006/relationships" xmlns:p="http://schemas.openxmlformats.org/presentationml/2006/main">
   <p:cSld>
     <p:spTree>
@@ -8809,12 +8832,8 @@
               <a:buNone/>
             </a:pPr>
             <a:r>
-              <a:rPr b="1"/>
-              <a:t>Lecture 9:</a:t>
-            </a:r>
-            <a:r>
-              <a:rPr/>
-              <a:t> Linear Regression - estimates of variance</a:t>
+              <a:rPr/>
+              <a:t>Partitioning the Variance — Visually</a:t>
             </a:r>
           </a:p>
         </p:txBody>
@@ -8894,21 +8913,7 @@
                 </a14:m>
                 <a:r>
                   <a:rPr/>
-                  <a:t>: variation explained by regression</a:t>
-                </a:r>
-              </a:p>
-              <a:p>
-                <a:pPr lvl="1"/>
-                <a:r>
-                  <a:rPr/>
-                  <a:t>difference between predicted values (ŷi ) and mean y (ȳ)</a:t>
-                </a:r>
-              </a:p>
-              <a:p>
-                <a:pPr lvl="1"/>
-                <a:r>
-                  <a:rPr/>
-                  <a:t>dfs= 1 for simple linear (parameters-1)</a:t>
+                  <a:t>: variation explained by regression — df = 1 for simple linear</a:t>
                 </a:r>
               </a:p>
               <a:p>
@@ -8955,68 +8960,7 @@
                 </a14:m>
                 <a:r>
                   <a:rPr/>
-                  <a:t>: variation not explained by regression</a:t>
-                </a:r>
-              </a:p>
-              <a:p>
-                <a:pPr lvl="1"/>
-                <a:r>
-                  <a:rPr/>
-                  <a:t>difference between observed (</a:t>
-                </a:r>
-                <a14:m>
-                  <m:oMath xmlns:m="http://schemas.openxmlformats.org/officeDocument/2006/math">
-                    <m:sSub>
-                      <m:e>
-                        <m:r>
-                          <m:t>y</m:t>
-                        </m:r>
-                      </m:e>
-                      <m:sub>
-                        <m:r>
-                          <m:t>i</m:t>
-                        </m:r>
-                      </m:sub>
-                    </m:sSub>
-                  </m:oMath>
-                </a14:m>
-                <a:r>
-                  <a:rPr/>
-                  <a:t>) and predicted (</a:t>
-                </a:r>
-                <a14:m>
-                  <m:oMath xmlns:m="http://schemas.openxmlformats.org/officeDocument/2006/math">
-                    <m:sSub>
-                      <m:e>
-                        <m:acc>
-                          <m:accPr>
-                            <m:chr m:val="̂"/>
-                          </m:accPr>
-                          <m:e>
-                            <m:r>
-                              <m:t>y</m:t>
-                            </m:r>
-                          </m:e>
-                        </m:acc>
-                      </m:e>
-                      <m:sub>
-                        <m:r>
-                          <m:t>i</m:t>
-                        </m:r>
-                      </m:sub>
-                    </m:sSub>
-                  </m:oMath>
-                </a14:m>
-                <a:r>
-                  <a:rPr/>
-                  <a:t>) values</a:t>
-                </a:r>
-              </a:p>
-              <a:p>
-                <a:pPr lvl="1"/>
-                <a:r>
-                  <a:rPr/>
-                  <a:t>dfs= n-2</a:t>
+                  <a:t>: variation not explained by regression — df = n − 2</a:t>
                 </a:r>
               </a:p>
               <a:p>
@@ -9054,59 +8998,7 @@
                 </a14:m>
                 <a:r>
                   <a:rPr/>
-                  <a:t>: total variation</a:t>
-                </a:r>
-              </a:p>
-              <a:p>
-                <a:pPr lvl="1"/>
-                <a:r>
-                  <a:rPr/>
-                  <a:t>sum of squared deviations of each observation (</a:t>
-                </a:r>
-                <a14:m>
-                  <m:oMath xmlns:m="http://schemas.openxmlformats.org/officeDocument/2006/math">
-                    <m:sSub>
-                      <m:e>
-                        <m:r>
-                          <m:t>y</m:t>
-                        </m:r>
-                      </m:e>
-                      <m:sub>
-                        <m:r>
-                          <m:t>i</m:t>
-                        </m:r>
-                      </m:sub>
-                    </m:sSub>
-                  </m:oMath>
-                </a14:m>
-                <a:r>
-                  <a:rPr/>
-                  <a:t>) from mean (</a:t>
-                </a:r>
-                <a14:m>
-                  <m:oMath xmlns:m="http://schemas.openxmlformats.org/officeDocument/2006/math">
-                    <m:acc>
-                      <m:accPr>
-                        <m:chr m:val="‾"/>
-                      </m:accPr>
-                      <m:e>
-                        <m:r>
-                          <m:t>y</m:t>
-                        </m:r>
-                      </m:e>
-                    </m:acc>
-                  </m:oMath>
-                </a14:m>
-                <a:r>
-                  <a:rPr/>
-                  <a:t>)</a:t>
-                </a:r>
-              </a:p>
-              <a:p>
-                <a:pPr lvl="1"/>
-                <a:r>
-                  <a:rPr/>
-                  <a:t>dfs = n-1</a:t>
+                  <a:t>: total variation — df = n − 1</a:t>
                 </a:r>
               </a:p>
             </p:txBody>
@@ -9148,7 +9040,7 @@
 </p:sld>
 </file>
 
-<file path=ppt/slides/slide32.xml><?xml version="1.0" encoding="utf-8"?>
+<file path=ppt/slides/slide38.xml><?xml version="1.0" encoding="utf-8"?>
 <p:sld xmlns:a="http://schemas.openxmlformats.org/drawingml/2006/main" xmlns:r="http://schemas.openxmlformats.org/officeDocument/2006/relationships" xmlns:p="http://schemas.openxmlformats.org/presentationml/2006/main">
   <p:cSld>
     <p:spTree>
@@ -9192,12 +9084,8 @@
               <a:buNone/>
             </a:pPr>
             <a:r>
-              <a:rPr b="1"/>
-              <a:t>Lecture 9:</a:t>
-            </a:r>
-            <a:r>
-              <a:rPr/>
-              <a:t> Linear Regression - estimates of variance</a:t>
+              <a:rPr/>
+              <a:t>Comparing Regression Fits</a:t>
             </a:r>
           </a:p>
         </p:txBody>
@@ -9277,14 +9165,11 @@
                 </a14:m>
                 <a:r>
                   <a:rPr/>
-                  <a:t>: variation explained by regression</a:t>
-                </a:r>
-              </a:p>
-              <a:p>
-                <a:pPr lvl="1"/>
-                <a:r>
-                  <a:rPr/>
-                  <a:t>GREATER IN C than D</a:t>
+                  <a:t>: </a:t>
+                </a:r>
+                <a:r>
+                  <a:rPr b="1"/>
+                  <a:t>greater in C than D</a:t>
                 </a:r>
               </a:p>
               <a:p>
@@ -9331,14 +9216,11 @@
                 </a14:m>
                 <a:r>
                   <a:rPr/>
-                  <a:t>: variation not explained by regression</a:t>
-                </a:r>
-              </a:p>
-              <a:p>
-                <a:pPr lvl="1"/>
-                <a:r>
-                  <a:rPr/>
-                  <a:t>GREATER IN B THAN A</a:t>
+                  <a:t>: </a:t>
+                </a:r>
+                <a:r>
+                  <a:rPr b="1"/>
+                  <a:t>greater in B than A</a:t>
                 </a:r>
               </a:p>
               <a:p>
@@ -9418,7 +9300,7 @@
 </p:sld>
 </file>
 
-<file path=ppt/slides/slide33.xml><?xml version="1.0" encoding="utf-8"?>
+<file path=ppt/slides/slide39.xml><?xml version="1.0" encoding="utf-8"?>
 <p:sld xmlns:a="http://schemas.openxmlformats.org/drawingml/2006/main" xmlns:r="http://schemas.openxmlformats.org/officeDocument/2006/relationships" xmlns:p="http://schemas.openxmlformats.org/presentationml/2006/main">
   <p:cSld>
     <p:spTree>
@@ -9462,12 +9344,8 @@
               <a:buNone/>
             </a:pPr>
             <a:r>
-              <a:rPr b="1"/>
-              <a:t>Lecture 9:</a:t>
-            </a:r>
-            <a:r>
-              <a:rPr/>
-              <a:t> Linear Regression - estimates of variance</a:t>
+              <a:rPr/>
+              <a:t>Sums of Squares and Degrees of Freedom</a:t>
             </a:r>
           </a:p>
         </p:txBody>
@@ -9492,135 +9370,131 @@
                 <a:pPr lvl="0" indent="0" marL="0">
                   <a:buNone/>
                 </a:pPr>
-                <a:r>
-                  <a:rPr/>
-                  <a:t>Sums of Squares and degress of freedome are:</a:t>
-                </a:r>
-              </a:p>
-              <a:p>
-                <a:pPr lvl="0" indent="0" marL="0">
-                  <a:buNone/>
-                </a:pPr>
                 <a14:m>
-                  <m:oMath xmlns:m="http://schemas.openxmlformats.org/officeDocument/2006/math">
-                    <m:r>
-                      <m:t>S</m:t>
-                    </m:r>
-                    <m:sSub>
-                      <m:e>
-                        <m:r>
-                          <m:t>S</m:t>
-                        </m:r>
-                      </m:e>
-                      <m:sub>
-                        <m:r>
-                          <m:t>r</m:t>
-                        </m:r>
-                        <m:r>
-                          <m:t>e</m:t>
-                        </m:r>
-                        <m:r>
-                          <m:t>g</m:t>
-                        </m:r>
-                        <m:r>
-                          <m:t>r</m:t>
-                        </m:r>
-                        <m:r>
-                          <m:t>e</m:t>
-                        </m:r>
-                        <m:r>
-                          <m:t>s</m:t>
-                        </m:r>
-                        <m:r>
-                          <m:t>s</m:t>
-                        </m:r>
-                        <m:r>
-                          <m:t>i</m:t>
-                        </m:r>
-                        <m:r>
-                          <m:t>o</m:t>
-                        </m:r>
-                        <m:r>
-                          <m:t>n</m:t>
-                        </m:r>
-                      </m:sub>
-                    </m:sSub>
-                    <m:r>
-                      <m:rPr>
-                        <m:sty m:val="p"/>
-                      </m:rPr>
-                      <m:t>+</m:t>
-                    </m:r>
-                    <m:r>
-                      <m:t>S</m:t>
-                    </m:r>
-                    <m:sSub>
-                      <m:e>
-                        <m:r>
-                          <m:t>S</m:t>
-                        </m:r>
-                      </m:e>
-                      <m:sub>
-                        <m:r>
-                          <m:t>r</m:t>
-                        </m:r>
-                        <m:r>
-                          <m:t>e</m:t>
-                        </m:r>
-                        <m:r>
-                          <m:t>s</m:t>
-                        </m:r>
-                        <m:r>
-                          <m:t>i</m:t>
-                        </m:r>
-                        <m:r>
-                          <m:t>d</m:t>
-                        </m:r>
-                        <m:r>
-                          <m:t>u</m:t>
-                        </m:r>
-                        <m:r>
-                          <m:t>a</m:t>
-                        </m:r>
-                        <m:r>
-                          <m:t>l</m:t>
-                        </m:r>
-                      </m:sub>
-                    </m:sSub>
-                    <m:r>
-                      <m:rPr>
-                        <m:sty m:val="p"/>
-                      </m:rPr>
-                      <m:t>=</m:t>
-                    </m:r>
-                    <m:r>
-                      <m:t>S</m:t>
-                    </m:r>
-                    <m:sSub>
-                      <m:e>
-                        <m:r>
-                          <m:t>S</m:t>
-                        </m:r>
-                      </m:e>
-                      <m:sub>
-                        <m:r>
-                          <m:t>t</m:t>
-                        </m:r>
-                        <m:r>
-                          <m:t>o</m:t>
-                        </m:r>
-                        <m:r>
-                          <m:t>t</m:t>
-                        </m:r>
-                        <m:r>
-                          <m:t>a</m:t>
-                        </m:r>
-                        <m:r>
-                          <m:t>l</m:t>
-                        </m:r>
-                      </m:sub>
-                    </m:sSub>
-                  </m:oMath>
+                  <m:oMathPara xmlns:m="http://schemas.openxmlformats.org/officeDocument/2006/math">
+                    <m:oMathParaPr>
+                      <m:jc m:val="center"/>
+                    </m:oMathParaPr>
+                    <m:oMath>
+                      <m:r>
+                        <m:t>S</m:t>
+                      </m:r>
+                      <m:sSub>
+                        <m:e>
+                          <m:r>
+                            <m:t>S</m:t>
+                          </m:r>
+                        </m:e>
+                        <m:sub>
+                          <m:r>
+                            <m:t>r</m:t>
+                          </m:r>
+                          <m:r>
+                            <m:t>e</m:t>
+                          </m:r>
+                          <m:r>
+                            <m:t>g</m:t>
+                          </m:r>
+                          <m:r>
+                            <m:t>r</m:t>
+                          </m:r>
+                          <m:r>
+                            <m:t>e</m:t>
+                          </m:r>
+                          <m:r>
+                            <m:t>s</m:t>
+                          </m:r>
+                          <m:r>
+                            <m:t>s</m:t>
+                          </m:r>
+                          <m:r>
+                            <m:t>i</m:t>
+                          </m:r>
+                          <m:r>
+                            <m:t>o</m:t>
+                          </m:r>
+                          <m:r>
+                            <m:t>n</m:t>
+                          </m:r>
+                        </m:sub>
+                      </m:sSub>
+                      <m:r>
+                        <m:rPr>
+                          <m:sty m:val="p"/>
+                        </m:rPr>
+                        <m:t>+</m:t>
+                      </m:r>
+                      <m:r>
+                        <m:t>S</m:t>
+                      </m:r>
+                      <m:sSub>
+                        <m:e>
+                          <m:r>
+                            <m:t>S</m:t>
+                          </m:r>
+                        </m:e>
+                        <m:sub>
+                          <m:r>
+                            <m:t>r</m:t>
+                          </m:r>
+                          <m:r>
+                            <m:t>e</m:t>
+                          </m:r>
+                          <m:r>
+                            <m:t>s</m:t>
+                          </m:r>
+                          <m:r>
+                            <m:t>i</m:t>
+                          </m:r>
+                          <m:r>
+                            <m:t>d</m:t>
+                          </m:r>
+                          <m:r>
+                            <m:t>u</m:t>
+                          </m:r>
+                          <m:r>
+                            <m:t>a</m:t>
+                          </m:r>
+                          <m:r>
+                            <m:t>l</m:t>
+                          </m:r>
+                        </m:sub>
+                      </m:sSub>
+                      <m:r>
+                        <m:rPr>
+                          <m:sty m:val="p"/>
+                        </m:rPr>
+                        <m:t>=</m:t>
+                      </m:r>
+                      <m:r>
+                        <m:t>S</m:t>
+                      </m:r>
+                      <m:sSub>
+                        <m:e>
+                          <m:r>
+                            <m:t>S</m:t>
+                          </m:r>
+                        </m:e>
+                        <m:sub>
+                          <m:r>
+                            <m:t>t</m:t>
+                          </m:r>
+                          <m:r>
+                            <m:t>o</m:t>
+                          </m:r>
+                          <m:r>
+                            <m:t>t</m:t>
+                          </m:r>
+                          <m:r>
+                            <m:t>a</m:t>
+                          </m:r>
+                          <m:r>
+                            <m:t>l</m:t>
+                          </m:r>
+                        </m:sub>
+                      </m:sSub>
+                    </m:oMath>
+                  </m:oMathPara>
                 </a14:m>
               </a:p>
               <a:p>
@@ -9628,132 +9502,137 @@
                   <a:buNone/>
                 </a:pPr>
                 <a14:m>
-                  <m:oMath xmlns:m="http://schemas.openxmlformats.org/officeDocument/2006/math">
-                    <m:r>
-                      <m:t>d</m:t>
-                    </m:r>
-                    <m:sSub>
-                      <m:e>
-                        <m:r>
-                          <m:t>f</m:t>
-                        </m:r>
-                      </m:e>
-                      <m:sub>
-                        <m:r>
-                          <m:t>r</m:t>
-                        </m:r>
-                        <m:r>
-                          <m:t>e</m:t>
-                        </m:r>
-                        <m:r>
-                          <m:t>g</m:t>
-                        </m:r>
-                        <m:r>
-                          <m:t>r</m:t>
-                        </m:r>
-                        <m:r>
-                          <m:t>e</m:t>
-                        </m:r>
-                        <m:r>
-                          <m:t>s</m:t>
-                        </m:r>
-                        <m:r>
-                          <m:t>s</m:t>
-                        </m:r>
-                        <m:r>
-                          <m:t>i</m:t>
-                        </m:r>
-                        <m:r>
-                          <m:t>o</m:t>
-                        </m:r>
-                        <m:r>
-                          <m:t>n</m:t>
-                        </m:r>
-                      </m:sub>
-                    </m:sSub>
-                    <m:r>
-                      <m:rPr>
-                        <m:sty m:val="p"/>
-                      </m:rPr>
-                      <m:t>+</m:t>
-                    </m:r>
-                    <m:r>
-                      <m:t>d</m:t>
-                    </m:r>
-                    <m:sSub>
-                      <m:e>
-                        <m:r>
-                          <m:t>f</m:t>
-                        </m:r>
-                      </m:e>
-                      <m:sub>
-                        <m:r>
-                          <m:t>r</m:t>
-                        </m:r>
-                        <m:r>
-                          <m:t>e</m:t>
-                        </m:r>
-                        <m:r>
-                          <m:t>s</m:t>
-                        </m:r>
-                        <m:r>
-                          <m:t>i</m:t>
-                        </m:r>
-                        <m:r>
-                          <m:t>d</m:t>
-                        </m:r>
-                        <m:r>
-                          <m:t>u</m:t>
-                        </m:r>
-                        <m:r>
-                          <m:t>a</m:t>
-                        </m:r>
-                        <m:r>
-                          <m:t>l</m:t>
-                        </m:r>
-                      </m:sub>
-                    </m:sSub>
-                    <m:r>
-                      <m:rPr>
-                        <m:sty m:val="p"/>
-                      </m:rPr>
-                      <m:t>=</m:t>
-                    </m:r>
-                    <m:r>
-                      <m:t>d</m:t>
-                    </m:r>
-                    <m:sSub>
-                      <m:e>
-                        <m:r>
-                          <m:t>f</m:t>
-                        </m:r>
-                      </m:e>
-                      <m:sub>
-                        <m:r>
-                          <m:t>t</m:t>
-                        </m:r>
-                        <m:r>
-                          <m:t>o</m:t>
-                        </m:r>
-                        <m:r>
-                          <m:t>t</m:t>
-                        </m:r>
-                        <m:r>
-                          <m:t>a</m:t>
-                        </m:r>
-                        <m:r>
-                          <m:t>l</m:t>
-                        </m:r>
-                      </m:sub>
-                    </m:sSub>
-                  </m:oMath>
+                  <m:oMathPara xmlns:m="http://schemas.openxmlformats.org/officeDocument/2006/math">
+                    <m:oMathParaPr>
+                      <m:jc m:val="center"/>
+                    </m:oMathParaPr>
+                    <m:oMath>
+                      <m:r>
+                        <m:t>d</m:t>
+                      </m:r>
+                      <m:sSub>
+                        <m:e>
+                          <m:r>
+                            <m:t>f</m:t>
+                          </m:r>
+                        </m:e>
+                        <m:sub>
+                          <m:r>
+                            <m:t>r</m:t>
+                          </m:r>
+                          <m:r>
+                            <m:t>e</m:t>
+                          </m:r>
+                          <m:r>
+                            <m:t>g</m:t>
+                          </m:r>
+                          <m:r>
+                            <m:t>r</m:t>
+                          </m:r>
+                          <m:r>
+                            <m:t>e</m:t>
+                          </m:r>
+                          <m:r>
+                            <m:t>s</m:t>
+                          </m:r>
+                          <m:r>
+                            <m:t>s</m:t>
+                          </m:r>
+                          <m:r>
+                            <m:t>i</m:t>
+                          </m:r>
+                          <m:r>
+                            <m:t>o</m:t>
+                          </m:r>
+                          <m:r>
+                            <m:t>n</m:t>
+                          </m:r>
+                        </m:sub>
+                      </m:sSub>
+                      <m:r>
+                        <m:rPr>
+                          <m:sty m:val="p"/>
+                        </m:rPr>
+                        <m:t>+</m:t>
+                      </m:r>
+                      <m:r>
+                        <m:t>d</m:t>
+                      </m:r>
+                      <m:sSub>
+                        <m:e>
+                          <m:r>
+                            <m:t>f</m:t>
+                          </m:r>
+                        </m:e>
+                        <m:sub>
+                          <m:r>
+                            <m:t>r</m:t>
+                          </m:r>
+                          <m:r>
+                            <m:t>e</m:t>
+                          </m:r>
+                          <m:r>
+                            <m:t>s</m:t>
+                          </m:r>
+                          <m:r>
+                            <m:t>i</m:t>
+                          </m:r>
+                          <m:r>
+                            <m:t>d</m:t>
+                          </m:r>
+                          <m:r>
+                            <m:t>u</m:t>
+                          </m:r>
+                          <m:r>
+                            <m:t>a</m:t>
+                          </m:r>
+                          <m:r>
+                            <m:t>l</m:t>
+                          </m:r>
+                        </m:sub>
+                      </m:sSub>
+                      <m:r>
+                        <m:rPr>
+                          <m:sty m:val="p"/>
+                        </m:rPr>
+                        <m:t>=</m:t>
+                      </m:r>
+                      <m:r>
+                        <m:t>d</m:t>
+                      </m:r>
+                      <m:sSub>
+                        <m:e>
+                          <m:r>
+                            <m:t>f</m:t>
+                          </m:r>
+                        </m:e>
+                        <m:sub>
+                          <m:r>
+                            <m:t>t</m:t>
+                          </m:r>
+                          <m:r>
+                            <m:t>o</m:t>
+                          </m:r>
+                          <m:r>
+                            <m:t>t</m:t>
+                          </m:r>
+                          <m:r>
+                            <m:t>a</m:t>
+                          </m:r>
+                          <m:r>
+                            <m:t>l</m:t>
+                          </m:r>
+                        </m:sub>
+                      </m:sSub>
+                    </m:oMath>
+                  </m:oMathPara>
                 </a14:m>
               </a:p>
               <a:p>
                 <a:pPr lvl="0"/>
                 <a:r>
                   <a:rPr/>
-                  <a:t>Sums of Squares depends on n</a:t>
+                  <a:t>Sums of squares depend on n</a:t>
                 </a:r>
               </a:p>
               <a:p>
@@ -9761,238 +9640,6 @@
                 <a:r>
                   <a:rPr/>
                   <a:t>We need a different estimate of variance</a:t>
-                </a:r>
-              </a:p>
-            </p:txBody>
-          </p:sp>
-        </mc:Choice>
-      </mc:AlternateContent>
-      <p:pic>
-        <p:nvPicPr>
-          <p:cNvPr descr="images/clipboard-2758972276.png" id="0" name="Picture 1"/>
-          <p:cNvPicPr>
-            <a:picLocks noGrp="1" noChangeAspect="1"/>
-          </p:cNvPicPr>
-          <p:nvPr/>
-        </p:nvPicPr>
-        <p:blipFill>
-          <a:blip r:embed="rId2"/>
-          <a:stretch>
-            <a:fillRect/>
-          </a:stretch>
-        </p:blipFill>
-        <p:spPr bwMode="auto">
-          <a:xfrm>
-            <a:off x="6121400" y="2438400"/>
-            <a:ext cx="2781300" cy="914400"/>
-          </a:xfrm>
-          <a:prstGeom prst="rect">
-            <a:avLst/>
-          </a:prstGeom>
-          <a:noFill/>
-          <a:ln w="9525">
-            <a:noFill/>
-            <a:headEnd/>
-            <a:tailEnd/>
-          </a:ln>
-        </p:spPr>
-      </p:pic>
-    </p:spTree>
-  </p:cSld>
-</p:sld>
-</file>
-
-<file path=ppt/slides/slide34.xml><?xml version="1.0" encoding="utf-8"?>
-<p:sld xmlns:a="http://schemas.openxmlformats.org/drawingml/2006/main" xmlns:r="http://schemas.openxmlformats.org/officeDocument/2006/relationships" xmlns:p="http://schemas.openxmlformats.org/presentationml/2006/main">
-  <p:cSld>
-    <p:spTree>
-      <p:nvGrpSpPr>
-        <p:cNvPr id="1" name=""/>
-        <p:cNvGrpSpPr/>
-        <p:nvPr/>
-      </p:nvGrpSpPr>
-      <p:grpSpPr>
-        <a:xfrm>
-          <a:off x="0" y="0"/>
-          <a:ext cx="0" cy="0"/>
-          <a:chOff x="0" y="0"/>
-          <a:chExt cx="0" cy="0"/>
-        </a:xfrm>
-      </p:grpSpPr>
-      <p:sp>
-        <p:nvSpPr>
-          <p:cNvPr id="2" name="Title 1"/>
-          <p:cNvSpPr>
-            <a:spLocks noGrp="1"/>
-          </p:cNvSpPr>
-          <p:nvPr>
-            <p:ph type="title"/>
-          </p:nvPr>
-        </p:nvSpPr>
-        <p:spPr>
-          <a:xfrm>
-            <a:off x="0" y="0"/>
-            <a:ext cx="9144000" cy="602780"/>
-          </a:xfrm>
-          <a:solidFill>
-            <a:srgbClr val="70121D"/>
-          </a:solidFill>
-        </p:spPr>
-        <p:txBody>
-          <a:bodyPr/>
-          <a:lstStyle/>
-          <a:p>
-            <a:pPr lvl="0" indent="0" marL="0">
-              <a:buNone/>
-            </a:pPr>
-            <a:r>
-              <a:rPr b="1"/>
-              <a:t>Lecture 9:</a:t>
-            </a:r>
-            <a:r>
-              <a:rPr/>
-              <a:t> Linear Regression - estimates of variance</a:t>
-            </a:r>
-          </a:p>
-        </p:txBody>
-      </p:sp>
-      <mc:AlternateContent xmlns:mc="http://schemas.openxmlformats.org/markup-compatibility/2006">
-        <mc:Choice xmlns:a14="http://schemas.microsoft.com/office/drawing/2010/main" Requires="a14">
-          <p:sp>
-            <p:nvSpPr>
-              <p:cNvPr id="3" name="Content Placeholder 2"/>
-              <p:cNvSpPr>
-                <a:spLocks noGrp="1"/>
-              </p:cNvSpPr>
-              <p:nvPr>
-                <p:ph idx="1" sz="half"/>
-              </p:nvPr>
-            </p:nvSpPr>
-            <p:spPr/>
-            <p:txBody>
-              <a:bodyPr/>
-              <a:lstStyle/>
-              <a:p>
-                <a:pPr lvl="0" indent="0" marL="0">
-                  <a:buNone/>
-                </a:pPr>
-                <a:r>
-                  <a:rPr/>
-                  <a:t>Sums of Squares converted to Mean Squares</a:t>
-                </a:r>
-              </a:p>
-              <a:p>
-                <a:pPr lvl="0"/>
-                <a:r>
-                  <a:rPr/>
-                  <a:t>Sums of Squares divided by degrees of freedom - does not depend on n</a:t>
-                </a:r>
-              </a:p>
-              <a:p>
-                <a:pPr lvl="0"/>
-                <a14:m>
-                  <m:oMath xmlns:m="http://schemas.openxmlformats.org/officeDocument/2006/math">
-                    <m:r>
-                      <m:t>M</m:t>
-                    </m:r>
-                    <m:sSub>
-                      <m:e>
-                        <m:r>
-                          <m:t>S</m:t>
-                        </m:r>
-                      </m:e>
-                      <m:sub>
-                        <m:r>
-                          <m:t>r</m:t>
-                        </m:r>
-                        <m:r>
-                          <m:t>e</m:t>
-                        </m:r>
-                        <m:r>
-                          <m:t>s</m:t>
-                        </m:r>
-                        <m:r>
-                          <m:t>i</m:t>
-                        </m:r>
-                        <m:r>
-                          <m:t>d</m:t>
-                        </m:r>
-                        <m:r>
-                          <m:t>u</m:t>
-                        </m:r>
-                        <m:r>
-                          <m:t>a</m:t>
-                        </m:r>
-                        <m:r>
-                          <m:t>l</m:t>
-                        </m:r>
-                      </m:sub>
-                    </m:sSub>
-                  </m:oMath>
-                </a14:m>
-                <a:r>
-                  <a:rPr/>
-                  <a:t>: estimate population variation</a:t>
-                </a:r>
-              </a:p>
-              <a:p>
-                <a:pPr lvl="0"/>
-                <a14:m>
-                  <m:oMath xmlns:m="http://schemas.openxmlformats.org/officeDocument/2006/math">
-                    <m:r>
-                      <m:t>M</m:t>
-                    </m:r>
-                    <m:sSub>
-                      <m:e>
-                        <m:r>
-                          <m:t>S</m:t>
-                        </m:r>
-                      </m:e>
-                      <m:sub>
-                        <m:r>
-                          <m:t>r</m:t>
-                        </m:r>
-                        <m:r>
-                          <m:t>e</m:t>
-                        </m:r>
-                        <m:r>
-                          <m:t>g</m:t>
-                        </m:r>
-                        <m:r>
-                          <m:t>r</m:t>
-                        </m:r>
-                        <m:r>
-                          <m:t>e</m:t>
-                        </m:r>
-                        <m:r>
-                          <m:t>s</m:t>
-                        </m:r>
-                        <m:r>
-                          <m:t>s</m:t>
-                        </m:r>
-                        <m:r>
-                          <m:t>i</m:t>
-                        </m:r>
-                        <m:r>
-                          <m:t>o</m:t>
-                        </m:r>
-                        <m:r>
-                          <m:t>n</m:t>
-                        </m:r>
-                      </m:sub>
-                    </m:sSub>
-                  </m:oMath>
-                </a14:m>
-                <a:r>
-                  <a:rPr/>
-                  <a:t>: estimate pop variation and variation due to X-Y relationship</a:t>
-                </a:r>
-              </a:p>
-              <a:p>
-                <a:pPr lvl="0"/>
-                <a:r>
-                  <a:rPr/>
-                  <a:t>Mean Squares are not additive</a:t>
                 </a:r>
               </a:p>
             </p:txBody>
@@ -10064,8 +9711,11 @@
         <p:spPr>
           <a:xfrm>
             <a:off x="0" y="0"/>
-            <a:ext cx="9144000" cy="582780"/>
+            <a:ext cx="9144000" cy="602780"/>
           </a:xfrm>
+          <a:solidFill>
+            <a:srgbClr val="70121D"/>
+          </a:solidFill>
         </p:spPr>
         <p:txBody>
           <a:bodyPr/>
@@ -10075,12 +9725,8 @@
               <a:buNone/>
             </a:pPr>
             <a:r>
-              <a:rPr b="1"/>
-              <a:t>Lecture 9:</a:t>
-            </a:r>
-            <a:r>
-              <a:rPr/>
-              <a:t> Correlation vs. Regression:</a:t>
+              <a:rPr/>
+              <a:t>Today’s Objectives</a:t>
             </a:r>
           </a:p>
         </p:txBody>
@@ -10092,7 +9738,7 @@
             <a:spLocks noGrp="1"/>
           </p:cNvSpPr>
           <p:nvPr>
-            <p:ph idx="1"/>
+            <p:ph idx="1" sz="half"/>
           </p:nvPr>
         </p:nvSpPr>
         <p:spPr/>
@@ -10101,18 +9747,478 @@
           <a:lstStyle/>
           <a:p>
             <a:pPr lvl="0" indent="0" marL="0">
-              <a:spcBef>
-                <a:spcPts val="3000"/>
-              </a:spcBef>
               <a:buNone/>
             </a:pPr>
             <a:r>
-              <a:rPr b="1"/>
-              <a:t>What’s the Difference?</a:t>
-            </a:r>
-          </a:p>
-        </p:txBody>
-      </p:sp>
+              <a:rPr/>
+              <a:t>This lecture covers two fundamental statistical techniques in biology: correlation and regression analysis. Based on Chapters 16–17 from Whitlock &amp; Schluter’s </a:t>
+            </a:r>
+            <a:r>
+              <a:rPr i="1"/>
+              <a:t>The Analysis of Biological Data</a:t>
+            </a:r>
+            <a:r>
+              <a:rPr/>
+              <a:t> (3rd edition), we’ll explore:</a:t>
+            </a:r>
+          </a:p>
+          <a:p>
+            <a:pPr lvl="0"/>
+            <a:r>
+              <a:rPr/>
+              <a:t>Correlation analysis: measuring relationships between variables</a:t>
+            </a:r>
+          </a:p>
+          <a:p>
+            <a:pPr lvl="0"/>
+            <a:r>
+              <a:rPr/>
+              <a:t>The distinction between correlation and regression</a:t>
+            </a:r>
+          </a:p>
+          <a:p>
+            <a:pPr lvl="0"/>
+            <a:r>
+              <a:rPr/>
+              <a:t>Simple linear regression: predicting one variable from another</a:t>
+            </a:r>
+          </a:p>
+          <a:p>
+            <a:pPr lvl="0"/>
+            <a:r>
+              <a:rPr/>
+              <a:t>Estimating and interpreting regression parameters</a:t>
+            </a:r>
+          </a:p>
+          <a:p>
+            <a:pPr lvl="0"/>
+            <a:r>
+              <a:rPr/>
+              <a:t>Testing assumptions and handling violations</a:t>
+            </a:r>
+          </a:p>
+          <a:p>
+            <a:pPr lvl="0"/>
+            <a:r>
+              <a:rPr/>
+              <a:t>Analysis of variance in regression</a:t>
+            </a:r>
+          </a:p>
+          <a:p>
+            <a:pPr lvl="0"/>
+            <a:r>
+              <a:rPr/>
+              <a:t>Model selection and comparison</a:t>
+            </a:r>
+          </a:p>
+        </p:txBody>
+      </p:sp>
+      <p:sp>
+        <p:nvSpPr>
+          <p:cNvPr id="4" name="Content Placeholder 3"/>
+          <p:cNvSpPr>
+            <a:spLocks noGrp="1"/>
+          </p:cNvSpPr>
+          <p:nvPr>
+            <p:ph idx="2" sz="half"/>
+          </p:nvPr>
+        </p:nvSpPr>
+        <p:spPr/>
+        <p:txBody>
+          <a:bodyPr/>
+          <a:lstStyle/>
+          <a:p>
+            <a:pPr lvl="0" indent="0" marL="1270000">
+              <a:buNone/>
+            </a:pPr>
+            <a:r>
+              <a:rPr sz="2000" b="1"/>
+              <a:t>Note</a:t>
+            </a:r>
+          </a:p>
+          <a:p>
+            <a:pPr lvl="0" indent="0" marL="1270000">
+              <a:buNone/>
+            </a:pPr>
+            <a:r>
+              <a:rPr sz="2000" b="1"/>
+              <a:t>📖 Reference</a:t>
+            </a:r>
+          </a:p>
+          <a:p>
+            <a:pPr lvl="0" indent="0" marL="1270000">
+              <a:buNone/>
+            </a:pPr>
+            <a:r>
+              <a:rPr sz="2000"/>
+              <a:t>Whitlock &amp; Schluter, Ch. 16 (Correlation) and Ch. 17 (Regression) are the core references for this entire lecture.</a:t>
+            </a:r>
+          </a:p>
+        </p:txBody>
+      </p:sp>
+    </p:spTree>
+  </p:cSld>
+</p:sld>
+</file>
+
+<file path=ppt/slides/slide40.xml><?xml version="1.0" encoding="utf-8"?>
+<p:sld xmlns:a="http://schemas.openxmlformats.org/drawingml/2006/main" xmlns:r="http://schemas.openxmlformats.org/officeDocument/2006/relationships" xmlns:p="http://schemas.openxmlformats.org/presentationml/2006/main">
+  <p:cSld>
+    <p:spTree>
+      <p:nvGrpSpPr>
+        <p:cNvPr id="1" name=""/>
+        <p:cNvGrpSpPr/>
+        <p:nvPr/>
+      </p:nvGrpSpPr>
+      <p:grpSpPr>
+        <a:xfrm>
+          <a:off x="0" y="0"/>
+          <a:ext cx="0" cy="0"/>
+          <a:chOff x="0" y="0"/>
+          <a:chExt cx="0" cy="0"/>
+        </a:xfrm>
+      </p:grpSpPr>
+      <p:sp>
+        <p:nvSpPr>
+          <p:cNvPr id="2" name="Title 1"/>
+          <p:cNvSpPr>
+            <a:spLocks noGrp="1"/>
+          </p:cNvSpPr>
+          <p:nvPr>
+            <p:ph type="title"/>
+          </p:nvPr>
+        </p:nvSpPr>
+        <p:spPr>
+          <a:xfrm>
+            <a:off x="0" y="0"/>
+            <a:ext cx="9144000" cy="602780"/>
+          </a:xfrm>
+          <a:solidFill>
+            <a:srgbClr val="70121D"/>
+          </a:solidFill>
+        </p:spPr>
+        <p:txBody>
+          <a:bodyPr/>
+          <a:lstStyle/>
+          <a:p>
+            <a:pPr lvl="0" indent="0" marL="0">
+              <a:buNone/>
+            </a:pPr>
+            <a:r>
+              <a:rPr/>
+              <a:t>From Sums of Squares to Mean Squares</a:t>
+            </a:r>
+          </a:p>
+        </p:txBody>
+      </p:sp>
+      <mc:AlternateContent xmlns:mc="http://schemas.openxmlformats.org/markup-compatibility/2006">
+        <mc:Choice xmlns:a14="http://schemas.microsoft.com/office/drawing/2010/main" Requires="a14">
+          <p:sp>
+            <p:nvSpPr>
+              <p:cNvPr id="3" name="Content Placeholder 2"/>
+              <p:cNvSpPr>
+                <a:spLocks noGrp="1"/>
+              </p:cNvSpPr>
+              <p:nvPr>
+                <p:ph idx="1" sz="half"/>
+              </p:nvPr>
+            </p:nvSpPr>
+            <p:spPr/>
+            <p:txBody>
+              <a:bodyPr/>
+              <a:lstStyle/>
+              <a:p>
+                <a:pPr lvl="0" indent="0" marL="0">
+                  <a:buNone/>
+                </a:pPr>
+                <a:r>
+                  <a:rPr/>
+                  <a:t>Sums of squares converted to mean squares:</a:t>
+                </a:r>
+              </a:p>
+              <a:p>
+                <a:pPr lvl="0"/>
+                <a:r>
+                  <a:rPr/>
+                  <a:t>Sums of squares divided by degrees of freedom — does not depend on n</a:t>
+                </a:r>
+              </a:p>
+              <a:p>
+                <a:pPr lvl="0"/>
+                <a14:m>
+                  <m:oMath xmlns:m="http://schemas.openxmlformats.org/officeDocument/2006/math">
+                    <m:r>
+                      <m:t>M</m:t>
+                    </m:r>
+                    <m:sSub>
+                      <m:e>
+                        <m:r>
+                          <m:t>S</m:t>
+                        </m:r>
+                      </m:e>
+                      <m:sub>
+                        <m:r>
+                          <m:t>r</m:t>
+                        </m:r>
+                        <m:r>
+                          <m:t>e</m:t>
+                        </m:r>
+                        <m:r>
+                          <m:t>s</m:t>
+                        </m:r>
+                        <m:r>
+                          <m:t>i</m:t>
+                        </m:r>
+                        <m:r>
+                          <m:t>d</m:t>
+                        </m:r>
+                        <m:r>
+                          <m:t>u</m:t>
+                        </m:r>
+                        <m:r>
+                          <m:t>a</m:t>
+                        </m:r>
+                        <m:r>
+                          <m:t>l</m:t>
+                        </m:r>
+                      </m:sub>
+                    </m:sSub>
+                  </m:oMath>
+                </a14:m>
+                <a:r>
+                  <a:rPr/>
+                  <a:t>: estimates population variation</a:t>
+                </a:r>
+              </a:p>
+              <a:p>
+                <a:pPr lvl="0"/>
+                <a14:m>
+                  <m:oMath xmlns:m="http://schemas.openxmlformats.org/officeDocument/2006/math">
+                    <m:r>
+                      <m:t>M</m:t>
+                    </m:r>
+                    <m:sSub>
+                      <m:e>
+                        <m:r>
+                          <m:t>S</m:t>
+                        </m:r>
+                      </m:e>
+                      <m:sub>
+                        <m:r>
+                          <m:t>r</m:t>
+                        </m:r>
+                        <m:r>
+                          <m:t>e</m:t>
+                        </m:r>
+                        <m:r>
+                          <m:t>g</m:t>
+                        </m:r>
+                        <m:r>
+                          <m:t>r</m:t>
+                        </m:r>
+                        <m:r>
+                          <m:t>e</m:t>
+                        </m:r>
+                        <m:r>
+                          <m:t>s</m:t>
+                        </m:r>
+                        <m:r>
+                          <m:t>s</m:t>
+                        </m:r>
+                        <m:r>
+                          <m:t>i</m:t>
+                        </m:r>
+                        <m:r>
+                          <m:t>o</m:t>
+                        </m:r>
+                        <m:r>
+                          <m:t>n</m:t>
+                        </m:r>
+                      </m:sub>
+                    </m:sSub>
+                  </m:oMath>
+                </a14:m>
+                <a:r>
+                  <a:rPr/>
+                  <a:t>: estimates population variation </a:t>
+                </a:r>
+                <a:r>
+                  <a:rPr i="1"/>
+                  <a:t>and</a:t>
+                </a:r>
+                <a:r>
+                  <a:rPr/>
+                  <a:t> variation due to the X-Y relationship</a:t>
+                </a:r>
+              </a:p>
+              <a:p>
+                <a:pPr lvl="0"/>
+                <a:r>
+                  <a:rPr/>
+                  <a:t>Mean squares are </a:t>
+                </a:r>
+                <a:r>
+                  <a:rPr b="1"/>
+                  <a:t>not</a:t>
+                </a:r>
+                <a:r>
+                  <a:rPr/>
+                  <a:t> additive</a:t>
+                </a:r>
+              </a:p>
+              <a:p>
+                <a:pPr lvl="0" indent="0" marL="1270000">
+                  <a:buNone/>
+                </a:pPr>
+                <a:r>
+                  <a:rPr sz="2000" b="1"/>
+                  <a:t>Note</a:t>
+                </a:r>
+              </a:p>
+              <a:p>
+                <a:pPr lvl="0" indent="0" marL="1270000">
+                  <a:buNone/>
+                </a:pPr>
+                <a:r>
+                  <a:rPr sz="2000" b="1"/>
+                  <a:t>✅ Key idea</a:t>
+                </a:r>
+              </a:p>
+              <a:p>
+                <a:pPr lvl="0" indent="0" marL="1270000">
+                  <a:buNone/>
+                </a:pPr>
+                <a:r>
+                  <a:rPr sz="2000"/>
+                  <a:t>The F-ratio in a regression ANOVA table is exactly </a:t>
+                </a:r>
+                <a14:m>
+                  <m:oMath xmlns:m="http://schemas.openxmlformats.org/officeDocument/2006/math">
+                    <m:r>
+                      <m:t>M</m:t>
+                    </m:r>
+                    <m:sSub>
+                      <m:e>
+                        <m:r>
+                          <m:t>S</m:t>
+                        </m:r>
+                      </m:e>
+                      <m:sub>
+                        <m:r>
+                          <m:t>r</m:t>
+                        </m:r>
+                        <m:r>
+                          <m:t>e</m:t>
+                        </m:r>
+                        <m:r>
+                          <m:t>g</m:t>
+                        </m:r>
+                        <m:r>
+                          <m:t>r</m:t>
+                        </m:r>
+                        <m:r>
+                          <m:t>e</m:t>
+                        </m:r>
+                        <m:r>
+                          <m:t>s</m:t>
+                        </m:r>
+                        <m:r>
+                          <m:t>s</m:t>
+                        </m:r>
+                        <m:r>
+                          <m:t>i</m:t>
+                        </m:r>
+                        <m:r>
+                          <m:t>o</m:t>
+                        </m:r>
+                        <m:r>
+                          <m:t>n</m:t>
+                        </m:r>
+                      </m:sub>
+                    </m:sSub>
+                    <m:r>
+                      <m:rPr>
+                        <m:sty m:val="p"/>
+                      </m:rPr>
+                      <m:t>/</m:t>
+                    </m:r>
+                    <m:r>
+                      <m:t>M</m:t>
+                    </m:r>
+                    <m:sSub>
+                      <m:e>
+                        <m:r>
+                          <m:t>S</m:t>
+                        </m:r>
+                      </m:e>
+                      <m:sub>
+                        <m:r>
+                          <m:t>r</m:t>
+                        </m:r>
+                        <m:r>
+                          <m:t>e</m:t>
+                        </m:r>
+                        <m:r>
+                          <m:t>s</m:t>
+                        </m:r>
+                        <m:r>
+                          <m:t>i</m:t>
+                        </m:r>
+                        <m:r>
+                          <m:t>d</m:t>
+                        </m:r>
+                        <m:r>
+                          <m:t>u</m:t>
+                        </m:r>
+                        <m:r>
+                          <m:t>a</m:t>
+                        </m:r>
+                        <m:r>
+                          <m:t>l</m:t>
+                        </m:r>
+                      </m:sub>
+                    </m:sSub>
+                  </m:oMath>
+                </a14:m>
+                <a:r>
+                  <a:rPr sz="2000"/>
+                  <a:t> — the same logic you’ll see again when we get to ANOVA for group comparisons.</a:t>
+                </a:r>
+              </a:p>
+            </p:txBody>
+          </p:sp>
+        </mc:Choice>
+      </mc:AlternateContent>
+      <p:pic>
+        <p:nvPicPr>
+          <p:cNvPr descr="images/clipboard-2758972276.png" id="0" name="Picture 1"/>
+          <p:cNvPicPr>
+            <a:picLocks noGrp="1" noChangeAspect="1"/>
+          </p:cNvPicPr>
+          <p:nvPr/>
+        </p:nvPicPr>
+        <p:blipFill>
+          <a:blip r:embed="rId2"/>
+          <a:stretch>
+            <a:fillRect/>
+          </a:stretch>
+        </p:blipFill>
+        <p:spPr bwMode="auto">
+          <a:xfrm>
+            <a:off x="6121400" y="2438400"/>
+            <a:ext cx="2781300" cy="914400"/>
+          </a:xfrm>
+          <a:prstGeom prst="rect">
+            <a:avLst/>
+          </a:prstGeom>
+          <a:noFill/>
+          <a:ln w="9525">
+            <a:noFill/>
+            <a:headEnd/>
+            <a:tailEnd/>
+          </a:ln>
+        </p:spPr>
+      </p:pic>
     </p:spTree>
   </p:cSld>
 </p:sld>
@@ -10137,23 +10243,105 @@
       </p:grpSpPr>
       <p:sp>
         <p:nvSpPr>
-          <p:cNvPr id="3" name="Content Placeholder 2"/>
-          <p:cNvSpPr>
-            <a:spLocks noGrp="1"/>
-          </p:cNvSpPr>
-          <p:nvPr>
-            <p:ph idx="1" sz="half"/>
-          </p:nvPr>
-        </p:nvSpPr>
-        <p:spPr/>
+          <p:cNvPr id="2" name="Title 1"/>
+          <p:cNvSpPr>
+            <a:spLocks noGrp="1"/>
+          </p:cNvSpPr>
+          <p:nvPr>
+            <p:ph type="title"/>
+          </p:nvPr>
+        </p:nvSpPr>
+        <p:spPr>
+          <a:xfrm>
+            <a:off x="0" y="0"/>
+            <a:ext cx="9144000" cy="582780"/>
+          </a:xfrm>
+        </p:spPr>
         <p:txBody>
           <a:bodyPr/>
           <a:lstStyle/>
           <a:p>
             <a:pPr lvl="0" indent="0" marL="0">
-              <a:spcBef>
-                <a:spcPts val="3000"/>
-              </a:spcBef>
+              <a:buNone/>
+            </a:pPr>
+            <a:r>
+              <a:rPr/>
+              <a:t>Part 2 · Correlation vs. Regression</a:t>
+            </a:r>
+          </a:p>
+        </p:txBody>
+      </p:sp>
+    </p:spTree>
+  </p:cSld>
+</p:sld>
+</file>
+
+<file path=ppt/slides/slide6.xml><?xml version="1.0" encoding="utf-8"?>
+<p:sld xmlns:a="http://schemas.openxmlformats.org/drawingml/2006/main" xmlns:r="http://schemas.openxmlformats.org/officeDocument/2006/relationships" xmlns:p="http://schemas.openxmlformats.org/presentationml/2006/main">
+  <p:cSld>
+    <p:spTree>
+      <p:nvGrpSpPr>
+        <p:cNvPr id="1" name=""/>
+        <p:cNvGrpSpPr/>
+        <p:nvPr/>
+      </p:nvGrpSpPr>
+      <p:grpSpPr>
+        <a:xfrm>
+          <a:off x="0" y="0"/>
+          <a:ext cx="0" cy="0"/>
+          <a:chOff x="0" y="0"/>
+          <a:chExt cx="0" cy="0"/>
+        </a:xfrm>
+      </p:grpSpPr>
+      <p:sp>
+        <p:nvSpPr>
+          <p:cNvPr id="2" name="Title 1"/>
+          <p:cNvSpPr>
+            <a:spLocks noGrp="1"/>
+          </p:cNvSpPr>
+          <p:nvPr>
+            <p:ph type="title"/>
+          </p:nvPr>
+        </p:nvSpPr>
+        <p:spPr>
+          <a:xfrm>
+            <a:off x="0" y="0"/>
+            <a:ext cx="9144000" cy="602780"/>
+          </a:xfrm>
+          <a:solidFill>
+            <a:srgbClr val="70121D"/>
+          </a:solidFill>
+        </p:spPr>
+        <p:txBody>
+          <a:bodyPr/>
+          <a:lstStyle/>
+          <a:p>
+            <a:pPr lvl="0" indent="0" marL="0">
+              <a:buNone/>
+            </a:pPr>
+            <a:r>
+              <a:rPr/>
+              <a:t>Correlation vs. Regression — What’s the Difference?</a:t>
+            </a:r>
+          </a:p>
+        </p:txBody>
+      </p:sp>
+      <p:sp>
+        <p:nvSpPr>
+          <p:cNvPr id="3" name="Content Placeholder 2"/>
+          <p:cNvSpPr>
+            <a:spLocks noGrp="1"/>
+          </p:cNvSpPr>
+          <p:nvPr>
+            <p:ph idx="1" sz="half"/>
+          </p:nvPr>
+        </p:nvSpPr>
+        <p:spPr/>
+        <p:txBody>
+          <a:bodyPr/>
+          <a:lstStyle/>
+          <a:p>
+            <a:pPr lvl="0" indent="0" marL="0">
               <a:buNone/>
             </a:pPr>
             <a:r>
@@ -10200,14 +10388,11 @@
             <a:pPr lvl="0"/>
             <a:r>
               <a:rPr/>
-              <a:t>Expressed as a correlation coefficient (r) from -1 to +1</a:t>
+              <a:t>Expressed as a correlation coefficient (r) from −1 to +1</a:t>
             </a:r>
           </a:p>
           <a:p>
             <a:pPr lvl="0" indent="0" marL="0">
-              <a:spcBef>
-                <a:spcPts val="3000"/>
-              </a:spcBef>
               <a:buNone/>
             </a:pPr>
             <a:r>
@@ -10247,14 +10432,14 @@
             <a:pPr lvl="0"/>
             <a:r>
               <a:rPr/>
-              <a:t>Produces an equation for prediction with slope and intercept parameters</a:t>
+              <a:t>Produces an equation for prediction, with slope and intercept parameters</a:t>
             </a:r>
           </a:p>
         </p:txBody>
       </p:sp>
       <p:pic>
         <p:nvPicPr>
-          <p:cNvPr descr="correlation_linear_models_lecture_files/figure-pptx/l09-01-1.png" id="0" name="Picture 1"/>
+          <p:cNvPr descr="correlation_linear_models_lecture_files/figure-pptx/unnamed-chunk-3-1.png" id="0" name="Picture 1"/>
           <p:cNvPicPr>
             <a:picLocks noGrp="1" noChangeAspect="1"/>
           </p:cNvPicPr>
@@ -10287,7 +10472,7 @@
 </p:sld>
 </file>
 
-<file path=ppt/slides/slide6.xml><?xml version="1.0" encoding="utf-8"?>
+<file path=ppt/slides/slide7.xml><?xml version="1.0" encoding="utf-8"?>
 <p:sld xmlns:a="http://schemas.openxmlformats.org/drawingml/2006/main" xmlns:r="http://schemas.openxmlformats.org/officeDocument/2006/relationships" xmlns:p="http://schemas.openxmlformats.org/presentationml/2006/main">
   <p:cSld>
     <p:spTree>
@@ -10317,6 +10502,58 @@
         <p:spPr>
           <a:xfrm>
             <a:off x="0" y="0"/>
+            <a:ext cx="9144000" cy="582780"/>
+          </a:xfrm>
+        </p:spPr>
+        <p:txBody>
+          <a:bodyPr/>
+          <a:lstStyle/>
+          <a:p>
+            <a:pPr lvl="0" indent="0" marL="0">
+              <a:buNone/>
+            </a:pPr>
+            <a:r>
+              <a:rPr/>
+              <a:t>Part 3 · Correlation Analysis</a:t>
+            </a:r>
+          </a:p>
+        </p:txBody>
+      </p:sp>
+    </p:spTree>
+  </p:cSld>
+</p:sld>
+</file>
+
+<file path=ppt/slides/slide8.xml><?xml version="1.0" encoding="utf-8"?>
+<p:sld xmlns:a="http://schemas.openxmlformats.org/drawingml/2006/main" xmlns:r="http://schemas.openxmlformats.org/officeDocument/2006/relationships" xmlns:p="http://schemas.openxmlformats.org/presentationml/2006/main">
+  <p:cSld>
+    <p:spTree>
+      <p:nvGrpSpPr>
+        <p:cNvPr id="1" name=""/>
+        <p:cNvGrpSpPr/>
+        <p:nvPr/>
+      </p:nvGrpSpPr>
+      <p:grpSpPr>
+        <a:xfrm>
+          <a:off x="0" y="0"/>
+          <a:ext cx="0" cy="0"/>
+          <a:chOff x="0" y="0"/>
+          <a:chExt cx="0" cy="0"/>
+        </a:xfrm>
+      </p:grpSpPr>
+      <p:sp>
+        <p:nvSpPr>
+          <p:cNvPr id="2" name="Title 1"/>
+          <p:cNvSpPr>
+            <a:spLocks noGrp="1"/>
+          </p:cNvSpPr>
+          <p:nvPr>
+            <p:ph type="title"/>
+          </p:nvPr>
+        </p:nvSpPr>
+        <p:spPr>
+          <a:xfrm>
+            <a:off x="0" y="0"/>
             <a:ext cx="9144000" cy="602780"/>
           </a:xfrm>
           <a:solidFill>
@@ -10331,12 +10568,8 @@
               <a:buNone/>
             </a:pPr>
             <a:r>
-              <a:rPr b="1"/>
-              <a:t>Lecture 9:</a:t>
-            </a:r>
-            <a:r>
-              <a:rPr/>
-              <a:t> Correlation Analysis</a:t>
+              <a:rPr/>
+              <a:t>What Is Correlation?</a:t>
             </a:r>
           </a:p>
         </p:txBody>
@@ -10359,18 +10592,6 @@
               <a:lstStyle/>
               <a:p>
                 <a:pPr lvl="0" indent="0" marL="0">
-                  <a:spcBef>
-                    <a:spcPts val="3000"/>
-                  </a:spcBef>
-                  <a:buNone/>
-                </a:pPr>
-                <a:r>
-                  <a:rPr b="1"/>
-                  <a:t>What Is Correlation?</a:t>
-                </a:r>
-              </a:p>
-              <a:p>
-                <a:pPr lvl="0" indent="0" marL="0">
                   <a:buNone/>
                 </a:pPr>
                 <a:r>
@@ -10386,7 +10607,7 @@
                 <a:pPr lvl="0"/>
                 <a:r>
                   <a:rPr/>
-                  <a:t>Ranges from -1 to +1</a:t>
+                  <a:t>Ranges from −1 to +1</a:t>
                 </a:r>
               </a:p>
               <a:p>
@@ -10407,7 +10628,7 @@
                 <a:pPr lvl="0"/>
                 <a:r>
                   <a:rPr/>
-                  <a:t>-1 indicates perfect negative correlation</a:t>
+                  <a:t>−1 indicates perfect negative correlation</a:t>
                 </a:r>
               </a:p>
               <a:p>
@@ -10862,7 +11083,7 @@
       </mc:AlternateContent>
       <p:pic>
         <p:nvPicPr>
-          <p:cNvPr descr="correlation_linear_models_lecture_files/figure-pptx/overview-plot-1i-1.png" id="0" name="Picture 1"/>
+          <p:cNvPr descr="correlation_linear_models_lecture_files/figure-pptx/unnamed-chunk-4-1.png" id="0" name="Picture 1"/>
           <p:cNvPicPr>
             <a:picLocks noGrp="1" noChangeAspect="1"/>
           </p:cNvPicPr>
@@ -10876,481 +11097,8 @@
         </p:blipFill>
         <p:spPr bwMode="auto">
           <a:xfrm>
-            <a:off x="6121400" y="812800"/>
-            <a:ext cx="2781300" cy="4165600"/>
-          </a:xfrm>
-          <a:prstGeom prst="rect">
-            <a:avLst/>
-          </a:prstGeom>
-          <a:noFill/>
-          <a:ln w="9525">
-            <a:noFill/>
-            <a:headEnd/>
-            <a:tailEnd/>
-          </a:ln>
-        </p:spPr>
-      </p:pic>
-    </p:spTree>
-  </p:cSld>
-</p:sld>
-</file>
-
-<file path=ppt/slides/slide7.xml><?xml version="1.0" encoding="utf-8"?>
-<p:sld xmlns:a="http://schemas.openxmlformats.org/drawingml/2006/main" xmlns:r="http://schemas.openxmlformats.org/officeDocument/2006/relationships" xmlns:p="http://schemas.openxmlformats.org/presentationml/2006/main">
-  <p:cSld>
-    <p:spTree>
-      <p:nvGrpSpPr>
-        <p:cNvPr id="1" name=""/>
-        <p:cNvGrpSpPr/>
-        <p:nvPr/>
-      </p:nvGrpSpPr>
-      <p:grpSpPr>
-        <a:xfrm>
-          <a:off x="0" y="0"/>
-          <a:ext cx="0" cy="0"/>
-          <a:chOff x="0" y="0"/>
-          <a:chExt cx="0" cy="0"/>
-        </a:xfrm>
-      </p:grpSpPr>
-      <p:sp>
-        <p:nvSpPr>
-          <p:cNvPr id="2" name="Title 1"/>
-          <p:cNvSpPr>
-            <a:spLocks noGrp="1"/>
-          </p:cNvSpPr>
-          <p:nvPr>
-            <p:ph type="title"/>
-          </p:nvPr>
-        </p:nvSpPr>
-        <p:spPr>
-          <a:xfrm>
-            <a:off x="0" y="0"/>
-            <a:ext cx="9144000" cy="582780"/>
-          </a:xfrm>
-        </p:spPr>
-        <p:txBody>
-          <a:bodyPr/>
-          <a:lstStyle/>
-          <a:p>
-            <a:pPr lvl="0" indent="0" marL="0">
-              <a:buNone/>
-            </a:pPr>
-            <a:r>
-              <a:rPr b="1"/>
-              <a:t>Lecture 9:</a:t>
-            </a:r>
-            <a:r>
-              <a:rPr/>
-              <a:t> Correlation Analysis</a:t>
-            </a:r>
-          </a:p>
-        </p:txBody>
-      </p:sp>
-      <mc:AlternateContent xmlns:mc="http://schemas.openxmlformats.org/markup-compatibility/2006">
-        <mc:Choice xmlns:a14="http://schemas.microsoft.com/office/drawing/2010/main" Requires="a14">
-          <p:sp>
-            <p:nvSpPr>
-              <p:cNvPr id="3" name="Content Placeholder 2"/>
-              <p:cNvSpPr>
-                <a:spLocks noGrp="1"/>
-              </p:cNvSpPr>
-              <p:nvPr>
-                <p:ph idx="1"/>
-              </p:nvPr>
-            </p:nvSpPr>
-            <p:spPr/>
-            <p:txBody>
-              <a:bodyPr/>
-              <a:lstStyle/>
-              <a:p>
-                <a:pPr lvl="0" indent="0" marL="0">
-                  <a:spcBef>
-                    <a:spcPts val="3000"/>
-                  </a:spcBef>
-                  <a:buNone/>
-                </a:pPr>
-                <a:r>
-                  <a:rPr b="1"/>
-                  <a:t>Example 16.1: Flipping the Bird</a:t>
-                </a:r>
-              </a:p>
-              <a:p>
-                <a:pPr lvl="0" indent="0" marL="0">
-                  <a:buNone/>
-                </a:pPr>
-                <a:r>
-                  <a:rPr/>
-                  <a:t>Nazca boobies (</a:t>
-                </a:r>
-                <a:r>
-                  <a:rPr i="1"/>
-                  <a:t>Sula granti</a:t>
-                </a:r>
-                <a:r>
-                  <a:rPr/>
-                  <a:t>) - Do aggressive behaviors as a chick predict future aggressive behavior as an adult?</a:t>
-                </a:r>
-              </a:p>
-              <a:p>
-                <a:pPr lvl="0"/>
-                <a:r>
-                  <a:rPr/>
-                  <a:t>correlation is r = 0.534 - moderate positive relationship</a:t>
-                </a:r>
-              </a:p>
-              <a:p>
-                <a:pPr lvl="0"/>
-                <a:r>
-                  <a:rPr/>
-                  <a:t>p-value = 0.007 correlation is statistically significant.</a:t>
-                </a:r>
-              </a:p>
-              <a:p>
-                <a:pPr lvl="0" indent="0" marL="0">
-                  <a:buNone/>
-                </a:pPr>
-                <a:r>
-                  <a:rPr/>
-                  <a:t>For a Pearson correlation coefficient (r) of 0.53372:</a:t>
-                </a:r>
-              </a:p>
-              <a:p>
-                <a:pPr lvl="0"/>
-                <a:r>
-                  <a:rPr/>
-                  <a:t>This is r (not rho as Spearman nonparametric below), as indicated by “cor” in your output</a:t>
-                </a:r>
-              </a:p>
-              <a:p>
-                <a:pPr lvl="0"/>
-                <a:r>
-                  <a:rPr/>
-                  <a:t>To determine the amount of variation explained, you square this value: r² = 0.53372² = 0.2849 (or approximately 28.49%)</a:t>
-                </a:r>
-              </a:p>
-              <a:p>
-                <a:pPr lvl="0"/>
-                <a:r>
-                  <a:rPr/>
-                  <a:t>means about 28.49% of the variance in one variable can be explained by the other variable</a:t>
-                </a:r>
-              </a:p>
-              <a:p>
-                <a:pPr lvl="0" indent="0" marL="0">
-                  <a:spcBef>
-                    <a:spcPts val="3000"/>
-                  </a:spcBef>
-                  <a:buNone/>
-                </a:pPr>
-                <a:r>
-                  <a:rPr b="1"/>
-                  <a:t>Note that it is tested by a t test: </a:t>
-                </a:r>
-                <a14:m>
-                  <m:oMath xmlns:m="http://schemas.openxmlformats.org/officeDocument/2006/math">
-                    <m:r>
-                      <m:rPr>
-                        <m:nor/>
-                        <m:sty m:val="p"/>
-                      </m:rPr>
-                      <m:t>t</m:t>
-                    </m:r>
-                    <m:r>
-                      <m:rPr>
-                        <m:sty m:val="p"/>
-                      </m:rPr>
-                      <m:t>=</m:t>
-                    </m:r>
-                    <m:f>
-                      <m:fPr>
-                        <m:type m:val="bar"/>
-                      </m:fPr>
-                      <m:num>
-                        <m:r>
-                          <m:t>r</m:t>
-                        </m:r>
-                      </m:num>
-                      <m:den>
-                        <m:r>
-                          <m:t>S</m:t>
-                        </m:r>
-                        <m:sSub>
-                          <m:e>
-                            <m:r>
-                              <m:t>E</m:t>
-                            </m:r>
-                          </m:e>
-                          <m:sub>
-                            <m:r>
-                              <m:t>r</m:t>
-                            </m:r>
-                          </m:sub>
-                        </m:sSub>
-                      </m:den>
-                    </m:f>
-                  </m:oMath>
-                </a14:m>
-              </a:p>
-              <a:p>
-                <a:pPr lvl="0" indent="0">
-                  <a:buNone/>
-                </a:pPr>
-                <a:r>
-                  <a:rPr>
-                    <a:latin typeface="Courier"/>
-                  </a:rPr>
-                  <a:t>
-    Pearson's product-moment correlation
-data:  booby_data$visits_as_nestling and booby_data$future_aggression
-t = 2.9603, df = 22, p-value = 0.007229
-alternative hypothesis: true correlation is not equal to 0
-95 percent confidence interval:
- 0.1660840 0.7710999
-sample estimates:
-      cor 
-0.5337225 </a:t>
-                </a:r>
-              </a:p>
-            </p:txBody>
-          </p:sp>
-        </mc:Choice>
-      </mc:AlternateContent>
-    </p:spTree>
-  </p:cSld>
-</p:sld>
-</file>
-
-<file path=ppt/slides/slide8.xml><?xml version="1.0" encoding="utf-8"?>
-<p:sld xmlns:a="http://schemas.openxmlformats.org/drawingml/2006/main" xmlns:r="http://schemas.openxmlformats.org/officeDocument/2006/relationships" xmlns:p="http://schemas.openxmlformats.org/presentationml/2006/main">
-  <p:cSld>
-    <p:spTree>
-      <p:nvGrpSpPr>
-        <p:cNvPr id="1" name=""/>
-        <p:cNvGrpSpPr/>
-        <p:nvPr/>
-      </p:nvGrpSpPr>
-      <p:grpSpPr>
-        <a:xfrm>
-          <a:off x="0" y="0"/>
-          <a:ext cx="0" cy="0"/>
-          <a:chOff x="0" y="0"/>
-          <a:chExt cx="0" cy="0"/>
-        </a:xfrm>
-      </p:grpSpPr>
-      <p:sp>
-        <p:nvSpPr>
-          <p:cNvPr id="2" name="Title 1"/>
-          <p:cNvSpPr>
-            <a:spLocks noGrp="1"/>
-          </p:cNvSpPr>
-          <p:nvPr>
-            <p:ph type="title"/>
-          </p:nvPr>
-        </p:nvSpPr>
-        <p:spPr>
-          <a:xfrm>
-            <a:off x="0" y="0"/>
-            <a:ext cx="9144000" cy="602780"/>
-          </a:xfrm>
-          <a:solidFill>
-            <a:srgbClr val="70121D"/>
-          </a:solidFill>
-        </p:spPr>
-        <p:txBody>
-          <a:bodyPr/>
-          <a:lstStyle/>
-          <a:p>
-            <a:pPr lvl="0" indent="0" marL="0">
-              <a:buNone/>
-            </a:pPr>
-            <a:r>
-              <a:rPr b="1"/>
-              <a:t>Lecture 9:</a:t>
-            </a:r>
-            <a:r>
-              <a:rPr/>
-              <a:t> Correlation Analysis</a:t>
-            </a:r>
-          </a:p>
-        </p:txBody>
-      </p:sp>
-      <mc:AlternateContent xmlns:mc="http://schemas.openxmlformats.org/markup-compatibility/2006">
-        <mc:Choice xmlns:a14="http://schemas.microsoft.com/office/drawing/2010/main" Requires="a14">
-          <p:sp>
-            <p:nvSpPr>
-              <p:cNvPr id="3" name="Content Placeholder 2"/>
-              <p:cNvSpPr>
-                <a:spLocks noGrp="1"/>
-              </p:cNvSpPr>
-              <p:nvPr>
-                <p:ph idx="1" sz="half"/>
-              </p:nvPr>
-            </p:nvSpPr>
-            <p:spPr/>
-            <p:txBody>
-              <a:bodyPr/>
-              <a:lstStyle/>
-              <a:p>
-                <a:pPr lvl="0" indent="0" marL="0">
-                  <a:spcBef>
-                    <a:spcPts val="3000"/>
-                  </a:spcBef>
-                  <a:buNone/>
-                </a:pPr>
-                <a:r>
-                  <a:rPr b="1"/>
-                  <a:t>Example 16.1: Flipping the Bird</a:t>
-                </a:r>
-              </a:p>
-              <a:p>
-                <a:pPr lvl="0" indent="0" marL="0">
-                  <a:buNone/>
-                </a:pPr>
-                <a:r>
-                  <a:rPr b="1"/>
-                  <a:t>Interpretation:</a:t>
-                </a:r>
-                <a:r>
-                  <a:rPr/>
-                  <a:t> The correlation coefficient of r = 0.534 suggests that Nazca boobies who experienced more visits from non-parent adults as nestlings tend to display more aggressive behavior as adults. This supports the hypothesis that early experiences influence adult behavior patterns in this species.</a:t>
-                </a:r>
-              </a:p>
-              <a:p>
-                <a:pPr lvl="0" indent="0" marL="0">
-                  <a:buNone/>
-                </a:pPr>
-                <a:r>
-                  <a:rPr b="1"/>
-                  <a:t>Standard Error:</a:t>
-                </a:r>
-              </a:p>
-              <a:p>
-                <a:pPr lvl="0" indent="0" marL="0">
-                  <a:spcBef>
-                    <a:spcPts val="3000"/>
-                  </a:spcBef>
-                  <a:buNone/>
-                </a:pPr>
-                <a14:m>
-                  <m:oMath xmlns:m="http://schemas.openxmlformats.org/officeDocument/2006/math">
-                    <m:sSub>
-                      <m:e>
-                        <m:r>
-                          <m:rPr>
-                            <m:nor/>
-                            <m:sty m:val="p"/>
-                          </m:rPr>
-                          <m:t>SE</m:t>
-                        </m:r>
-                      </m:e>
-                      <m:sub>
-                        <m:r>
-                          <m:t>r</m:t>
-                        </m:r>
-                      </m:sub>
-                    </m:sSub>
-                    <m:r>
-                      <m:rPr>
-                        <m:sty m:val="p"/>
-                      </m:rPr>
-                      <m:t>=</m:t>
-                    </m:r>
-                    <m:rad>
-                      <m:radPr>
-                        <m:degHide m:val="on"/>
-                      </m:radPr>
-                      <m:deg/>
-                      <m:e>
-                        <m:f>
-                          <m:fPr>
-                            <m:type m:val="bar"/>
-                          </m:fPr>
-                          <m:num>
-                            <m:r>
-                              <m:t>1</m:t>
-                            </m:r>
-                            <m:r>
-                              <m:rPr>
-                                <m:sty m:val="p"/>
-                              </m:rPr>
-                              <m:t>−</m:t>
-                            </m:r>
-                            <m:sSup>
-                              <m:e>
-                                <m:r>
-                                  <m:t>r</m:t>
-                                </m:r>
-                              </m:e>
-                              <m:sup>
-                                <m:r>
-                                  <m:t>2</m:t>
-                                </m:r>
-                              </m:sup>
-                            </m:sSup>
-                          </m:num>
-                          <m:den>
-                            <m:r>
-                              <m:t>n</m:t>
-                            </m:r>
-                            <m:r>
-                              <m:rPr>
-                                <m:sty m:val="p"/>
-                              </m:rPr>
-                              <m:t>−</m:t>
-                            </m:r>
-                            <m:r>
-                              <m:t>2</m:t>
-                            </m:r>
-                          </m:den>
-                        </m:f>
-                      </m:e>
-                    </m:rad>
-                  </m:oMath>
-                </a14:m>
-              </a:p>
-              <a:p>
-                <a:pPr lvl="0" indent="0" marL="0">
-                  <a:spcBef>
-                    <a:spcPts val="3000"/>
-                  </a:spcBef>
-                  <a:buNone/>
-                </a:pPr>
-                <a:r>
-                  <a:rPr b="1"/>
-                  <a:t>SE = 0.180</a:t>
-                </a:r>
-              </a:p>
-              <a:p>
-                <a:pPr lvl="0" indent="0" marL="0">
-                  <a:buNone/>
-                </a:pPr>
-                <a:r>
-                  <a:rPr/>
-                  <a:t>Need to be sure relationship is not curved - note below</a:t>
-                </a:r>
-              </a:p>
-            </p:txBody>
-          </p:sp>
-        </mc:Choice>
-      </mc:AlternateContent>
-      <p:pic>
-        <p:nvPicPr>
-          <p:cNvPr descr="correlation_linear_models_lecture_files/figure-pptx/overview-plot-1k-1.png" id="0" name="Picture 1"/>
-          <p:cNvPicPr>
-            <a:picLocks noGrp="1" noChangeAspect="1"/>
-          </p:cNvPicPr>
-          <p:nvPr/>
-        </p:nvPicPr>
-        <p:blipFill>
-          <a:blip r:embed="rId2"/>
-          <a:stretch>
-            <a:fillRect/>
-          </a:stretch>
-        </p:blipFill>
-        <p:spPr bwMode="auto">
-          <a:xfrm>
-            <a:off x="6121400" y="1155700"/>
-            <a:ext cx="2781300" cy="3479800"/>
+            <a:off x="6121400" y="1041400"/>
+            <a:ext cx="2781300" cy="3708400"/>
           </a:xfrm>
           <a:prstGeom prst="rect">
             <a:avLst/>
@@ -11412,101 +11160,146 @@
               <a:buNone/>
             </a:pPr>
             <a:r>
-              <a:rPr b="1"/>
-              <a:t>Lecture 9:</a:t>
-            </a:r>
-            <a:r>
-              <a:rPr/>
-              <a:t> Correlation Analysis</a:t>
-            </a:r>
-          </a:p>
-        </p:txBody>
-      </p:sp>
-      <p:sp>
-        <p:nvSpPr>
-          <p:cNvPr id="3" name="Content Placeholder 2"/>
-          <p:cNvSpPr>
-            <a:spLocks noGrp="1"/>
-          </p:cNvSpPr>
-          <p:nvPr>
-            <p:ph idx="1" sz="half"/>
-          </p:nvPr>
-        </p:nvSpPr>
-        <p:spPr/>
-        <p:txBody>
-          <a:bodyPr/>
-          <a:lstStyle/>
-          <a:p>
-            <a:pPr lvl="0" indent="0" marL="0">
-              <a:spcBef>
-                <a:spcPts val="3000"/>
-              </a:spcBef>
-              <a:buNone/>
-            </a:pPr>
-            <a:r>
-              <a:rPr b="1"/>
-              <a:t>Testing Assumptions for Correlation</a:t>
-            </a:r>
-          </a:p>
-          <a:p>
-            <a:pPr lvl="0" indent="0" marL="0">
-              <a:buNone/>
-            </a:pPr>
-            <a:r>
-              <a:rPr/>
-              <a:t>As described in Section 16.3, correlation analysis has key assumptions:</a:t>
-            </a:r>
-          </a:p>
-          <a:p>
-            <a:pPr lvl="0" indent="-342900" marL="342900">
-              <a:buAutoNum type="arabicPeriod"/>
-            </a:pPr>
-            <a:r>
-              <a:rPr b="1"/>
-              <a:t>Random sampling</a:t>
-            </a:r>
-            <a:r>
-              <a:rPr/>
-              <a:t>: Observations should be a random sample from the population</a:t>
-            </a:r>
-          </a:p>
-          <a:p>
-            <a:pPr lvl="0" indent="-342900" marL="342900">
-              <a:buAutoNum type="arabicPeriod"/>
-            </a:pPr>
-            <a:r>
-              <a:rPr b="1"/>
-              <a:t>Bivariate normality</a:t>
-            </a:r>
-            <a:r>
-              <a:rPr/>
-              <a:t>: Both variables follow a normal distribution, and their joint distribution is bivariate normal</a:t>
-            </a:r>
-          </a:p>
-          <a:p>
-            <a:pPr lvl="0" indent="-342900" marL="342900">
-              <a:buAutoNum type="arabicPeriod"/>
-            </a:pPr>
-            <a:r>
-              <a:rPr b="1"/>
-              <a:t>Linear relationship</a:t>
-            </a:r>
-            <a:r>
-              <a:rPr/>
-              <a:t>: The relationship between variables is linear, not curved</a:t>
-            </a:r>
-          </a:p>
-          <a:p>
-            <a:pPr lvl="0" indent="0" marL="0">
-              <a:buNone/>
-            </a:pPr>
-            <a:r>
-              <a:rPr/>
-              <a:t>Let’s check these assumptions booby data:</a:t>
-            </a:r>
-          </a:p>
-        </p:txBody>
-      </p:sp>
+              <a:rPr/>
+              <a:t>Example 16.1: Flipping the Bird</a:t>
+            </a:r>
+          </a:p>
+        </p:txBody>
+      </p:sp>
+      <mc:AlternateContent xmlns:mc="http://schemas.openxmlformats.org/markup-compatibility/2006">
+        <mc:Choice xmlns:a14="http://schemas.microsoft.com/office/drawing/2010/main" Requires="a14">
+          <p:sp>
+            <p:nvSpPr>
+              <p:cNvPr id="3" name="Content Placeholder 2"/>
+              <p:cNvSpPr>
+                <a:spLocks noGrp="1"/>
+              </p:cNvSpPr>
+              <p:nvPr>
+                <p:ph idx="1" sz="half"/>
+              </p:nvPr>
+            </p:nvSpPr>
+            <p:spPr/>
+            <p:txBody>
+              <a:bodyPr/>
+              <a:lstStyle/>
+              <a:p>
+                <a:pPr lvl="0" indent="0" marL="0">
+                  <a:buNone/>
+                </a:pPr>
+                <a:r>
+                  <a:rPr/>
+                  <a:t>Nazca boobies (</a:t>
+                </a:r>
+                <a:r>
+                  <a:rPr i="1"/>
+                  <a:t>Sula granti</a:t>
+                </a:r>
+                <a:r>
+                  <a:rPr/>
+                  <a:t>) — do aggressive behaviors as a chick predict future aggressive behavior as an adult?</a:t>
+                </a:r>
+              </a:p>
+              <a:p>
+                <a:pPr lvl="0"/>
+                <a:r>
+                  <a:rPr/>
+                  <a:t>Correlation is r = 0.534 — a moderate positive relationship</a:t>
+                </a:r>
+              </a:p>
+              <a:p>
+                <a:pPr lvl="0"/>
+                <a:r>
+                  <a:rPr/>
+                  <a:t>p-value = 0.007 — correlation is statistically significant</a:t>
+                </a:r>
+              </a:p>
+              <a:p>
+                <a:pPr lvl="0" indent="0" marL="0">
+                  <a:buNone/>
+                </a:pPr>
+                <a:r>
+                  <a:rPr/>
+                  <a:t>For a Pearson correlation coefficient (r) of 0.53372:</a:t>
+                </a:r>
+              </a:p>
+              <a:p>
+                <a:pPr lvl="0"/>
+                <a:r>
+                  <a:rPr/>
+                  <a:t>This is r (not ρ, as Spearman’s below), as indicated by “cor” in your output</a:t>
+                </a:r>
+              </a:p>
+              <a:p>
+                <a:pPr lvl="0"/>
+                <a:r>
+                  <a:rPr/>
+                  <a:t>To determine the amount of variation explained, square this value: r² = 0.53372² = 0.2849 (≈ 28.49%)</a:t>
+                </a:r>
+              </a:p>
+              <a:p>
+                <a:pPr lvl="0"/>
+                <a:r>
+                  <a:rPr/>
+                  <a:t>Means about 28.49% of the variance in one variable can be explained by the other</a:t>
+                </a:r>
+              </a:p>
+              <a:p>
+                <a:pPr lvl="0" indent="0" marL="0">
+                  <a:buNone/>
+                </a:pPr>
+                <a:r>
+                  <a:rPr/>
+                  <a:t>Tested by a t-test: </a:t>
+                </a:r>
+                <a14:m>
+                  <m:oMath xmlns:m="http://schemas.openxmlformats.org/officeDocument/2006/math">
+                    <m:r>
+                      <m:rPr>
+                        <m:nor/>
+                        <m:sty m:val="p"/>
+                      </m:rPr>
+                      <m:t>t</m:t>
+                    </m:r>
+                    <m:r>
+                      <m:rPr>
+                        <m:sty m:val="p"/>
+                      </m:rPr>
+                      <m:t>=</m:t>
+                    </m:r>
+                    <m:f>
+                      <m:fPr>
+                        <m:type m:val="bar"/>
+                      </m:fPr>
+                      <m:num>
+                        <m:r>
+                          <m:t>r</m:t>
+                        </m:r>
+                      </m:num>
+                      <m:den>
+                        <m:r>
+                          <m:t>S</m:t>
+                        </m:r>
+                        <m:sSub>
+                          <m:e>
+                            <m:r>
+                              <m:t>E</m:t>
+                            </m:r>
+                          </m:e>
+                          <m:sub>
+                            <m:r>
+                              <m:t>r</m:t>
+                            </m:r>
+                          </m:sub>
+                        </m:sSub>
+                      </m:den>
+                    </m:f>
+                  </m:oMath>
+                </a14:m>
+              </a:p>
+            </p:txBody>
+          </p:sp>
+        </mc:Choice>
+      </mc:AlternateContent>
       <p:sp>
         <p:nvSpPr>
           <p:cNvPr id="4" name="Content Placeholder 3"/>
@@ -11530,23 +11323,15 @@
                 <a:latin typeface="Courier"/>
               </a:rPr>
               <a:t>
-    Shapiro-Wilk normality test
-data:  booby_data$visits_as_nestling
-W = 0.95783, p-value = 0.3965</a:t>
-            </a:r>
-          </a:p>
-          <a:p>
-            <a:pPr lvl="0" indent="0">
-              <a:buNone/>
-            </a:pPr>
-            <a:r>
-              <a:rPr>
-                <a:latin typeface="Courier"/>
-              </a:rPr>
-              <a:t>
-    Shapiro-Wilk normality test
-data:  booby_data$future_aggression
-W = 0.91575, p-value = 0.04709</a:t>
+    Pearson's product-moment correlation
+data:  booby_data$visits_as_nestling and booby_data$future_aggression
+t = 2.9603, df = 22, p-value = 0.007229
+alternative hypothesis: true correlation is not equal to 0
+95 percent confidence interval:
+ 0.1660840 0.7710999
+sample estimates:
+      cor 
+0.5337225 </a:t>
             </a:r>
           </a:p>
         </p:txBody>

--- a/docs/content/correlation_linear_models/correlation_linear_models_lecture.pptx
+++ b/docs/content/correlation_linear_models/correlation_linear_models_lecture.pptx
@@ -4909,8 +4909,8 @@
         </p:blipFill>
         <p:spPr bwMode="auto">
           <a:xfrm>
-            <a:off x="6680200" y="660400"/>
-            <a:ext cx="1663700" cy="4470400"/>
+            <a:off x="6769100" y="660400"/>
+            <a:ext cx="1473200" cy="3962400"/>
           </a:xfrm>
           <a:prstGeom prst="rect">
             <a:avLst/>
@@ -4923,6 +4923,38 @@
           </a:ln>
         </p:spPr>
       </p:pic>
+      <p:sp>
+        <p:nvSpPr>
+          <p:cNvPr id="1" name="TextBox 3"/>
+          <p:cNvSpPr txBox="1"/>
+          <p:nvPr>
+            <p:ph idx="1"/>
+          </p:nvPr>
+        </p:nvSpPr>
+        <p:spPr>
+          <a:xfrm>
+            <a:off x="6121400" y="4622800"/>
+            <a:ext cx="2781300" cy="508000"/>
+          </a:xfrm>
+          <a:prstGeom prst="rect">
+            <a:avLst/>
+          </a:prstGeom>
+          <a:noFill/>
+        </p:spPr>
+        <p:txBody>
+          <a:bodyPr/>
+          <a:lstStyle/>
+          <a:p>
+            <a:pPr lvl="0" indent="0" marL="0" algn="ctr">
+              <a:buNone/>
+            </a:pPr>
+            <a:r>
+              <a:rPr/>
+              <a:t>Three stacked scatterplots of lion age versus proportion black on the nose, each with a different candidate line and vertical residual segments labeled ‘Large deviations,’ ‘Smaller deviations,’ and ‘Smallest deviations,’ illustrating that least squares picks the line minimizing total squared residuals.</a:t>
+            </a:r>
+          </a:p>
+        </p:txBody>
+      </p:sp>
     </p:spTree>
   </p:cSld>
 </p:sld>
@@ -7170,7 +7202,7 @@
         </p:blipFill>
         <p:spPr bwMode="auto">
           <a:xfrm>
-            <a:off x="6121400" y="2108200"/>
+            <a:off x="6121400" y="1854200"/>
             <a:ext cx="2781300" cy="1587500"/>
           </a:xfrm>
           <a:prstGeom prst="rect">
@@ -7184,6 +7216,38 @@
           </a:ln>
         </p:spPr>
       </p:pic>
+      <p:sp>
+        <p:nvSpPr>
+          <p:cNvPr id="1" name="TextBox 3"/>
+          <p:cNvSpPr txBox="1"/>
+          <p:nvPr>
+            <p:ph idx="1"/>
+          </p:nvPr>
+        </p:nvSpPr>
+        <p:spPr>
+          <a:xfrm>
+            <a:off x="6121400" y="4622800"/>
+            <a:ext cx="2781300" cy="508000"/>
+          </a:xfrm>
+          <a:prstGeom prst="rect">
+            <a:avLst/>
+          </a:prstGeom>
+          <a:noFill/>
+        </p:spPr>
+        <p:txBody>
+          <a:bodyPr/>
+          <a:lstStyle/>
+          <a:p>
+            <a:pPr lvl="0" indent="0" marL="0" algn="ctr">
+              <a:buNone/>
+            </a:pPr>
+            <a:r>
+              <a:rPr/>
+              <a:t>Diagram of the regression line mu_yi = beta0 + beta1*xi running through X-Y space, with small normal-distribution curves drawn at two X values (x1 and x2) around the line to show that Y is assumed to be normally distributed around the true regression line at every value of X.</a:t>
+            </a:r>
+          </a:p>
+        </p:txBody>
+      </p:sp>
     </p:spTree>
   </p:cSld>
 </p:sld>
@@ -7491,7 +7555,7 @@
         </p:blipFill>
         <p:spPr bwMode="auto">
           <a:xfrm>
-            <a:off x="6121400" y="1930400"/>
+            <a:off x="6121400" y="1676400"/>
             <a:ext cx="2781300" cy="1943100"/>
           </a:xfrm>
           <a:prstGeom prst="rect">
@@ -7505,6 +7569,38 @@
           </a:ln>
         </p:spPr>
       </p:pic>
+      <p:sp>
+        <p:nvSpPr>
+          <p:cNvPr id="1" name="TextBox 3"/>
+          <p:cNvSpPr txBox="1"/>
+          <p:nvPr>
+            <p:ph idx="1"/>
+          </p:nvPr>
+        </p:nvSpPr>
+        <p:spPr>
+          <a:xfrm>
+            <a:off x="6121400" y="4622800"/>
+            <a:ext cx="2781300" cy="508000"/>
+          </a:xfrm>
+          <a:prstGeom prst="rect">
+            <a:avLst/>
+          </a:prstGeom>
+          <a:noFill/>
+        </p:spPr>
+        <p:txBody>
+          <a:bodyPr/>
+          <a:lstStyle/>
+          <a:p>
+            <a:pPr lvl="0" indent="0" marL="0" algn="ctr">
+              <a:buNone/>
+            </a:pPr>
+            <a:r>
+              <a:rPr/>
+              <a:t>Scatterplot with a fitted least-squares regression line, labeled to show an observed point y_i, its predicted value y-hat_i on the line directly below it, and the vertical gap between them marked as the residual (y_i minus y-hat_i), with dashed lines also marking the means x-bar and y-bar.</a:t>
+            </a:r>
+          </a:p>
+        </p:txBody>
+      </p:sp>
     </p:spTree>
   </p:cSld>
 </p:sld>
@@ -8228,7 +8324,7 @@
         </p:blipFill>
         <p:spPr bwMode="auto">
           <a:xfrm>
-            <a:off x="6121400" y="2374900"/>
+            <a:off x="6121400" y="2120900"/>
             <a:ext cx="2781300" cy="1028700"/>
           </a:xfrm>
           <a:prstGeom prst="rect">
@@ -8242,6 +8338,38 @@
           </a:ln>
         </p:spPr>
       </p:pic>
+      <p:sp>
+        <p:nvSpPr>
+          <p:cNvPr id="1" name="TextBox 3"/>
+          <p:cNvSpPr txBox="1"/>
+          <p:nvPr>
+            <p:ph idx="1"/>
+          </p:nvPr>
+        </p:nvSpPr>
+        <p:spPr>
+          <a:xfrm>
+            <a:off x="6121400" y="4622800"/>
+            <a:ext cx="2781300" cy="508000"/>
+          </a:xfrm>
+          <a:prstGeom prst="rect">
+            <a:avLst/>
+          </a:prstGeom>
+          <a:noFill/>
+        </p:spPr>
+        <p:txBody>
+          <a:bodyPr/>
+          <a:lstStyle/>
+          <a:p>
+            <a:pPr lvl="0" indent="0" marL="0" algn="ctr">
+              <a:buNone/>
+            </a:pPr>
+            <a:r>
+              <a:rPr/>
+              <a:t>Table of formulas for the ordinary least squares estimates and standard errors of the slope (beta1), intercept (beta0), and error term (epsilon) in simple linear regression, each row giving the OLS estimate formula and its corresponding standard error formula.</a:t>
+            </a:r>
+          </a:p>
+        </p:txBody>
+      </p:sp>
     </p:spTree>
   </p:cSld>
 </p:sld>
@@ -8387,7 +8515,7 @@
         </p:blipFill>
         <p:spPr bwMode="auto">
           <a:xfrm>
-            <a:off x="6121400" y="2425700"/>
+            <a:off x="6121400" y="2171700"/>
             <a:ext cx="2781300" cy="927100"/>
           </a:xfrm>
           <a:prstGeom prst="rect">
@@ -8401,6 +8529,38 @@
           </a:ln>
         </p:spPr>
       </p:pic>
+      <p:sp>
+        <p:nvSpPr>
+          <p:cNvPr id="1" name="TextBox 3"/>
+          <p:cNvSpPr txBox="1"/>
+          <p:nvPr>
+            <p:ph idx="1"/>
+          </p:nvPr>
+        </p:nvSpPr>
+        <p:spPr>
+          <a:xfrm>
+            <a:off x="6121400" y="4622800"/>
+            <a:ext cx="2781300" cy="508000"/>
+          </a:xfrm>
+          <a:prstGeom prst="rect">
+            <a:avLst/>
+          </a:prstGeom>
+          <a:noFill/>
+        </p:spPr>
+        <p:txBody>
+          <a:bodyPr/>
+          <a:lstStyle/>
+          <a:p>
+            <a:pPr lvl="0" indent="0" marL="0" algn="ctr">
+              <a:buNone/>
+            </a:pPr>
+            <a:r>
+              <a:rPr/>
+              <a:t>Two side-by-side scatterplots (a) and (b) each with a fitted regression line and one point marked with its observed value y_i and predicted value y-hat_i, illustrating how the residual (the gap between them) varies from point to point and feeds into partitioning total variation.</a:t>
+            </a:r>
+          </a:p>
+        </p:txBody>
+      </p:sp>
     </p:spTree>
   </p:cSld>
 </p:sld>
@@ -8769,7 +8929,7 @@
         </p:blipFill>
         <p:spPr bwMode="auto">
           <a:xfrm>
-            <a:off x="6121400" y="2425700"/>
+            <a:off x="6121400" y="2171700"/>
             <a:ext cx="2781300" cy="927100"/>
           </a:xfrm>
           <a:prstGeom prst="rect">
@@ -8783,6 +8943,38 @@
           </a:ln>
         </p:spPr>
       </p:pic>
+      <p:sp>
+        <p:nvSpPr>
+          <p:cNvPr id="1" name="TextBox 3"/>
+          <p:cNvSpPr txBox="1"/>
+          <p:nvPr>
+            <p:ph idx="1"/>
+          </p:nvPr>
+        </p:nvSpPr>
+        <p:spPr>
+          <a:xfrm>
+            <a:off x="6121400" y="4622800"/>
+            <a:ext cx="2781300" cy="508000"/>
+          </a:xfrm>
+          <a:prstGeom prst="rect">
+            <a:avLst/>
+          </a:prstGeom>
+          <a:noFill/>
+        </p:spPr>
+        <p:txBody>
+          <a:bodyPr/>
+          <a:lstStyle/>
+          <a:p>
+            <a:pPr lvl="0" indent="0" marL="0" algn="ctr">
+              <a:buNone/>
+            </a:pPr>
+            <a:r>
+              <a:rPr/>
+              <a:t>Two side-by-side scatterplots (a) and (b) each with a fitted regression line and one point marked with its observed value y_i and predicted value y-hat_i, illustrating how the residual (the gap between them) varies from point to point and feeds into partitioning total variation.</a:t>
+            </a:r>
+          </a:p>
+        </p:txBody>
+      </p:sp>
     </p:spTree>
   </p:cSld>
 </p:sld>
@@ -9021,7 +9213,7 @@
         </p:blipFill>
         <p:spPr bwMode="auto">
           <a:xfrm>
-            <a:off x="6121400" y="2438400"/>
+            <a:off x="6121400" y="2184400"/>
             <a:ext cx="2781300" cy="914400"/>
           </a:xfrm>
           <a:prstGeom prst="rect">
@@ -9035,6 +9227,38 @@
           </a:ln>
         </p:spPr>
       </p:pic>
+      <p:sp>
+        <p:nvSpPr>
+          <p:cNvPr id="1" name="TextBox 3"/>
+          <p:cNvSpPr txBox="1"/>
+          <p:nvPr>
+            <p:ph idx="1"/>
+          </p:nvPr>
+        </p:nvSpPr>
+        <p:spPr>
+          <a:xfrm>
+            <a:off x="6121400" y="4622800"/>
+            <a:ext cx="2781300" cy="508000"/>
+          </a:xfrm>
+          <a:prstGeom prst="rect">
+            <a:avLst/>
+          </a:prstGeom>
+          <a:noFill/>
+        </p:spPr>
+        <p:txBody>
+          <a:bodyPr/>
+          <a:lstStyle/>
+          <a:p>
+            <a:pPr lvl="0" indent="0" marL="0" algn="ctr">
+              <a:buNone/>
+            </a:pPr>
+            <a:r>
+              <a:rPr/>
+              <a:t>ANOVA table for simple linear regression listing Regression, Residual, and Total sources of variation with their sum-of-squares, degrees of freedom (1, n-2, n-1), mean-square, and expected-mean-square formulas.</a:t>
+            </a:r>
+          </a:p>
+        </p:txBody>
+      </p:sp>
     </p:spTree>
   </p:cSld>
 </p:sld>
@@ -9281,7 +9505,7 @@
         </p:blipFill>
         <p:spPr bwMode="auto">
           <a:xfrm>
-            <a:off x="6121400" y="1892300"/>
+            <a:off x="6121400" y="1638300"/>
             <a:ext cx="2781300" cy="1993900"/>
           </a:xfrm>
           <a:prstGeom prst="rect">
@@ -9295,6 +9519,38 @@
           </a:ln>
         </p:spPr>
       </p:pic>
+      <p:sp>
+        <p:nvSpPr>
+          <p:cNvPr id="1" name="TextBox 3"/>
+          <p:cNvSpPr txBox="1"/>
+          <p:nvPr>
+            <p:ph idx="1"/>
+          </p:nvPr>
+        </p:nvSpPr>
+        <p:spPr>
+          <a:xfrm>
+            <a:off x="6121400" y="4622800"/>
+            <a:ext cx="2781300" cy="508000"/>
+          </a:xfrm>
+          <a:prstGeom prst="rect">
+            <a:avLst/>
+          </a:prstGeom>
+          <a:noFill/>
+        </p:spPr>
+        <p:txBody>
+          <a:bodyPr/>
+          <a:lstStyle/>
+          <a:p>
+            <a:pPr lvl="0" indent="0" marL="0" algn="ctr">
+              <a:buNone/>
+            </a:pPr>
+            <a:r>
+              <a:rPr/>
+              <a:t>Four scatterplots (a)-(d) with fitted regression lines of differing steepness and fit quality, each annotated with an observed point y_i, its prediction y-hat_i, and the mean y-bar, used to compare how much regression sum-of-squares and residual sum-of-squares differ between a strong fit (a, c) and a weak fit (d).</a:t>
+            </a:r>
+          </a:p>
+        </p:txBody>
+      </p:sp>
     </p:spTree>
   </p:cSld>
 </p:sld>
@@ -9662,7 +9918,7 @@
         </p:blipFill>
         <p:spPr bwMode="auto">
           <a:xfrm>
-            <a:off x="6121400" y="2438400"/>
+            <a:off x="6121400" y="2184400"/>
             <a:ext cx="2781300" cy="914400"/>
           </a:xfrm>
           <a:prstGeom prst="rect">
@@ -9676,6 +9932,38 @@
           </a:ln>
         </p:spPr>
       </p:pic>
+      <p:sp>
+        <p:nvSpPr>
+          <p:cNvPr id="1" name="TextBox 3"/>
+          <p:cNvSpPr txBox="1"/>
+          <p:nvPr>
+            <p:ph idx="1"/>
+          </p:nvPr>
+        </p:nvSpPr>
+        <p:spPr>
+          <a:xfrm>
+            <a:off x="6121400" y="4622800"/>
+            <a:ext cx="2781300" cy="508000"/>
+          </a:xfrm>
+          <a:prstGeom prst="rect">
+            <a:avLst/>
+          </a:prstGeom>
+          <a:noFill/>
+        </p:spPr>
+        <p:txBody>
+          <a:bodyPr/>
+          <a:lstStyle/>
+          <a:p>
+            <a:pPr lvl="0" indent="0" marL="0" algn="ctr">
+              <a:buNone/>
+            </a:pPr>
+            <a:r>
+              <a:rPr/>
+              <a:t>ANOVA table for simple linear regression (same layout as the earlier version) listing Regression, Residual, and Total sources of variation with their sum-of-squares, degrees of freedom, mean-square, and expected-mean-square formulas, used here to show how sums of squares convert to mean squares.</a:t>
+            </a:r>
+          </a:p>
+        </p:txBody>
+      </p:sp>
     </p:spTree>
   </p:cSld>
 </p:sld>
@@ -10205,7 +10493,7 @@
         </p:blipFill>
         <p:spPr bwMode="auto">
           <a:xfrm>
-            <a:off x="6121400" y="2438400"/>
+            <a:off x="6121400" y="2184400"/>
             <a:ext cx="2781300" cy="914400"/>
           </a:xfrm>
           <a:prstGeom prst="rect">
@@ -10219,6 +10507,38 @@
           </a:ln>
         </p:spPr>
       </p:pic>
+      <p:sp>
+        <p:nvSpPr>
+          <p:cNvPr id="1" name="TextBox 3"/>
+          <p:cNvSpPr txBox="1"/>
+          <p:nvPr>
+            <p:ph idx="1"/>
+          </p:nvPr>
+        </p:nvSpPr>
+        <p:spPr>
+          <a:xfrm>
+            <a:off x="6121400" y="4622800"/>
+            <a:ext cx="2781300" cy="508000"/>
+          </a:xfrm>
+          <a:prstGeom prst="rect">
+            <a:avLst/>
+          </a:prstGeom>
+          <a:noFill/>
+        </p:spPr>
+        <p:txBody>
+          <a:bodyPr/>
+          <a:lstStyle/>
+          <a:p>
+            <a:pPr lvl="0" indent="0" marL="0" algn="ctr">
+              <a:buNone/>
+            </a:pPr>
+            <a:r>
+              <a:rPr/>
+              <a:t>ANOVA table for simple linear regression (same layout as the earlier version) listing Regression, Residual, and Total sources of variation with their sum-of-squares, degrees of freedom, mean-square, and expected-mean-square formulas, used here to show how sums of squares convert to mean squares.</a:t>
+            </a:r>
+          </a:p>
+        </p:txBody>
+      </p:sp>
     </p:spTree>
   </p:cSld>
 </p:sld>
